--- a/tool/PMP/temp/diagram.pptx
+++ b/tool/PMP/temp/diagram.pptx
@@ -6912,7 +6912,7 @@
                   <a:schemeClr val="bg1"/>
                 </a:solidFill>
               </a:rPr>
-              <a:t>Extreme values for Tr</a:t>
+              <a:t>Extreme values for Tr´s</a:t>
             </a:r>
             <a:endParaRPr lang="es-CO" sz="1500" baseline="-25000" dirty="0">
               <a:solidFill>
@@ -8921,66 +8921,6 @@
 </file>
 
 <file path=customXml/item1.xml><?xml version="1.0" encoding="utf-8"?>
-<?mso-contentType ?>
-<FormTemplates xmlns="http://schemas.microsoft.com/sharepoint/v3/contenttype/forms">
-  <Display>DocumentLibraryForm</Display>
-  <Edit>DocumentLibraryForm</Edit>
-  <New>DocumentLibraryForm</New>
-</FormTemplates>
-</file>
-
-<file path=customXml/item2.xml><?xml version="1.0" encoding="utf-8"?>
-<p:properties xmlns:p="http://schemas.microsoft.com/office/2006/metadata/properties" xmlns:xsi="http://www.w3.org/2001/XMLSchema-instance" xmlns:pc="http://schemas.microsoft.com/office/infopath/2007/PartnerControls">
-  <documentManagement>
-    <NotebookType xmlns="bf3e1746-bde1-4d6e-9c3f-7182572f7502" xsi:nil="true"/>
-    <CultureName xmlns="bf3e1746-bde1-4d6e-9c3f-7182572f7502" xsi:nil="true"/>
-    <Students xmlns="bf3e1746-bde1-4d6e-9c3f-7182572f7502">
-      <UserInfo>
-        <DisplayName/>
-        <AccountId xsi:nil="true"/>
-        <AccountType/>
-      </UserInfo>
-    </Students>
-    <Distribution_Groups xmlns="bf3e1746-bde1-4d6e-9c3f-7182572f7502" xsi:nil="true"/>
-    <FolderType xmlns="bf3e1746-bde1-4d6e-9c3f-7182572f7502" xsi:nil="true"/>
-    <Student_Groups xmlns="bf3e1746-bde1-4d6e-9c3f-7182572f7502">
-      <UserInfo>
-        <DisplayName/>
-        <AccountId xsi:nil="true"/>
-        <AccountType/>
-      </UserInfo>
-    </Student_Groups>
-    <Self_Registration_Enabled xmlns="bf3e1746-bde1-4d6e-9c3f-7182572f7502" xsi:nil="true"/>
-    <TeamsChannelId xmlns="bf3e1746-bde1-4d6e-9c3f-7182572f7502" xsi:nil="true"/>
-    <IsNotebookLocked xmlns="bf3e1746-bde1-4d6e-9c3f-7182572f7502" xsi:nil="true"/>
-    <DefaultSectionNames xmlns="bf3e1746-bde1-4d6e-9c3f-7182572f7502" xsi:nil="true"/>
-    <Is_Collaboration_Space_Locked xmlns="bf3e1746-bde1-4d6e-9c3f-7182572f7502" xsi:nil="true"/>
-    <Invited_Teachers xmlns="bf3e1746-bde1-4d6e-9c3f-7182572f7502" xsi:nil="true"/>
-    <Math_Settings xmlns="bf3e1746-bde1-4d6e-9c3f-7182572f7502" xsi:nil="true"/>
-    <Templates xmlns="bf3e1746-bde1-4d6e-9c3f-7182572f7502" xsi:nil="true"/>
-    <Has_Teacher_Only_SectionGroup xmlns="bf3e1746-bde1-4d6e-9c3f-7182572f7502" xsi:nil="true"/>
-    <AppVersion xmlns="bf3e1746-bde1-4d6e-9c3f-7182572f7502" xsi:nil="true"/>
-    <Invited_Students xmlns="bf3e1746-bde1-4d6e-9c3f-7182572f7502" xsi:nil="true"/>
-    <Owner xmlns="bf3e1746-bde1-4d6e-9c3f-7182572f7502">
-      <UserInfo>
-        <DisplayName/>
-        <AccountId xsi:nil="true"/>
-        <AccountType/>
-      </UserInfo>
-    </Owner>
-    <Teachers xmlns="bf3e1746-bde1-4d6e-9c3f-7182572f7502">
-      <UserInfo>
-        <DisplayName/>
-        <AccountId xsi:nil="true"/>
-        <AccountType/>
-      </UserInfo>
-    </Teachers>
-    <LMS_Mappings xmlns="bf3e1746-bde1-4d6e-9c3f-7182572f7502" xsi:nil="true"/>
-  </documentManagement>
-</p:properties>
-</file>
-
-<file path=customXml/item3.xml><?xml version="1.0" encoding="utf-8"?>
 <ct:contentTypeSchema xmlns:ct="http://schemas.microsoft.com/office/2006/metadata/contentType" xmlns:ma="http://schemas.microsoft.com/office/2006/metadata/properties/metaAttributes" ct:_="" ma:_="" ma:contentTypeName="Document" ma:contentTypeID="0x010100C089011499791B4EB69D0A56FFA67F2B" ma:contentTypeVersion="30" ma:contentTypeDescription="Create a new document." ma:contentTypeScope="" ma:versionID="f76dc847e91b26043a9f85409c9c8da8">
   <xsd:schema xmlns:xsd="http://www.w3.org/2001/XMLSchema" xmlns:xs="http://www.w3.org/2001/XMLSchema" xmlns:p="http://schemas.microsoft.com/office/2006/metadata/properties" xmlns:ns3="bf3e1746-bde1-4d6e-9c3f-7182572f7502" xmlns:ns4="14224164-2045-4b51-92bb-313d0f626d83" targetNamespace="http://schemas.microsoft.com/office/2006/metadata/properties" ma:root="true" ma:fieldsID="e77e75136ac7a83ebab10a30c2d6fe6c" ns3:_="" ns4:_="">
     <xsd:import namespace="bf3e1746-bde1-4d6e-9c3f-7182572f7502"/>
@@ -9371,10 +9311,81 @@
 </ct:contentTypeSchema>
 </file>
 
+<file path=customXml/item2.xml><?xml version="1.0" encoding="utf-8"?>
+<p:properties xmlns:p="http://schemas.microsoft.com/office/2006/metadata/properties" xmlns:xsi="http://www.w3.org/2001/XMLSchema-instance" xmlns:pc="http://schemas.microsoft.com/office/infopath/2007/PartnerControls">
+  <documentManagement>
+    <NotebookType xmlns="bf3e1746-bde1-4d6e-9c3f-7182572f7502" xsi:nil="true"/>
+    <CultureName xmlns="bf3e1746-bde1-4d6e-9c3f-7182572f7502" xsi:nil="true"/>
+    <Students xmlns="bf3e1746-bde1-4d6e-9c3f-7182572f7502">
+      <UserInfo>
+        <DisplayName/>
+        <AccountId xsi:nil="true"/>
+        <AccountType/>
+      </UserInfo>
+    </Students>
+    <Distribution_Groups xmlns="bf3e1746-bde1-4d6e-9c3f-7182572f7502" xsi:nil="true"/>
+    <FolderType xmlns="bf3e1746-bde1-4d6e-9c3f-7182572f7502" xsi:nil="true"/>
+    <Student_Groups xmlns="bf3e1746-bde1-4d6e-9c3f-7182572f7502">
+      <UserInfo>
+        <DisplayName/>
+        <AccountId xsi:nil="true"/>
+        <AccountType/>
+      </UserInfo>
+    </Student_Groups>
+    <Self_Registration_Enabled xmlns="bf3e1746-bde1-4d6e-9c3f-7182572f7502" xsi:nil="true"/>
+    <TeamsChannelId xmlns="bf3e1746-bde1-4d6e-9c3f-7182572f7502" xsi:nil="true"/>
+    <IsNotebookLocked xmlns="bf3e1746-bde1-4d6e-9c3f-7182572f7502" xsi:nil="true"/>
+    <DefaultSectionNames xmlns="bf3e1746-bde1-4d6e-9c3f-7182572f7502" xsi:nil="true"/>
+    <Is_Collaboration_Space_Locked xmlns="bf3e1746-bde1-4d6e-9c3f-7182572f7502" xsi:nil="true"/>
+    <Invited_Teachers xmlns="bf3e1746-bde1-4d6e-9c3f-7182572f7502" xsi:nil="true"/>
+    <Math_Settings xmlns="bf3e1746-bde1-4d6e-9c3f-7182572f7502" xsi:nil="true"/>
+    <Templates xmlns="bf3e1746-bde1-4d6e-9c3f-7182572f7502" xsi:nil="true"/>
+    <Has_Teacher_Only_SectionGroup xmlns="bf3e1746-bde1-4d6e-9c3f-7182572f7502" xsi:nil="true"/>
+    <AppVersion xmlns="bf3e1746-bde1-4d6e-9c3f-7182572f7502" xsi:nil="true"/>
+    <Invited_Students xmlns="bf3e1746-bde1-4d6e-9c3f-7182572f7502" xsi:nil="true"/>
+    <Owner xmlns="bf3e1746-bde1-4d6e-9c3f-7182572f7502">
+      <UserInfo>
+        <DisplayName/>
+        <AccountId xsi:nil="true"/>
+        <AccountType/>
+      </UserInfo>
+    </Owner>
+    <Teachers xmlns="bf3e1746-bde1-4d6e-9c3f-7182572f7502">
+      <UserInfo>
+        <DisplayName/>
+        <AccountId xsi:nil="true"/>
+        <AccountType/>
+      </UserInfo>
+    </Teachers>
+    <LMS_Mappings xmlns="bf3e1746-bde1-4d6e-9c3f-7182572f7502" xsi:nil="true"/>
+  </documentManagement>
+</p:properties>
+</file>
+
+<file path=customXml/item3.xml><?xml version="1.0" encoding="utf-8"?>
+<?mso-contentType ?>
+<FormTemplates xmlns="http://schemas.microsoft.com/sharepoint/v3/contenttype/forms">
+  <Display>DocumentLibraryForm</Display>
+  <Edit>DocumentLibraryForm</Edit>
+  <New>DocumentLibraryForm</New>
+</FormTemplates>
+</file>
+
 <file path=customXml/itemProps1.xml><?xml version="1.0" encoding="utf-8"?>
-<ds:datastoreItem xmlns:ds="http://schemas.openxmlformats.org/officeDocument/2006/customXml" ds:itemID="{B024FD56-CE1B-42FC-9E83-BFBF160724C6}">
+<ds:datastoreItem xmlns:ds="http://schemas.openxmlformats.org/officeDocument/2006/customXml" ds:itemID="{A129B439-51BE-4A7D-9272-FBD057297E66}">
   <ds:schemaRefs>
-    <ds:schemaRef ds:uri="http://schemas.microsoft.com/sharepoint/v3/contenttype/forms"/>
+    <ds:schemaRef ds:uri="http://schemas.microsoft.com/office/2006/metadata/contentType"/>
+    <ds:schemaRef ds:uri="http://schemas.microsoft.com/office/2006/metadata/properties/metaAttributes"/>
+    <ds:schemaRef ds:uri="http://www.w3.org/2001/XMLSchema"/>
+    <ds:schemaRef ds:uri="http://schemas.microsoft.com/office/2006/metadata/properties"/>
+    <ds:schemaRef ds:uri="bf3e1746-bde1-4d6e-9c3f-7182572f7502"/>
+    <ds:schemaRef ds:uri="14224164-2045-4b51-92bb-313d0f626d83"/>
+    <ds:schemaRef ds:uri="http://schemas.microsoft.com/office/2006/documentManagement/types"/>
+    <ds:schemaRef ds:uri="http://schemas.microsoft.com/office/infopath/2007/PartnerControls"/>
+    <ds:schemaRef ds:uri="http://schemas.openxmlformats.org/package/2006/metadata/core-properties"/>
+    <ds:schemaRef ds:uri="http://purl.org/dc/elements/1.1/"/>
+    <ds:schemaRef ds:uri="http://purl.org/dc/terms/"/>
+    <ds:schemaRef ds:uri="http://schemas.microsoft.com/internal/obd"/>
   </ds:schemaRefs>
 </ds:datastoreItem>
 </file>
@@ -9397,20 +9408,9 @@
 </file>
 
 <file path=customXml/itemProps3.xml><?xml version="1.0" encoding="utf-8"?>
-<ds:datastoreItem xmlns:ds="http://schemas.openxmlformats.org/officeDocument/2006/customXml" ds:itemID="{A129B439-51BE-4A7D-9272-FBD057297E66}">
+<ds:datastoreItem xmlns:ds="http://schemas.openxmlformats.org/officeDocument/2006/customXml" ds:itemID="{B024FD56-CE1B-42FC-9E83-BFBF160724C6}">
   <ds:schemaRefs>
-    <ds:schemaRef ds:uri="http://schemas.microsoft.com/office/2006/metadata/contentType"/>
-    <ds:schemaRef ds:uri="http://schemas.microsoft.com/office/2006/metadata/properties/metaAttributes"/>
-    <ds:schemaRef ds:uri="http://www.w3.org/2001/XMLSchema"/>
-    <ds:schemaRef ds:uri="http://schemas.microsoft.com/office/2006/metadata/properties"/>
-    <ds:schemaRef ds:uri="bf3e1746-bde1-4d6e-9c3f-7182572f7502"/>
-    <ds:schemaRef ds:uri="14224164-2045-4b51-92bb-313d0f626d83"/>
-    <ds:schemaRef ds:uri="http://schemas.microsoft.com/office/2006/documentManagement/types"/>
-    <ds:schemaRef ds:uri="http://schemas.microsoft.com/office/infopath/2007/PartnerControls"/>
-    <ds:schemaRef ds:uri="http://schemas.openxmlformats.org/package/2006/metadata/core-properties"/>
-    <ds:schemaRef ds:uri="http://purl.org/dc/elements/1.1/"/>
-    <ds:schemaRef ds:uri="http://purl.org/dc/terms/"/>
-    <ds:schemaRef ds:uri="http://schemas.microsoft.com/internal/obd"/>
+    <ds:schemaRef ds:uri="http://schemas.microsoft.com/sharepoint/v3/contenttype/forms"/>
   </ds:schemaRefs>
 </ds:datastoreItem>
 </file>
--- a/tool/PMP/temp/diagram.pptx
+++ b/tool/PMP/temp/diagram.pptx
@@ -225,7 +225,7 @@
             <a:pPr rtl="0"/>
             <a:fld id="{FAB3E6E3-061B-41A2-BBDC-C5312A04A40A}" type="datetime1">
               <a:rPr lang="es-ES" smtClean="0"/>
-              <a:t>09/01/2026</a:t>
+              <a:t>18/02/2026</a:t>
             </a:fld>
             <a:endParaRPr lang="es-ES" dirty="0"/>
           </a:p>
@@ -395,7 +395,7 @@
             <a:pPr rtl="0"/>
             <a:fld id="{2145992C-CBBF-4F24-8325-F5CB0EAAC0E9}" type="datetime1">
               <a:rPr lang="es-ES" noProof="0" smtClean="0"/>
-              <a:t>09/01/2026</a:t>
+              <a:t>18/02/2026</a:t>
             </a:fld>
             <a:endParaRPr lang="es-ES" noProof="0" dirty="0"/>
           </a:p>
@@ -918,7 +918,7 @@
             <a:pPr rtl="0"/>
             <a:fld id="{55224D71-97F5-4B9D-B11B-235152E09E96}" type="datetime1">
               <a:rPr lang="es-ES" noProof="0" smtClean="0"/>
-              <a:t>09/01/2026</a:t>
+              <a:t>18/02/2026</a:t>
             </a:fld>
             <a:endParaRPr lang="es-ES" noProof="0" dirty="0"/>
           </a:p>
@@ -1267,7 +1267,7 @@
             <a:pPr rtl="0"/>
             <a:fld id="{2AB3A384-AAB1-4A76-A43B-EFE930A802BF}" type="datetime1">
               <a:rPr lang="es-ES" noProof="0" smtClean="0"/>
-              <a:t>09/01/2026</a:t>
+              <a:t>18/02/2026</a:t>
             </a:fld>
             <a:endParaRPr lang="es-ES" noProof="0" dirty="0"/>
           </a:p>
@@ -1409,7 +1409,7 @@
             <a:pPr rtl="0"/>
             <a:fld id="{95F109E8-29A7-4A4D-BBAF-954B5246DC6B}" type="datetime1">
               <a:rPr lang="es-ES" noProof="0" smtClean="0"/>
-              <a:t>09/01/2026</a:t>
+              <a:t>18/02/2026</a:t>
             </a:fld>
             <a:endParaRPr lang="es-ES" noProof="0" dirty="0"/>
           </a:p>
@@ -1523,7 +1523,7 @@
             <a:pPr rtl="0"/>
             <a:fld id="{3EDF4B7F-437B-43B6-8193-868254AADFEB}" type="datetime1">
               <a:rPr lang="es-ES" noProof="0" smtClean="0"/>
-              <a:t>09/01/2026</a:t>
+              <a:t>18/02/2026</a:t>
             </a:fld>
             <a:endParaRPr lang="es-ES" noProof="0" dirty="0"/>
           </a:p>
@@ -1823,7 +1823,7 @@
             <a:pPr rtl="0"/>
             <a:fld id="{5FD9D2A0-9803-4B3F-A6B6-606959F35242}" type="datetime1">
               <a:rPr lang="es-ES" noProof="0" smtClean="0"/>
-              <a:t>09/01/2026</a:t>
+              <a:t>18/02/2026</a:t>
             </a:fld>
             <a:endParaRPr lang="es-ES" noProof="0" dirty="0"/>
           </a:p>
@@ -2094,7 +2094,7 @@
             <a:pPr rtl="0"/>
             <a:fld id="{B48CB6FA-6884-4007-A174-A67BE7A1CA93}" type="datetime1">
               <a:rPr lang="es-ES" noProof="0" smtClean="0"/>
-              <a:t>09/01/2026</a:t>
+              <a:t>18/02/2026</a:t>
             </a:fld>
             <a:endParaRPr lang="es-ES" noProof="0" dirty="0"/>
           </a:p>
@@ -2365,7 +2365,7 @@
             <a:pPr rtl="0"/>
             <a:fld id="{DCA87387-1199-4F13-92EC-EA845724990E}" type="datetime1">
               <a:rPr lang="es-ES" noProof="0" smtClean="0"/>
-              <a:t>09/01/2026</a:t>
+              <a:t>18/02/2026</a:t>
             </a:fld>
             <a:endParaRPr lang="es-ES" noProof="0" dirty="0"/>
           </a:p>
@@ -2543,7 +2543,7 @@
             <a:pPr rtl="0"/>
             <a:fld id="{0277B9E3-6C0A-45A5-BAE5-CD19B242173D}" type="datetime1">
               <a:rPr lang="es-ES" noProof="0" smtClean="0"/>
-              <a:t>09/01/2026</a:t>
+              <a:t>18/02/2026</a:t>
             </a:fld>
             <a:endParaRPr lang="es-ES" noProof="0" dirty="0"/>
           </a:p>
@@ -2731,7 +2731,7 @@
             <a:pPr rtl="0"/>
             <a:fld id="{AB41DD2C-FA4F-413E-A1B5-23565A0780B7}" type="datetime1">
               <a:rPr lang="es-ES" noProof="0" smtClean="0"/>
-              <a:t>09/01/2026</a:t>
+              <a:t>18/02/2026</a:t>
             </a:fld>
             <a:endParaRPr lang="es-ES" noProof="0" dirty="0"/>
           </a:p>
@@ -2981,7 +2981,7 @@
             <a:pPr rtl="0"/>
             <a:fld id="{0D82DBE2-B5E9-4999-A9C0-55ED93FCE73D}" type="datetime1">
               <a:rPr lang="es-ES" noProof="0" smtClean="0"/>
-              <a:t>09/01/2026</a:t>
+              <a:t>18/02/2026</a:t>
             </a:fld>
             <a:endParaRPr lang="es-ES" noProof="0" dirty="0"/>
           </a:p>
@@ -3231,7 +3231,7 @@
             <a:pPr rtl="0"/>
             <a:fld id="{89B7BC24-C90D-4DAD-A6CB-BBA58C4D57BB}" type="datetime1">
               <a:rPr lang="es-ES" noProof="0" smtClean="0"/>
-              <a:t>09/01/2026</a:t>
+              <a:t>18/02/2026</a:t>
             </a:fld>
             <a:endParaRPr lang="es-ES" noProof="0" dirty="0"/>
           </a:p>
@@ -3494,7 +3494,7 @@
             <a:pPr rtl="0"/>
             <a:fld id="{217D4995-77A4-48E5-92B1-2DC992A39FBB}" type="datetime1">
               <a:rPr lang="es-ES" noProof="0" smtClean="0"/>
-              <a:t>09/01/2026</a:t>
+              <a:t>18/02/2026</a:t>
             </a:fld>
             <a:endParaRPr lang="es-ES" noProof="0" dirty="0"/>
           </a:p>
@@ -3768,7 +3768,7 @@
             <a:pPr rtl="0"/>
             <a:fld id="{AE8112B3-1F24-452F-80DE-56BF301098EC}" type="datetime1">
               <a:rPr lang="es-ES" noProof="0" smtClean="0"/>
-              <a:t>09/01/2026</a:t>
+              <a:t>18/02/2026</a:t>
             </a:fld>
             <a:endParaRPr lang="es-ES" noProof="0" dirty="0"/>
           </a:p>
@@ -4134,7 +4134,7 @@
             <a:pPr rtl="0"/>
             <a:fld id="{39B46DA2-8C2E-44C4-A865-CD3D33CFD45F}" type="datetime1">
               <a:rPr lang="es-ES" noProof="0" smtClean="0"/>
-              <a:t>09/01/2026</a:t>
+              <a:t>18/02/2026</a:t>
             </a:fld>
             <a:endParaRPr lang="es-ES" noProof="0" dirty="0"/>
           </a:p>
@@ -4489,7 +4489,7 @@
             <a:pPr rtl="0"/>
             <a:fld id="{D1525062-C568-4AE5-A98F-45E6D6D3E9AC}" type="datetime1">
               <a:rPr lang="es-ES" noProof="0" smtClean="0"/>
-              <a:t>09/01/2026</a:t>
+              <a:t>18/02/2026</a:t>
             </a:fld>
             <a:endParaRPr lang="es-ES" noProof="0" dirty="0"/>
           </a:p>
@@ -4984,7 +4984,7 @@
             <a:pPr rtl="0"/>
             <a:fld id="{8EBA81B0-EA87-4E7B-A74D-942650D6BCED}" type="datetime1">
               <a:rPr lang="es-ES" noProof="0" smtClean="0"/>
-              <a:t>09/01/2026</a:t>
+              <a:t>18/02/2026</a:t>
             </a:fld>
             <a:endParaRPr lang="es-ES" noProof="0" dirty="0"/>
           </a:p>
@@ -5479,7 +5479,7 @@
             <a:pPr rtl="0"/>
             <a:fld id="{F6653BDA-CE15-46D4-A5A4-C9E9758DEFB2}" type="datetime1">
               <a:rPr lang="es-ES" noProof="0" smtClean="0"/>
-              <a:t>09/01/2026</a:t>
+              <a:t>18/02/2026</a:t>
             </a:fld>
             <a:endParaRPr lang="es-ES" noProof="0" dirty="0"/>
           </a:p>
@@ -5703,7 +5703,7 @@
             <a:pPr rtl="0"/>
             <a:fld id="{72696FBB-EB5C-4293-9014-59E70AE1A5E6}" type="datetime1">
               <a:rPr lang="es-ES" noProof="0" smtClean="0"/>
-              <a:t>09/01/2026</a:t>
+              <a:t>18/02/2026</a:t>
             </a:fld>
             <a:endParaRPr lang="es-ES" noProof="0" dirty="0"/>
           </a:p>
@@ -6159,11 +6159,13 @@
         </p:nvSpPr>
         <p:spPr>
           <a:xfrm>
-            <a:off x="1631373" y="1277189"/>
-            <a:ext cx="1903959" cy="288000"/>
+            <a:off x="1501647" y="1277189"/>
+            <a:ext cx="2033685" cy="360000"/>
           </a:xfrm>
           <a:prstGeom prst="roundRect">
-            <a:avLst/>
+            <a:avLst>
+              <a:gd name="adj" fmla="val 50000"/>
+            </a:avLst>
           </a:prstGeom>
           <a:solidFill>
             <a:srgbClr val="3B3B3B"/>
@@ -6224,10 +6226,12 @@
         <p:spPr>
           <a:xfrm>
             <a:off x="3796085" y="1269643"/>
-            <a:ext cx="2214494" cy="294688"/>
+            <a:ext cx="2214494" cy="360000"/>
           </a:xfrm>
           <a:prstGeom prst="roundRect">
-            <a:avLst/>
+            <a:avLst>
+              <a:gd name="adj" fmla="val 50000"/>
+            </a:avLst>
           </a:prstGeom>
           <a:solidFill>
             <a:srgbClr val="3B3B3B"/>
@@ -6288,10 +6292,12 @@
         <p:spPr>
           <a:xfrm>
             <a:off x="8294432" y="1283877"/>
-            <a:ext cx="1831773" cy="288000"/>
+            <a:ext cx="1831773" cy="360000"/>
           </a:xfrm>
           <a:prstGeom prst="roundRect">
-            <a:avLst/>
+            <a:avLst>
+              <a:gd name="adj" fmla="val 50000"/>
+            </a:avLst>
           </a:prstGeom>
           <a:solidFill>
             <a:srgbClr val="3B3B3B"/>
@@ -6352,10 +6358,12 @@
         <p:spPr>
           <a:xfrm>
             <a:off x="6658131" y="1773204"/>
-            <a:ext cx="1868500" cy="288000"/>
+            <a:ext cx="1868500" cy="360000"/>
           </a:xfrm>
           <a:prstGeom prst="roundRect">
-            <a:avLst/>
+            <a:avLst>
+              <a:gd name="adj" fmla="val 50000"/>
+            </a:avLst>
           </a:prstGeom>
           <a:solidFill>
             <a:srgbClr val="3B3B3B"/>
@@ -6419,8 +6427,8 @@
         </p:nvCxnSpPr>
         <p:spPr>
           <a:xfrm flipV="1">
-            <a:off x="3535332" y="1416987"/>
-            <a:ext cx="260753" cy="4202"/>
+            <a:off x="3535332" y="1449643"/>
+            <a:ext cx="260753" cy="7546"/>
           </a:xfrm>
           <a:prstGeom prst="straightConnector1">
             <a:avLst/>
@@ -6462,10 +6470,12 @@
         <p:spPr>
           <a:xfrm>
             <a:off x="6200526" y="1277189"/>
-            <a:ext cx="1903959" cy="294688"/>
+            <a:ext cx="1903959" cy="360000"/>
           </a:xfrm>
           <a:prstGeom prst="roundRect">
-            <a:avLst/>
+            <a:avLst>
+              <a:gd name="adj" fmla="val 50000"/>
+            </a:avLst>
           </a:prstGeom>
           <a:solidFill>
             <a:srgbClr val="3B3B3B"/>
@@ -6526,10 +6536,12 @@
         <p:spPr>
           <a:xfrm>
             <a:off x="4314226" y="1773204"/>
-            <a:ext cx="2135199" cy="288000"/>
+            <a:ext cx="2135199" cy="360000"/>
           </a:xfrm>
           <a:prstGeom prst="roundRect">
-            <a:avLst/>
+            <a:avLst>
+              <a:gd name="adj" fmla="val 50000"/>
+            </a:avLst>
           </a:prstGeom>
           <a:solidFill>
             <a:srgbClr val="3B3B3B"/>
@@ -6590,10 +6602,12 @@
         <p:spPr>
           <a:xfrm>
             <a:off x="1188290" y="1773204"/>
-            <a:ext cx="2870274" cy="288000"/>
+            <a:ext cx="2870274" cy="360000"/>
           </a:xfrm>
           <a:prstGeom prst="roundRect">
-            <a:avLst/>
+            <a:avLst>
+              <a:gd name="adj" fmla="val 50000"/>
+            </a:avLst>
           </a:prstGeom>
           <a:solidFill>
             <a:srgbClr val="3B3B3B"/>
@@ -6653,11 +6667,13 @@
         </p:nvSpPr>
         <p:spPr>
           <a:xfrm>
-            <a:off x="1895051" y="2276262"/>
-            <a:ext cx="1246402" cy="288000"/>
+            <a:off x="1617696" y="2276262"/>
+            <a:ext cx="1246402" cy="360000"/>
           </a:xfrm>
           <a:prstGeom prst="roundRect">
-            <a:avLst/>
+            <a:avLst>
+              <a:gd name="adj" fmla="val 50000"/>
+            </a:avLst>
           </a:prstGeom>
           <a:solidFill>
             <a:srgbClr val="3B3B3B"/>
@@ -6717,11 +6733,13 @@
         </p:nvSpPr>
         <p:spPr>
           <a:xfrm>
-            <a:off x="3350863" y="2289600"/>
-            <a:ext cx="2135198" cy="288000"/>
+            <a:off x="3135936" y="2289600"/>
+            <a:ext cx="2350125" cy="360000"/>
           </a:xfrm>
           <a:prstGeom prst="roundRect">
-            <a:avLst/>
+            <a:avLst>
+              <a:gd name="adj" fmla="val 50000"/>
+            </a:avLst>
           </a:prstGeom>
           <a:solidFill>
             <a:srgbClr val="3B3B3B"/>
@@ -6777,10 +6795,12 @@
         <p:spPr>
           <a:xfrm>
             <a:off x="5747241" y="2276262"/>
-            <a:ext cx="1873551" cy="288000"/>
+            <a:ext cx="1873551" cy="360000"/>
           </a:xfrm>
           <a:prstGeom prst="roundRect">
-            <a:avLst/>
+            <a:avLst>
+              <a:gd name="adj" fmla="val 50000"/>
+            </a:avLst>
           </a:prstGeom>
           <a:solidFill>
             <a:srgbClr val="3B3B3B"/>
@@ -6873,10 +6893,12 @@
         <p:spPr>
           <a:xfrm>
             <a:off x="7892630" y="2276262"/>
-            <a:ext cx="2200489" cy="288000"/>
+            <a:ext cx="2200489" cy="360000"/>
           </a:xfrm>
           <a:prstGeom prst="roundRect">
-            <a:avLst/>
+            <a:avLst>
+              <a:gd name="adj" fmla="val 50000"/>
+            </a:avLst>
           </a:prstGeom>
           <a:solidFill>
             <a:srgbClr val="3B3B3B"/>
@@ -6940,7 +6962,7 @@
         </p:nvCxnSpPr>
         <p:spPr>
           <a:xfrm>
-            <a:off x="6010579" y="1416987"/>
+            <a:off x="6010579" y="1449643"/>
             <a:ext cx="189947" cy="7546"/>
           </a:xfrm>
           <a:prstGeom prst="straightConnector1">
@@ -6986,8 +7008,8 @@
         </p:nvCxnSpPr>
         <p:spPr>
           <a:xfrm>
-            <a:off x="8104485" y="1424533"/>
-            <a:ext cx="189947" cy="3344"/>
+            <a:off x="8104485" y="1457189"/>
+            <a:ext cx="189947" cy="6688"/>
           </a:xfrm>
           <a:prstGeom prst="straightConnector1">
             <a:avLst/>
@@ -7032,7 +7054,7 @@
         </p:nvCxnSpPr>
         <p:spPr>
           <a:xfrm flipH="1">
-            <a:off x="8526631" y="1913688"/>
+            <a:off x="8526631" y="1949688"/>
             <a:ext cx="202256" cy="3516"/>
           </a:xfrm>
           <a:prstGeom prst="straightConnector1">
@@ -7078,12 +7100,12 @@
         </p:nvCxnSpPr>
         <p:spPr>
           <a:xfrm>
-            <a:off x="10126205" y="1427877"/>
+            <a:off x="10126205" y="1463877"/>
             <a:ext cx="564148" cy="485811"/>
           </a:xfrm>
           <a:prstGeom prst="bentConnector3">
             <a:avLst>
-              <a:gd name="adj1" fmla="val 130535"/>
+              <a:gd name="adj1" fmla="val 140521"/>
             </a:avLst>
           </a:prstGeom>
           <a:ln w="7620">
@@ -7126,7 +7148,7 @@
         </p:nvCxnSpPr>
         <p:spPr>
           <a:xfrm flipH="1">
-            <a:off x="4058564" y="1917204"/>
+            <a:off x="4058564" y="1953204"/>
             <a:ext cx="255662" cy="0"/>
           </a:xfrm>
           <a:prstGeom prst="straightConnector1">
@@ -7172,8 +7194,8 @@
         </p:nvCxnSpPr>
         <p:spPr>
           <a:xfrm>
-            <a:off x="3141453" y="2420262"/>
-            <a:ext cx="209410" cy="13338"/>
+            <a:off x="2864098" y="2456262"/>
+            <a:ext cx="271838" cy="13338"/>
           </a:xfrm>
           <a:prstGeom prst="straightConnector1">
             <a:avLst/>
@@ -7218,7 +7240,7 @@
         </p:nvCxnSpPr>
         <p:spPr>
           <a:xfrm flipV="1">
-            <a:off x="5486061" y="2420262"/>
+            <a:off x="5486061" y="2456262"/>
             <a:ext cx="261180" cy="13338"/>
           </a:xfrm>
           <a:prstGeom prst="straightConnector1">
@@ -7264,12 +7286,12 @@
         </p:nvCxnSpPr>
         <p:spPr>
           <a:xfrm rot="10800000" flipH="1" flipV="1">
-            <a:off x="1188289" y="1917204"/>
-            <a:ext cx="706761" cy="503058"/>
+            <a:off x="1188290" y="1953204"/>
+            <a:ext cx="429406" cy="503058"/>
           </a:xfrm>
           <a:prstGeom prst="bentConnector3">
             <a:avLst>
-              <a:gd name="adj1" fmla="val -12110"/>
+              <a:gd name="adj1" fmla="val -53236"/>
             </a:avLst>
           </a:prstGeom>
           <a:ln w="7620">
@@ -7312,7 +7334,7 @@
         </p:nvCxnSpPr>
         <p:spPr>
           <a:xfrm>
-            <a:off x="7620792" y="2420262"/>
+            <a:off x="7620792" y="2456262"/>
             <a:ext cx="271838" cy="0"/>
           </a:xfrm>
           <a:prstGeom prst="straightConnector1">
@@ -7355,10 +7377,12 @@
         <p:spPr>
           <a:xfrm>
             <a:off x="8728887" y="1769688"/>
-            <a:ext cx="1961466" cy="288000"/>
+            <a:ext cx="1961466" cy="360000"/>
           </a:xfrm>
           <a:prstGeom prst="roundRect">
-            <a:avLst/>
+            <a:avLst>
+              <a:gd name="adj" fmla="val 50000"/>
+            </a:avLst>
           </a:prstGeom>
           <a:solidFill>
             <a:srgbClr val="3B3B3B"/>
@@ -7419,10 +7443,12 @@
         <p:spPr>
           <a:xfrm>
             <a:off x="1886227" y="4331369"/>
-            <a:ext cx="2358950" cy="288000"/>
+            <a:ext cx="2358950" cy="360000"/>
           </a:xfrm>
           <a:prstGeom prst="roundRect">
-            <a:avLst/>
+            <a:avLst>
+              <a:gd name="adj" fmla="val 50000"/>
+            </a:avLst>
           </a:prstGeom>
           <a:solidFill>
             <a:srgbClr val="3B3B3B"/>
@@ -7482,10 +7508,12 @@
         <p:spPr>
           <a:xfrm>
             <a:off x="4553870" y="4331369"/>
-            <a:ext cx="1873551" cy="288000"/>
+            <a:ext cx="1873551" cy="360000"/>
           </a:xfrm>
           <a:prstGeom prst="roundRect">
-            <a:avLst/>
+            <a:avLst>
+              <a:gd name="adj" fmla="val 50000"/>
+            </a:avLst>
           </a:prstGeom>
           <a:solidFill>
             <a:srgbClr val="3B3B3B"/>
@@ -7545,10 +7573,12 @@
         <p:spPr>
           <a:xfrm>
             <a:off x="6937946" y="3699884"/>
-            <a:ext cx="2340000" cy="288000"/>
+            <a:ext cx="2340000" cy="360000"/>
           </a:xfrm>
           <a:prstGeom prst="roundRect">
-            <a:avLst/>
+            <a:avLst>
+              <a:gd name="adj" fmla="val 50000"/>
+            </a:avLst>
           </a:prstGeom>
           <a:solidFill>
             <a:srgbClr val="3B3B3B"/>
@@ -7608,10 +7638,12 @@
         <p:spPr>
           <a:xfrm>
             <a:off x="6937946" y="4130924"/>
-            <a:ext cx="2333078" cy="288000"/>
+            <a:ext cx="2333078" cy="360000"/>
           </a:xfrm>
           <a:prstGeom prst="roundRect">
-            <a:avLst/>
+            <a:avLst>
+              <a:gd name="adj" fmla="val 50000"/>
+            </a:avLst>
           </a:prstGeom>
           <a:solidFill>
             <a:srgbClr val="3B3B3B"/>
@@ -7671,10 +7703,12 @@
         <p:spPr>
           <a:xfrm>
             <a:off x="6937946" y="4561964"/>
-            <a:ext cx="2333078" cy="288000"/>
+            <a:ext cx="2333078" cy="360000"/>
           </a:xfrm>
           <a:prstGeom prst="roundRect">
-            <a:avLst/>
+            <a:avLst>
+              <a:gd name="adj" fmla="val 50000"/>
+            </a:avLst>
           </a:prstGeom>
           <a:solidFill>
             <a:srgbClr val="3B3B3B"/>
@@ -7734,10 +7768,12 @@
         <p:spPr>
           <a:xfrm>
             <a:off x="6937946" y="4993005"/>
-            <a:ext cx="2333078" cy="288000"/>
+            <a:ext cx="2333078" cy="360000"/>
           </a:xfrm>
           <a:prstGeom prst="roundRect">
-            <a:avLst/>
+            <a:avLst>
+              <a:gd name="adj" fmla="val 50000"/>
+            </a:avLst>
           </a:prstGeom>
           <a:solidFill>
             <a:srgbClr val="3B3B3B"/>
@@ -7800,7 +7836,7 @@
         </p:nvCxnSpPr>
         <p:spPr>
           <a:xfrm>
-            <a:off x="4245177" y="4475369"/>
+            <a:off x="4245177" y="4511369"/>
             <a:ext cx="308693" cy="0"/>
           </a:xfrm>
           <a:prstGeom prst="straightConnector1">
@@ -7846,7 +7882,7 @@
         </p:nvCxnSpPr>
         <p:spPr>
           <a:xfrm flipV="1">
-            <a:off x="6427421" y="3843884"/>
+            <a:off x="6427421" y="3879884"/>
             <a:ext cx="510525" cy="631485"/>
           </a:xfrm>
           <a:prstGeom prst="straightConnector1">
@@ -7892,7 +7928,7 @@
         </p:nvCxnSpPr>
         <p:spPr>
           <a:xfrm flipV="1">
-            <a:off x="6427421" y="4274924"/>
+            <a:off x="6427421" y="4310924"/>
             <a:ext cx="510525" cy="200445"/>
           </a:xfrm>
           <a:prstGeom prst="straightConnector1">
@@ -7938,7 +7974,7 @@
         </p:nvCxnSpPr>
         <p:spPr>
           <a:xfrm>
-            <a:off x="6427421" y="4475369"/>
+            <a:off x="6427421" y="4511369"/>
             <a:ext cx="510525" cy="230595"/>
           </a:xfrm>
           <a:prstGeom prst="straightConnector1">
@@ -7984,7 +8020,7 @@
         </p:nvCxnSpPr>
         <p:spPr>
           <a:xfrm>
-            <a:off x="6427421" y="4475369"/>
+            <a:off x="6427421" y="4511369"/>
             <a:ext cx="510525" cy="661636"/>
           </a:xfrm>
           <a:prstGeom prst="straightConnector1">
@@ -8104,7 +8140,7 @@
         </p:nvCxnSpPr>
         <p:spPr>
           <a:xfrm flipH="1">
-            <a:off x="6449425" y="1917204"/>
+            <a:off x="6449425" y="1953204"/>
             <a:ext cx="208706" cy="0"/>
           </a:xfrm>
           <a:prstGeom prst="straightConnector1">
@@ -8921,6 +8957,66 @@
 </file>
 
 <file path=customXml/item1.xml><?xml version="1.0" encoding="utf-8"?>
+<?mso-contentType ?>
+<FormTemplates xmlns="http://schemas.microsoft.com/sharepoint/v3/contenttype/forms">
+  <Display>DocumentLibraryForm</Display>
+  <Edit>DocumentLibraryForm</Edit>
+  <New>DocumentLibraryForm</New>
+</FormTemplates>
+</file>
+
+<file path=customXml/item2.xml><?xml version="1.0" encoding="utf-8"?>
+<p:properties xmlns:p="http://schemas.microsoft.com/office/2006/metadata/properties" xmlns:xsi="http://www.w3.org/2001/XMLSchema-instance" xmlns:pc="http://schemas.microsoft.com/office/infopath/2007/PartnerControls">
+  <documentManagement>
+    <NotebookType xmlns="bf3e1746-bde1-4d6e-9c3f-7182572f7502" xsi:nil="true"/>
+    <CultureName xmlns="bf3e1746-bde1-4d6e-9c3f-7182572f7502" xsi:nil="true"/>
+    <Students xmlns="bf3e1746-bde1-4d6e-9c3f-7182572f7502">
+      <UserInfo>
+        <DisplayName/>
+        <AccountId xsi:nil="true"/>
+        <AccountType/>
+      </UserInfo>
+    </Students>
+    <Distribution_Groups xmlns="bf3e1746-bde1-4d6e-9c3f-7182572f7502" xsi:nil="true"/>
+    <FolderType xmlns="bf3e1746-bde1-4d6e-9c3f-7182572f7502" xsi:nil="true"/>
+    <Student_Groups xmlns="bf3e1746-bde1-4d6e-9c3f-7182572f7502">
+      <UserInfo>
+        <DisplayName/>
+        <AccountId xsi:nil="true"/>
+        <AccountType/>
+      </UserInfo>
+    </Student_Groups>
+    <Self_Registration_Enabled xmlns="bf3e1746-bde1-4d6e-9c3f-7182572f7502" xsi:nil="true"/>
+    <TeamsChannelId xmlns="bf3e1746-bde1-4d6e-9c3f-7182572f7502" xsi:nil="true"/>
+    <IsNotebookLocked xmlns="bf3e1746-bde1-4d6e-9c3f-7182572f7502" xsi:nil="true"/>
+    <DefaultSectionNames xmlns="bf3e1746-bde1-4d6e-9c3f-7182572f7502" xsi:nil="true"/>
+    <Is_Collaboration_Space_Locked xmlns="bf3e1746-bde1-4d6e-9c3f-7182572f7502" xsi:nil="true"/>
+    <Invited_Teachers xmlns="bf3e1746-bde1-4d6e-9c3f-7182572f7502" xsi:nil="true"/>
+    <Math_Settings xmlns="bf3e1746-bde1-4d6e-9c3f-7182572f7502" xsi:nil="true"/>
+    <Templates xmlns="bf3e1746-bde1-4d6e-9c3f-7182572f7502" xsi:nil="true"/>
+    <Has_Teacher_Only_SectionGroup xmlns="bf3e1746-bde1-4d6e-9c3f-7182572f7502" xsi:nil="true"/>
+    <AppVersion xmlns="bf3e1746-bde1-4d6e-9c3f-7182572f7502" xsi:nil="true"/>
+    <Invited_Students xmlns="bf3e1746-bde1-4d6e-9c3f-7182572f7502" xsi:nil="true"/>
+    <Owner xmlns="bf3e1746-bde1-4d6e-9c3f-7182572f7502">
+      <UserInfo>
+        <DisplayName/>
+        <AccountId xsi:nil="true"/>
+        <AccountType/>
+      </UserInfo>
+    </Owner>
+    <Teachers xmlns="bf3e1746-bde1-4d6e-9c3f-7182572f7502">
+      <UserInfo>
+        <DisplayName/>
+        <AccountId xsi:nil="true"/>
+        <AccountType/>
+      </UserInfo>
+    </Teachers>
+    <LMS_Mappings xmlns="bf3e1746-bde1-4d6e-9c3f-7182572f7502" xsi:nil="true"/>
+  </documentManagement>
+</p:properties>
+</file>
+
+<file path=customXml/item3.xml><?xml version="1.0" encoding="utf-8"?>
 <ct:contentTypeSchema xmlns:ct="http://schemas.microsoft.com/office/2006/metadata/contentType" xmlns:ma="http://schemas.microsoft.com/office/2006/metadata/properties/metaAttributes" ct:_="" ma:_="" ma:contentTypeName="Document" ma:contentTypeID="0x010100C089011499791B4EB69D0A56FFA67F2B" ma:contentTypeVersion="30" ma:contentTypeDescription="Create a new document." ma:contentTypeScope="" ma:versionID="f76dc847e91b26043a9f85409c9c8da8">
   <xsd:schema xmlns:xsd="http://www.w3.org/2001/XMLSchema" xmlns:xs="http://www.w3.org/2001/XMLSchema" xmlns:p="http://schemas.microsoft.com/office/2006/metadata/properties" xmlns:ns3="bf3e1746-bde1-4d6e-9c3f-7182572f7502" xmlns:ns4="14224164-2045-4b51-92bb-313d0f626d83" targetNamespace="http://schemas.microsoft.com/office/2006/metadata/properties" ma:root="true" ma:fieldsID="e77e75136ac7a83ebab10a30c2d6fe6c" ns3:_="" ns4:_="">
     <xsd:import namespace="bf3e1746-bde1-4d6e-9c3f-7182572f7502"/>
@@ -9311,81 +9407,10 @@
 </ct:contentTypeSchema>
 </file>
 
-<file path=customXml/item2.xml><?xml version="1.0" encoding="utf-8"?>
-<p:properties xmlns:p="http://schemas.microsoft.com/office/2006/metadata/properties" xmlns:xsi="http://www.w3.org/2001/XMLSchema-instance" xmlns:pc="http://schemas.microsoft.com/office/infopath/2007/PartnerControls">
-  <documentManagement>
-    <NotebookType xmlns="bf3e1746-bde1-4d6e-9c3f-7182572f7502" xsi:nil="true"/>
-    <CultureName xmlns="bf3e1746-bde1-4d6e-9c3f-7182572f7502" xsi:nil="true"/>
-    <Students xmlns="bf3e1746-bde1-4d6e-9c3f-7182572f7502">
-      <UserInfo>
-        <DisplayName/>
-        <AccountId xsi:nil="true"/>
-        <AccountType/>
-      </UserInfo>
-    </Students>
-    <Distribution_Groups xmlns="bf3e1746-bde1-4d6e-9c3f-7182572f7502" xsi:nil="true"/>
-    <FolderType xmlns="bf3e1746-bde1-4d6e-9c3f-7182572f7502" xsi:nil="true"/>
-    <Student_Groups xmlns="bf3e1746-bde1-4d6e-9c3f-7182572f7502">
-      <UserInfo>
-        <DisplayName/>
-        <AccountId xsi:nil="true"/>
-        <AccountType/>
-      </UserInfo>
-    </Student_Groups>
-    <Self_Registration_Enabled xmlns="bf3e1746-bde1-4d6e-9c3f-7182572f7502" xsi:nil="true"/>
-    <TeamsChannelId xmlns="bf3e1746-bde1-4d6e-9c3f-7182572f7502" xsi:nil="true"/>
-    <IsNotebookLocked xmlns="bf3e1746-bde1-4d6e-9c3f-7182572f7502" xsi:nil="true"/>
-    <DefaultSectionNames xmlns="bf3e1746-bde1-4d6e-9c3f-7182572f7502" xsi:nil="true"/>
-    <Is_Collaboration_Space_Locked xmlns="bf3e1746-bde1-4d6e-9c3f-7182572f7502" xsi:nil="true"/>
-    <Invited_Teachers xmlns="bf3e1746-bde1-4d6e-9c3f-7182572f7502" xsi:nil="true"/>
-    <Math_Settings xmlns="bf3e1746-bde1-4d6e-9c3f-7182572f7502" xsi:nil="true"/>
-    <Templates xmlns="bf3e1746-bde1-4d6e-9c3f-7182572f7502" xsi:nil="true"/>
-    <Has_Teacher_Only_SectionGroup xmlns="bf3e1746-bde1-4d6e-9c3f-7182572f7502" xsi:nil="true"/>
-    <AppVersion xmlns="bf3e1746-bde1-4d6e-9c3f-7182572f7502" xsi:nil="true"/>
-    <Invited_Students xmlns="bf3e1746-bde1-4d6e-9c3f-7182572f7502" xsi:nil="true"/>
-    <Owner xmlns="bf3e1746-bde1-4d6e-9c3f-7182572f7502">
-      <UserInfo>
-        <DisplayName/>
-        <AccountId xsi:nil="true"/>
-        <AccountType/>
-      </UserInfo>
-    </Owner>
-    <Teachers xmlns="bf3e1746-bde1-4d6e-9c3f-7182572f7502">
-      <UserInfo>
-        <DisplayName/>
-        <AccountId xsi:nil="true"/>
-        <AccountType/>
-      </UserInfo>
-    </Teachers>
-    <LMS_Mappings xmlns="bf3e1746-bde1-4d6e-9c3f-7182572f7502" xsi:nil="true"/>
-  </documentManagement>
-</p:properties>
-</file>
-
-<file path=customXml/item3.xml><?xml version="1.0" encoding="utf-8"?>
-<?mso-contentType ?>
-<FormTemplates xmlns="http://schemas.microsoft.com/sharepoint/v3/contenttype/forms">
-  <Display>DocumentLibraryForm</Display>
-  <Edit>DocumentLibraryForm</Edit>
-  <New>DocumentLibraryForm</New>
-</FormTemplates>
-</file>
-
 <file path=customXml/itemProps1.xml><?xml version="1.0" encoding="utf-8"?>
-<ds:datastoreItem xmlns:ds="http://schemas.openxmlformats.org/officeDocument/2006/customXml" ds:itemID="{A129B439-51BE-4A7D-9272-FBD057297E66}">
+<ds:datastoreItem xmlns:ds="http://schemas.openxmlformats.org/officeDocument/2006/customXml" ds:itemID="{B024FD56-CE1B-42FC-9E83-BFBF160724C6}">
   <ds:schemaRefs>
-    <ds:schemaRef ds:uri="http://schemas.microsoft.com/office/2006/metadata/contentType"/>
-    <ds:schemaRef ds:uri="http://schemas.microsoft.com/office/2006/metadata/properties/metaAttributes"/>
-    <ds:schemaRef ds:uri="http://www.w3.org/2001/XMLSchema"/>
-    <ds:schemaRef ds:uri="http://schemas.microsoft.com/office/2006/metadata/properties"/>
-    <ds:schemaRef ds:uri="bf3e1746-bde1-4d6e-9c3f-7182572f7502"/>
-    <ds:schemaRef ds:uri="14224164-2045-4b51-92bb-313d0f626d83"/>
-    <ds:schemaRef ds:uri="http://schemas.microsoft.com/office/2006/documentManagement/types"/>
-    <ds:schemaRef ds:uri="http://schemas.microsoft.com/office/infopath/2007/PartnerControls"/>
-    <ds:schemaRef ds:uri="http://schemas.openxmlformats.org/package/2006/metadata/core-properties"/>
-    <ds:schemaRef ds:uri="http://purl.org/dc/elements/1.1/"/>
-    <ds:schemaRef ds:uri="http://purl.org/dc/terms/"/>
-    <ds:schemaRef ds:uri="http://schemas.microsoft.com/internal/obd"/>
+    <ds:schemaRef ds:uri="http://schemas.microsoft.com/sharepoint/v3/contenttype/forms"/>
   </ds:schemaRefs>
 </ds:datastoreItem>
 </file>
@@ -9408,9 +9433,20 @@
 </file>
 
 <file path=customXml/itemProps3.xml><?xml version="1.0" encoding="utf-8"?>
-<ds:datastoreItem xmlns:ds="http://schemas.openxmlformats.org/officeDocument/2006/customXml" ds:itemID="{B024FD56-CE1B-42FC-9E83-BFBF160724C6}">
+<ds:datastoreItem xmlns:ds="http://schemas.openxmlformats.org/officeDocument/2006/customXml" ds:itemID="{A129B439-51BE-4A7D-9272-FBD057297E66}">
   <ds:schemaRefs>
-    <ds:schemaRef ds:uri="http://schemas.microsoft.com/sharepoint/v3/contenttype/forms"/>
+    <ds:schemaRef ds:uri="http://schemas.microsoft.com/office/2006/metadata/contentType"/>
+    <ds:schemaRef ds:uri="http://schemas.microsoft.com/office/2006/metadata/properties/metaAttributes"/>
+    <ds:schemaRef ds:uri="http://www.w3.org/2001/XMLSchema"/>
+    <ds:schemaRef ds:uri="http://schemas.microsoft.com/office/2006/metadata/properties"/>
+    <ds:schemaRef ds:uri="bf3e1746-bde1-4d6e-9c3f-7182572f7502"/>
+    <ds:schemaRef ds:uri="14224164-2045-4b51-92bb-313d0f626d83"/>
+    <ds:schemaRef ds:uri="http://schemas.microsoft.com/office/2006/documentManagement/types"/>
+    <ds:schemaRef ds:uri="http://schemas.microsoft.com/office/infopath/2007/PartnerControls"/>
+    <ds:schemaRef ds:uri="http://schemas.openxmlformats.org/package/2006/metadata/core-properties"/>
+    <ds:schemaRef ds:uri="http://purl.org/dc/elements/1.1/"/>
+    <ds:schemaRef ds:uri="http://purl.org/dc/terms/"/>
+    <ds:schemaRef ds:uri="http://schemas.microsoft.com/internal/obd"/>
   </ds:schemaRefs>
 </ds:datastoreItem>
 </file>
--- a/tool/PMP/temp/diagram.pptx
+++ b/tool/PMP/temp/diagram.pptx
@@ -5,13 +5,14 @@
     <p:sldMasterId id="2147483778" r:id="rId4"/>
   </p:sldMasterIdLst>
   <p:notesMasterIdLst>
-    <p:notesMasterId r:id="rId6"/>
+    <p:notesMasterId r:id="rId7"/>
   </p:notesMasterIdLst>
   <p:handoutMasterIdLst>
-    <p:handoutMasterId r:id="rId7"/>
+    <p:handoutMasterId r:id="rId8"/>
   </p:handoutMasterIdLst>
   <p:sldIdLst>
     <p:sldId id="350" r:id="rId5"/>
+    <p:sldId id="351" r:id="rId6"/>
   </p:sldIdLst>
   <p:sldSz cx="12192000" cy="6858000"/>
   <p:notesSz cx="6858000" cy="9144000"/>
@@ -116,6 +117,7 @@
         <p14:section name="Default Section" id="{A6194743-3C7C-499C-B327-CF08643433A4}">
           <p14:sldIdLst>
             <p14:sldId id="350"/>
+            <p14:sldId id="351"/>
           </p14:sldIdLst>
         </p14:section>
       </p14:sectionLst>
@@ -225,7 +227,7 @@
             <a:pPr rtl="0"/>
             <a:fld id="{FAB3E6E3-061B-41A2-BBDC-C5312A04A40A}" type="datetime1">
               <a:rPr lang="es-ES" smtClean="0"/>
-              <a:t>18/02/2026</a:t>
+              <a:t>08/04/2026</a:t>
             </a:fld>
             <a:endParaRPr lang="es-ES" dirty="0"/>
           </a:p>
@@ -395,7 +397,7 @@
             <a:pPr rtl="0"/>
             <a:fld id="{2145992C-CBBF-4F24-8325-F5CB0EAAC0E9}" type="datetime1">
               <a:rPr lang="es-ES" noProof="0" smtClean="0"/>
-              <a:t>18/02/2026</a:t>
+              <a:t>08/04/2026</a:t>
             </a:fld>
             <a:endParaRPr lang="es-ES" noProof="0" dirty="0"/>
           </a:p>
@@ -775,6 +777,115 @@
 </p:notes>
 </file>
 
+<file path=ppt/notesSlides/notesSlide2.xml><?xml version="1.0" encoding="utf-8"?>
+<p:notes xmlns:a="http://schemas.openxmlformats.org/drawingml/2006/main" xmlns:r="http://schemas.openxmlformats.org/officeDocument/2006/relationships" xmlns:p="http://schemas.openxmlformats.org/presentationml/2006/main">
+  <p:cSld>
+    <p:spTree>
+      <p:nvGrpSpPr>
+        <p:cNvPr id="1" name="">
+          <a:extLst>
+            <a:ext uri="{FF2B5EF4-FFF2-40B4-BE49-F238E27FC236}">
+              <a16:creationId xmlns:a16="http://schemas.microsoft.com/office/drawing/2014/main" id="{1801B1B0-062B-F410-F473-4BD4D1C8C271}"/>
+            </a:ext>
+          </a:extLst>
+        </p:cNvPr>
+        <p:cNvGrpSpPr/>
+        <p:nvPr/>
+      </p:nvGrpSpPr>
+      <p:grpSpPr>
+        <a:xfrm>
+          <a:off x="0" y="0"/>
+          <a:ext cx="0" cy="0"/>
+          <a:chOff x="0" y="0"/>
+          <a:chExt cx="0" cy="0"/>
+        </a:xfrm>
+      </p:grpSpPr>
+      <p:sp>
+        <p:nvSpPr>
+          <p:cNvPr id="2" name="Slide Image Placeholder 1">
+            <a:extLst>
+              <a:ext uri="{FF2B5EF4-FFF2-40B4-BE49-F238E27FC236}">
+                <a16:creationId xmlns:a16="http://schemas.microsoft.com/office/drawing/2014/main" id="{DF2EAA80-81BB-F685-E8BF-7C399C6DDFBE}"/>
+              </a:ext>
+            </a:extLst>
+          </p:cNvPr>
+          <p:cNvSpPr>
+            <a:spLocks noGrp="1" noRot="1" noChangeAspect="1"/>
+          </p:cNvSpPr>
+          <p:nvPr>
+            <p:ph type="sldImg"/>
+          </p:nvPr>
+        </p:nvSpPr>
+        <p:spPr/>
+      </p:sp>
+      <p:sp>
+        <p:nvSpPr>
+          <p:cNvPr id="3" name="Notes Placeholder 2">
+            <a:extLst>
+              <a:ext uri="{FF2B5EF4-FFF2-40B4-BE49-F238E27FC236}">
+                <a16:creationId xmlns:a16="http://schemas.microsoft.com/office/drawing/2014/main" id="{006C0376-F98B-9CF7-3848-274211BF68E2}"/>
+              </a:ext>
+            </a:extLst>
+          </p:cNvPr>
+          <p:cNvSpPr>
+            <a:spLocks noGrp="1"/>
+          </p:cNvSpPr>
+          <p:nvPr>
+            <p:ph type="body" idx="1"/>
+          </p:nvPr>
+        </p:nvSpPr>
+        <p:spPr/>
+        <p:txBody>
+          <a:bodyPr/>
+          <a:lstStyle/>
+          <a:p>
+            <a:endParaRPr lang="en-US"/>
+          </a:p>
+        </p:txBody>
+      </p:sp>
+      <p:sp>
+        <p:nvSpPr>
+          <p:cNvPr id="4" name="Slide Number Placeholder 3">
+            <a:extLst>
+              <a:ext uri="{FF2B5EF4-FFF2-40B4-BE49-F238E27FC236}">
+                <a16:creationId xmlns:a16="http://schemas.microsoft.com/office/drawing/2014/main" id="{991EB69C-87E8-9B0E-47DE-6C2AC498E8DA}"/>
+              </a:ext>
+            </a:extLst>
+          </p:cNvPr>
+          <p:cNvSpPr>
+            <a:spLocks noGrp="1"/>
+          </p:cNvSpPr>
+          <p:nvPr>
+            <p:ph type="sldNum" sz="quarter" idx="5"/>
+          </p:nvPr>
+        </p:nvSpPr>
+        <p:spPr/>
+        <p:txBody>
+          <a:bodyPr/>
+          <a:lstStyle/>
+          <a:p>
+            <a:pPr rtl="0"/>
+            <a:fld id="{810E1E9A-E921-4174-A0FC-51868D7AC568}" type="slidenum">
+              <a:rPr lang="es-ES" noProof="0" smtClean="0"/>
+              <a:t>2</a:t>
+            </a:fld>
+            <a:endParaRPr lang="es-ES" noProof="0" dirty="0"/>
+          </a:p>
+        </p:txBody>
+      </p:sp>
+    </p:spTree>
+    <p:extLst>
+      <p:ext uri="{BB962C8B-B14F-4D97-AF65-F5344CB8AC3E}">
+        <p14:creationId xmlns:p14="http://schemas.microsoft.com/office/powerpoint/2010/main" val="4127977823"/>
+      </p:ext>
+    </p:extLst>
+  </p:cSld>
+  <p:clrMapOvr>
+    <a:masterClrMapping/>
+  </p:clrMapOvr>
+</p:notes>
+</file>
+
 <file path=ppt/slideLayouts/slideLayout1.xml><?xml version="1.0" encoding="utf-8"?>
 <p:sldLayout xmlns:a="http://schemas.openxmlformats.org/drawingml/2006/main" xmlns:r="http://schemas.openxmlformats.org/officeDocument/2006/relationships" xmlns:p="http://schemas.openxmlformats.org/presentationml/2006/main" preserve="1" userDrawn="1">
   <p:cSld name="Diapositiva de bienvenida e introducción">
@@ -918,7 +1029,7 @@
             <a:pPr rtl="0"/>
             <a:fld id="{55224D71-97F5-4B9D-B11B-235152E09E96}" type="datetime1">
               <a:rPr lang="es-ES" noProof="0" smtClean="0"/>
-              <a:t>18/02/2026</a:t>
+              <a:t>08/04/2026</a:t>
             </a:fld>
             <a:endParaRPr lang="es-ES" noProof="0" dirty="0"/>
           </a:p>
@@ -1267,7 +1378,7 @@
             <a:pPr rtl="0"/>
             <a:fld id="{2AB3A384-AAB1-4A76-A43B-EFE930A802BF}" type="datetime1">
               <a:rPr lang="es-ES" noProof="0" smtClean="0"/>
-              <a:t>18/02/2026</a:t>
+              <a:t>08/04/2026</a:t>
             </a:fld>
             <a:endParaRPr lang="es-ES" noProof="0" dirty="0"/>
           </a:p>
@@ -1409,7 +1520,7 @@
             <a:pPr rtl="0"/>
             <a:fld id="{95F109E8-29A7-4A4D-BBAF-954B5246DC6B}" type="datetime1">
               <a:rPr lang="es-ES" noProof="0" smtClean="0"/>
-              <a:t>18/02/2026</a:t>
+              <a:t>08/04/2026</a:t>
             </a:fld>
             <a:endParaRPr lang="es-ES" noProof="0" dirty="0"/>
           </a:p>
@@ -1523,7 +1634,7 @@
             <a:pPr rtl="0"/>
             <a:fld id="{3EDF4B7F-437B-43B6-8193-868254AADFEB}" type="datetime1">
               <a:rPr lang="es-ES" noProof="0" smtClean="0"/>
-              <a:t>18/02/2026</a:t>
+              <a:t>08/04/2026</a:t>
             </a:fld>
             <a:endParaRPr lang="es-ES" noProof="0" dirty="0"/>
           </a:p>
@@ -1823,7 +1934,7 @@
             <a:pPr rtl="0"/>
             <a:fld id="{5FD9D2A0-9803-4B3F-A6B6-606959F35242}" type="datetime1">
               <a:rPr lang="es-ES" noProof="0" smtClean="0"/>
-              <a:t>18/02/2026</a:t>
+              <a:t>08/04/2026</a:t>
             </a:fld>
             <a:endParaRPr lang="es-ES" noProof="0" dirty="0"/>
           </a:p>
@@ -2094,7 +2205,7 @@
             <a:pPr rtl="0"/>
             <a:fld id="{B48CB6FA-6884-4007-A174-A67BE7A1CA93}" type="datetime1">
               <a:rPr lang="es-ES" noProof="0" smtClean="0"/>
-              <a:t>18/02/2026</a:t>
+              <a:t>08/04/2026</a:t>
             </a:fld>
             <a:endParaRPr lang="es-ES" noProof="0" dirty="0"/>
           </a:p>
@@ -2365,7 +2476,7 @@
             <a:pPr rtl="0"/>
             <a:fld id="{DCA87387-1199-4F13-92EC-EA845724990E}" type="datetime1">
               <a:rPr lang="es-ES" noProof="0" smtClean="0"/>
-              <a:t>18/02/2026</a:t>
+              <a:t>08/04/2026</a:t>
             </a:fld>
             <a:endParaRPr lang="es-ES" noProof="0" dirty="0"/>
           </a:p>
@@ -2543,7 +2654,7 @@
             <a:pPr rtl="0"/>
             <a:fld id="{0277B9E3-6C0A-45A5-BAE5-CD19B242173D}" type="datetime1">
               <a:rPr lang="es-ES" noProof="0" smtClean="0"/>
-              <a:t>18/02/2026</a:t>
+              <a:t>08/04/2026</a:t>
             </a:fld>
             <a:endParaRPr lang="es-ES" noProof="0" dirty="0"/>
           </a:p>
@@ -2731,7 +2842,7 @@
             <a:pPr rtl="0"/>
             <a:fld id="{AB41DD2C-FA4F-413E-A1B5-23565A0780B7}" type="datetime1">
               <a:rPr lang="es-ES" noProof="0" smtClean="0"/>
-              <a:t>18/02/2026</a:t>
+              <a:t>08/04/2026</a:t>
             </a:fld>
             <a:endParaRPr lang="es-ES" noProof="0" dirty="0"/>
           </a:p>
@@ -2981,7 +3092,7 @@
             <a:pPr rtl="0"/>
             <a:fld id="{0D82DBE2-B5E9-4999-A9C0-55ED93FCE73D}" type="datetime1">
               <a:rPr lang="es-ES" noProof="0" smtClean="0"/>
-              <a:t>18/02/2026</a:t>
+              <a:t>08/04/2026</a:t>
             </a:fld>
             <a:endParaRPr lang="es-ES" noProof="0" dirty="0"/>
           </a:p>
@@ -3231,7 +3342,7 @@
             <a:pPr rtl="0"/>
             <a:fld id="{89B7BC24-C90D-4DAD-A6CB-BBA58C4D57BB}" type="datetime1">
               <a:rPr lang="es-ES" noProof="0" smtClean="0"/>
-              <a:t>18/02/2026</a:t>
+              <a:t>08/04/2026</a:t>
             </a:fld>
             <a:endParaRPr lang="es-ES" noProof="0" dirty="0"/>
           </a:p>
@@ -3494,7 +3605,7 @@
             <a:pPr rtl="0"/>
             <a:fld id="{217D4995-77A4-48E5-92B1-2DC992A39FBB}" type="datetime1">
               <a:rPr lang="es-ES" noProof="0" smtClean="0"/>
-              <a:t>18/02/2026</a:t>
+              <a:t>08/04/2026</a:t>
             </a:fld>
             <a:endParaRPr lang="es-ES" noProof="0" dirty="0"/>
           </a:p>
@@ -3768,7 +3879,7 @@
             <a:pPr rtl="0"/>
             <a:fld id="{AE8112B3-1F24-452F-80DE-56BF301098EC}" type="datetime1">
               <a:rPr lang="es-ES" noProof="0" smtClean="0"/>
-              <a:t>18/02/2026</a:t>
+              <a:t>08/04/2026</a:t>
             </a:fld>
             <a:endParaRPr lang="es-ES" noProof="0" dirty="0"/>
           </a:p>
@@ -4134,7 +4245,7 @@
             <a:pPr rtl="0"/>
             <a:fld id="{39B46DA2-8C2E-44C4-A865-CD3D33CFD45F}" type="datetime1">
               <a:rPr lang="es-ES" noProof="0" smtClean="0"/>
-              <a:t>18/02/2026</a:t>
+              <a:t>08/04/2026</a:t>
             </a:fld>
             <a:endParaRPr lang="es-ES" noProof="0" dirty="0"/>
           </a:p>
@@ -4489,7 +4600,7 @@
             <a:pPr rtl="0"/>
             <a:fld id="{D1525062-C568-4AE5-A98F-45E6D6D3E9AC}" type="datetime1">
               <a:rPr lang="es-ES" noProof="0" smtClean="0"/>
-              <a:t>18/02/2026</a:t>
+              <a:t>08/04/2026</a:t>
             </a:fld>
             <a:endParaRPr lang="es-ES" noProof="0" dirty="0"/>
           </a:p>
@@ -4984,7 +5095,7 @@
             <a:pPr rtl="0"/>
             <a:fld id="{8EBA81B0-EA87-4E7B-A74D-942650D6BCED}" type="datetime1">
               <a:rPr lang="es-ES" noProof="0" smtClean="0"/>
-              <a:t>18/02/2026</a:t>
+              <a:t>08/04/2026</a:t>
             </a:fld>
             <a:endParaRPr lang="es-ES" noProof="0" dirty="0"/>
           </a:p>
@@ -5479,7 +5590,7 @@
             <a:pPr rtl="0"/>
             <a:fld id="{F6653BDA-CE15-46D4-A5A4-C9E9758DEFB2}" type="datetime1">
               <a:rPr lang="es-ES" noProof="0" smtClean="0"/>
-              <a:t>18/02/2026</a:t>
+              <a:t>08/04/2026</a:t>
             </a:fld>
             <a:endParaRPr lang="es-ES" noProof="0" dirty="0"/>
           </a:p>
@@ -5703,7 +5814,7 @@
             <a:pPr rtl="0"/>
             <a:fld id="{72696FBB-EB5C-4293-9014-59E70AE1A5E6}" type="datetime1">
               <a:rPr lang="es-ES" noProof="0" smtClean="0"/>
-              <a:t>18/02/2026</a:t>
+              <a:t>08/04/2026</a:t>
             </a:fld>
             <a:endParaRPr lang="es-ES" noProof="0" dirty="0"/>
           </a:p>
@@ -8172,6 +8283,2658 @@
     <p:extLst>
       <p:ext uri="{BB962C8B-B14F-4D97-AF65-F5344CB8AC3E}">
         <p14:creationId xmlns:p14="http://schemas.microsoft.com/office/powerpoint/2010/main" val="2416157386"/>
+      </p:ext>
+    </p:extLst>
+  </p:cSld>
+  <p:clrMapOvr>
+    <a:masterClrMapping/>
+  </p:clrMapOvr>
+  <mc:AlternateContent xmlns:mc="http://schemas.openxmlformats.org/markup-compatibility/2006" xmlns:p14="http://schemas.microsoft.com/office/powerpoint/2010/main">
+    <mc:Choice Requires="p14">
+      <p:transition spd="med" p14:dur="700" advTm="4126">
+        <p:fade/>
+      </p:transition>
+    </mc:Choice>
+    <mc:Fallback xmlns="">
+      <p:transition spd="med" advTm="4126">
+        <p:fade/>
+      </p:transition>
+    </mc:Fallback>
+  </mc:AlternateContent>
+</p:sld>
+</file>
+
+<file path=ppt/slides/slide2.xml><?xml version="1.0" encoding="utf-8"?>
+<p:sld xmlns:a="http://schemas.openxmlformats.org/drawingml/2006/main" xmlns:r="http://schemas.openxmlformats.org/officeDocument/2006/relationships" xmlns:p="http://schemas.openxmlformats.org/presentationml/2006/main">
+  <p:cSld>
+    <p:spTree>
+      <p:nvGrpSpPr>
+        <p:cNvPr id="1" name="">
+          <a:extLst>
+            <a:ext uri="{FF2B5EF4-FFF2-40B4-BE49-F238E27FC236}">
+              <a16:creationId xmlns:a16="http://schemas.microsoft.com/office/drawing/2014/main" id="{A51D3435-70E3-C0A4-2A59-9BB41C6AEDE6}"/>
+            </a:ext>
+          </a:extLst>
+        </p:cNvPr>
+        <p:cNvGrpSpPr/>
+        <p:nvPr/>
+      </p:nvGrpSpPr>
+      <p:grpSpPr>
+        <a:xfrm>
+          <a:off x="0" y="0"/>
+          <a:ext cx="0" cy="0"/>
+          <a:chOff x="0" y="0"/>
+          <a:chExt cx="0" cy="0"/>
+        </a:xfrm>
+      </p:grpSpPr>
+      <p:sp>
+        <p:nvSpPr>
+          <p:cNvPr id="5" name="Rectangle: Rounded Corners 4">
+            <a:extLst>
+              <a:ext uri="{FF2B5EF4-FFF2-40B4-BE49-F238E27FC236}">
+                <a16:creationId xmlns:a16="http://schemas.microsoft.com/office/drawing/2014/main" id="{324751C4-81EE-679F-AB74-5182442D20B3}"/>
+              </a:ext>
+            </a:extLst>
+          </p:cNvPr>
+          <p:cNvSpPr/>
+          <p:nvPr/>
+        </p:nvSpPr>
+        <p:spPr>
+          <a:xfrm>
+            <a:off x="1501647" y="1277189"/>
+            <a:ext cx="2033685" cy="360000"/>
+          </a:xfrm>
+          <a:prstGeom prst="roundRect">
+            <a:avLst>
+              <a:gd name="adj" fmla="val 50000"/>
+            </a:avLst>
+          </a:prstGeom>
+          <a:solidFill>
+            <a:srgbClr val="3B3B3B"/>
+          </a:solidFill>
+          <a:ln>
+            <a:noFill/>
+          </a:ln>
+        </p:spPr>
+        <p:style>
+          <a:lnRef idx="2">
+            <a:schemeClr val="accent1">
+              <a:shade val="15000"/>
+            </a:schemeClr>
+          </a:lnRef>
+          <a:fillRef idx="1">
+            <a:schemeClr val="accent1"/>
+          </a:fillRef>
+          <a:effectRef idx="0">
+            <a:schemeClr val="accent1"/>
+          </a:effectRef>
+          <a:fontRef idx="minor">
+            <a:schemeClr val="lt1"/>
+          </a:fontRef>
+        </p:style>
+        <p:txBody>
+          <a:bodyPr rtlCol="0" anchor="ctr"/>
+          <a:lstStyle/>
+          <a:p>
+            <a:pPr algn="ctr"/>
+            <a:r>
+              <a:rPr lang="en-US" sz="1500" dirty="0">
+                <a:solidFill>
+                  <a:schemeClr val="bg1"/>
+                </a:solidFill>
+              </a:rPr>
+              <a:t>RAW Data collection</a:t>
+            </a:r>
+            <a:endParaRPr lang="es-CO" sz="1500" dirty="0">
+              <a:solidFill>
+                <a:schemeClr val="bg1"/>
+              </a:solidFill>
+            </a:endParaRPr>
+          </a:p>
+        </p:txBody>
+      </p:sp>
+      <p:sp>
+        <p:nvSpPr>
+          <p:cNvPr id="7" name="Rectangle: Rounded Corners 6">
+            <a:extLst>
+              <a:ext uri="{FF2B5EF4-FFF2-40B4-BE49-F238E27FC236}">
+                <a16:creationId xmlns:a16="http://schemas.microsoft.com/office/drawing/2014/main" id="{79190D7B-CEC4-BADC-8080-9578831682A5}"/>
+              </a:ext>
+            </a:extLst>
+          </p:cNvPr>
+          <p:cNvSpPr/>
+          <p:nvPr/>
+        </p:nvSpPr>
+        <p:spPr>
+          <a:xfrm>
+            <a:off x="3796085" y="1269643"/>
+            <a:ext cx="2214494" cy="360000"/>
+          </a:xfrm>
+          <a:prstGeom prst="roundRect">
+            <a:avLst>
+              <a:gd name="adj" fmla="val 50000"/>
+            </a:avLst>
+          </a:prstGeom>
+          <a:solidFill>
+            <a:srgbClr val="3B3B3B"/>
+          </a:solidFill>
+          <a:ln>
+            <a:noFill/>
+          </a:ln>
+        </p:spPr>
+        <p:style>
+          <a:lnRef idx="2">
+            <a:schemeClr val="accent1">
+              <a:shade val="15000"/>
+            </a:schemeClr>
+          </a:lnRef>
+          <a:fillRef idx="1">
+            <a:schemeClr val="accent1"/>
+          </a:fillRef>
+          <a:effectRef idx="0">
+            <a:schemeClr val="accent1"/>
+          </a:effectRef>
+          <a:fontRef idx="minor">
+            <a:schemeClr val="lt1"/>
+          </a:fontRef>
+        </p:style>
+        <p:txBody>
+          <a:bodyPr rtlCol="0" anchor="ctr"/>
+          <a:lstStyle/>
+          <a:p>
+            <a:pPr algn="ctr"/>
+            <a:r>
+              <a:rPr lang="en-US" sz="1500" dirty="0">
+                <a:solidFill>
+                  <a:schemeClr val="bg1"/>
+                </a:solidFill>
+              </a:rPr>
+              <a:t>Statistical aggregation</a:t>
+            </a:r>
+            <a:endParaRPr lang="es-CO" sz="1500" dirty="0">
+              <a:solidFill>
+                <a:schemeClr val="bg1"/>
+              </a:solidFill>
+            </a:endParaRPr>
+          </a:p>
+        </p:txBody>
+      </p:sp>
+      <p:sp>
+        <p:nvSpPr>
+          <p:cNvPr id="8" name="Rectangle: Rounded Corners 7">
+            <a:extLst>
+              <a:ext uri="{FF2B5EF4-FFF2-40B4-BE49-F238E27FC236}">
+                <a16:creationId xmlns:a16="http://schemas.microsoft.com/office/drawing/2014/main" id="{9B6A06CF-5846-C303-5A70-B973CB90DE0B}"/>
+              </a:ext>
+            </a:extLst>
+          </p:cNvPr>
+          <p:cNvSpPr/>
+          <p:nvPr/>
+        </p:nvSpPr>
+        <p:spPr>
+          <a:xfrm>
+            <a:off x="8294432" y="1283877"/>
+            <a:ext cx="1831773" cy="360000"/>
+          </a:xfrm>
+          <a:prstGeom prst="roundRect">
+            <a:avLst>
+              <a:gd name="adj" fmla="val 50000"/>
+            </a:avLst>
+          </a:prstGeom>
+          <a:solidFill>
+            <a:srgbClr val="3B3B3B"/>
+          </a:solidFill>
+          <a:ln>
+            <a:noFill/>
+          </a:ln>
+        </p:spPr>
+        <p:style>
+          <a:lnRef idx="2">
+            <a:schemeClr val="accent1">
+              <a:shade val="15000"/>
+            </a:schemeClr>
+          </a:lnRef>
+          <a:fillRef idx="1">
+            <a:schemeClr val="accent1"/>
+          </a:fillRef>
+          <a:effectRef idx="0">
+            <a:schemeClr val="accent1"/>
+          </a:effectRef>
+          <a:fontRef idx="minor">
+            <a:schemeClr val="lt1"/>
+          </a:fontRef>
+        </p:style>
+        <p:txBody>
+          <a:bodyPr rtlCol="0" anchor="ctr"/>
+          <a:lstStyle/>
+          <a:p>
+            <a:pPr algn="ctr"/>
+            <a:r>
+              <a:rPr lang="en-US" sz="1500" dirty="0">
+                <a:solidFill>
+                  <a:schemeClr val="bg1"/>
+                </a:solidFill>
+              </a:rPr>
+              <a:t>Outlier detection</a:t>
+            </a:r>
+            <a:endParaRPr lang="es-CO" sz="1500" dirty="0">
+              <a:solidFill>
+                <a:schemeClr val="bg1"/>
+              </a:solidFill>
+            </a:endParaRPr>
+          </a:p>
+        </p:txBody>
+      </p:sp>
+      <p:sp>
+        <p:nvSpPr>
+          <p:cNvPr id="9" name="Rectangle: Rounded Corners 8">
+            <a:extLst>
+              <a:ext uri="{FF2B5EF4-FFF2-40B4-BE49-F238E27FC236}">
+                <a16:creationId xmlns:a16="http://schemas.microsoft.com/office/drawing/2014/main" id="{807C9F9D-2FD1-5530-18E6-EAF8F0CC7A44}"/>
+              </a:ext>
+            </a:extLst>
+          </p:cNvPr>
+          <p:cNvSpPr/>
+          <p:nvPr/>
+        </p:nvSpPr>
+        <p:spPr>
+          <a:xfrm>
+            <a:off x="6658131" y="1773204"/>
+            <a:ext cx="1868500" cy="360000"/>
+          </a:xfrm>
+          <a:prstGeom prst="roundRect">
+            <a:avLst>
+              <a:gd name="adj" fmla="val 50000"/>
+            </a:avLst>
+          </a:prstGeom>
+          <a:solidFill>
+            <a:srgbClr val="3B3B3B"/>
+          </a:solidFill>
+          <a:ln>
+            <a:noFill/>
+          </a:ln>
+        </p:spPr>
+        <p:style>
+          <a:lnRef idx="2">
+            <a:schemeClr val="accent1">
+              <a:shade val="15000"/>
+            </a:schemeClr>
+          </a:lnRef>
+          <a:fillRef idx="1">
+            <a:schemeClr val="accent1"/>
+          </a:fillRef>
+          <a:effectRef idx="0">
+            <a:schemeClr val="accent1"/>
+          </a:effectRef>
+          <a:fontRef idx="minor">
+            <a:schemeClr val="lt1"/>
+          </a:fontRef>
+        </p:style>
+        <p:txBody>
+          <a:bodyPr rtlCol="0" anchor="ctr"/>
+          <a:lstStyle/>
+          <a:p>
+            <a:pPr algn="ctr"/>
+            <a:r>
+              <a:rPr lang="en-US" sz="1500" dirty="0">
+                <a:solidFill>
+                  <a:schemeClr val="bg1"/>
+                </a:solidFill>
+              </a:rPr>
+              <a:t>PDF’s parameters</a:t>
+            </a:r>
+            <a:endParaRPr lang="es-CO" sz="1500" dirty="0">
+              <a:solidFill>
+                <a:schemeClr val="bg1"/>
+              </a:solidFill>
+            </a:endParaRPr>
+          </a:p>
+        </p:txBody>
+      </p:sp>
+      <p:cxnSp>
+        <p:nvCxnSpPr>
+          <p:cNvPr id="15" name="Straight Arrow Connector 14">
+            <a:extLst>
+              <a:ext uri="{FF2B5EF4-FFF2-40B4-BE49-F238E27FC236}">
+                <a16:creationId xmlns:a16="http://schemas.microsoft.com/office/drawing/2014/main" id="{89F7DCA0-8CA8-1FE9-DA74-29FEBB4F1F45}"/>
+              </a:ext>
+            </a:extLst>
+          </p:cNvPr>
+          <p:cNvCxnSpPr>
+            <a:cxnSpLocks/>
+            <a:stCxn id="5" idx="3"/>
+            <a:endCxn id="7" idx="1"/>
+          </p:cNvCxnSpPr>
+          <p:nvPr/>
+        </p:nvCxnSpPr>
+        <p:spPr>
+          <a:xfrm flipV="1">
+            <a:off x="3535332" y="1449643"/>
+            <a:ext cx="260753" cy="7546"/>
+          </a:xfrm>
+          <a:prstGeom prst="straightConnector1">
+            <a:avLst/>
+          </a:prstGeom>
+          <a:ln w="7620">
+            <a:solidFill>
+              <a:schemeClr val="tx1"/>
+            </a:solidFill>
+            <a:tailEnd type="triangle" w="sm" len="lg"/>
+          </a:ln>
+        </p:spPr>
+        <p:style>
+          <a:lnRef idx="1">
+            <a:schemeClr val="accent1"/>
+          </a:lnRef>
+          <a:fillRef idx="0">
+            <a:schemeClr val="accent1"/>
+          </a:fillRef>
+          <a:effectRef idx="0">
+            <a:schemeClr val="accent1"/>
+          </a:effectRef>
+          <a:fontRef idx="minor">
+            <a:schemeClr val="tx1"/>
+          </a:fontRef>
+        </p:style>
+      </p:cxnSp>
+      <p:sp>
+        <p:nvSpPr>
+          <p:cNvPr id="17" name="Rectangle: Rounded Corners 16">
+            <a:extLst>
+              <a:ext uri="{FF2B5EF4-FFF2-40B4-BE49-F238E27FC236}">
+                <a16:creationId xmlns:a16="http://schemas.microsoft.com/office/drawing/2014/main" id="{9F2B6099-D3C7-A610-8CA9-9618B534C9FD}"/>
+              </a:ext>
+            </a:extLst>
+          </p:cNvPr>
+          <p:cNvSpPr/>
+          <p:nvPr/>
+        </p:nvSpPr>
+        <p:spPr>
+          <a:xfrm>
+            <a:off x="6200526" y="1277189"/>
+            <a:ext cx="1903959" cy="360000"/>
+          </a:xfrm>
+          <a:prstGeom prst="roundRect">
+            <a:avLst>
+              <a:gd name="adj" fmla="val 50000"/>
+            </a:avLst>
+          </a:prstGeom>
+          <a:solidFill>
+            <a:srgbClr val="3B3B3B"/>
+          </a:solidFill>
+          <a:ln>
+            <a:noFill/>
+          </a:ln>
+        </p:spPr>
+        <p:style>
+          <a:lnRef idx="2">
+            <a:schemeClr val="accent1">
+              <a:shade val="15000"/>
+            </a:schemeClr>
+          </a:lnRef>
+          <a:fillRef idx="1">
+            <a:schemeClr val="accent1"/>
+          </a:fillRef>
+          <a:effectRef idx="0">
+            <a:schemeClr val="accent1"/>
+          </a:effectRef>
+          <a:fontRef idx="minor">
+            <a:schemeClr val="lt1"/>
+          </a:fontRef>
+        </p:style>
+        <p:txBody>
+          <a:bodyPr rtlCol="0" anchor="ctr"/>
+          <a:lstStyle/>
+          <a:p>
+            <a:pPr algn="ctr"/>
+            <a:r>
+              <a:rPr lang="en-US" sz="1500" dirty="0">
+                <a:solidFill>
+                  <a:schemeClr val="bg1"/>
+                </a:solidFill>
+              </a:rPr>
+              <a:t>Zero &amp; null avoid</a:t>
+            </a:r>
+            <a:endParaRPr lang="es-CO" sz="1500" dirty="0">
+              <a:solidFill>
+                <a:schemeClr val="bg1"/>
+              </a:solidFill>
+            </a:endParaRPr>
+          </a:p>
+        </p:txBody>
+      </p:sp>
+      <p:sp>
+        <p:nvSpPr>
+          <p:cNvPr id="18" name="Rectangle: Rounded Corners 17">
+            <a:extLst>
+              <a:ext uri="{FF2B5EF4-FFF2-40B4-BE49-F238E27FC236}">
+                <a16:creationId xmlns:a16="http://schemas.microsoft.com/office/drawing/2014/main" id="{C88C028D-78F2-8B78-0308-69E0AB16BA07}"/>
+              </a:ext>
+            </a:extLst>
+          </p:cNvPr>
+          <p:cNvSpPr/>
+          <p:nvPr/>
+        </p:nvSpPr>
+        <p:spPr>
+          <a:xfrm>
+            <a:off x="4314226" y="1773204"/>
+            <a:ext cx="2135199" cy="360000"/>
+          </a:xfrm>
+          <a:prstGeom prst="roundRect">
+            <a:avLst>
+              <a:gd name="adj" fmla="val 50000"/>
+            </a:avLst>
+          </a:prstGeom>
+          <a:solidFill>
+            <a:srgbClr val="3B3B3B"/>
+          </a:solidFill>
+          <a:ln>
+            <a:noFill/>
+          </a:ln>
+        </p:spPr>
+        <p:style>
+          <a:lnRef idx="2">
+            <a:schemeClr val="accent1">
+              <a:shade val="15000"/>
+            </a:schemeClr>
+          </a:lnRef>
+          <a:fillRef idx="1">
+            <a:schemeClr val="accent1"/>
+          </a:fillRef>
+          <a:effectRef idx="0">
+            <a:schemeClr val="accent1"/>
+          </a:effectRef>
+          <a:fontRef idx="minor">
+            <a:schemeClr val="lt1"/>
+          </a:fontRef>
+        </p:style>
+        <p:txBody>
+          <a:bodyPr rtlCol="0" anchor="ctr"/>
+          <a:lstStyle/>
+          <a:p>
+            <a:pPr algn="ctr"/>
+            <a:r>
+              <a:rPr lang="en-US" sz="1500" dirty="0">
+                <a:solidFill>
+                  <a:schemeClr val="bg1"/>
+                </a:solidFill>
+              </a:rPr>
+              <a:t>PDF’s &amp; CDF’s values</a:t>
+            </a:r>
+            <a:endParaRPr lang="es-CO" sz="1500" dirty="0">
+              <a:solidFill>
+                <a:schemeClr val="bg1"/>
+              </a:solidFill>
+            </a:endParaRPr>
+          </a:p>
+        </p:txBody>
+      </p:sp>
+      <p:sp>
+        <p:nvSpPr>
+          <p:cNvPr id="19" name="Rectangle: Rounded Corners 18">
+            <a:extLst>
+              <a:ext uri="{FF2B5EF4-FFF2-40B4-BE49-F238E27FC236}">
+                <a16:creationId xmlns:a16="http://schemas.microsoft.com/office/drawing/2014/main" id="{166CC03B-0FC3-FB1D-78D9-E3AD306CA7C0}"/>
+              </a:ext>
+            </a:extLst>
+          </p:cNvPr>
+          <p:cNvSpPr/>
+          <p:nvPr/>
+        </p:nvSpPr>
+        <p:spPr>
+          <a:xfrm>
+            <a:off x="1188290" y="1773204"/>
+            <a:ext cx="2870274" cy="360000"/>
+          </a:xfrm>
+          <a:prstGeom prst="roundRect">
+            <a:avLst>
+              <a:gd name="adj" fmla="val 50000"/>
+            </a:avLst>
+          </a:prstGeom>
+          <a:solidFill>
+            <a:srgbClr val="3B3B3B"/>
+          </a:solidFill>
+          <a:ln>
+            <a:noFill/>
+          </a:ln>
+        </p:spPr>
+        <p:style>
+          <a:lnRef idx="2">
+            <a:schemeClr val="accent1">
+              <a:shade val="15000"/>
+            </a:schemeClr>
+          </a:lnRef>
+          <a:fillRef idx="1">
+            <a:schemeClr val="accent1"/>
+          </a:fillRef>
+          <a:effectRef idx="0">
+            <a:schemeClr val="accent1"/>
+          </a:effectRef>
+          <a:fontRef idx="minor">
+            <a:schemeClr val="lt1"/>
+          </a:fontRef>
+        </p:style>
+        <p:txBody>
+          <a:bodyPr rtlCol="0" anchor="ctr"/>
+          <a:lstStyle/>
+          <a:p>
+            <a:pPr algn="ctr"/>
+            <a:r>
+              <a:rPr lang="en-US" sz="1500" dirty="0">
+                <a:solidFill>
+                  <a:schemeClr val="bg1"/>
+                </a:solidFill>
+              </a:rPr>
+              <a:t>Log(PDF’s) &amp; Log(CDF’s) values</a:t>
+            </a:r>
+            <a:endParaRPr lang="es-CO" sz="1500" dirty="0">
+              <a:solidFill>
+                <a:schemeClr val="bg1"/>
+              </a:solidFill>
+            </a:endParaRPr>
+          </a:p>
+        </p:txBody>
+      </p:sp>
+      <p:sp>
+        <p:nvSpPr>
+          <p:cNvPr id="20" name="Rectangle: Rounded Corners 19">
+            <a:extLst>
+              <a:ext uri="{FF2B5EF4-FFF2-40B4-BE49-F238E27FC236}">
+                <a16:creationId xmlns:a16="http://schemas.microsoft.com/office/drawing/2014/main" id="{3BE536C9-57B5-0FE5-5F91-8E84550749EA}"/>
+              </a:ext>
+            </a:extLst>
+          </p:cNvPr>
+          <p:cNvSpPr/>
+          <p:nvPr/>
+        </p:nvSpPr>
+        <p:spPr>
+          <a:xfrm>
+            <a:off x="1617696" y="2276262"/>
+            <a:ext cx="1246402" cy="360000"/>
+          </a:xfrm>
+          <a:prstGeom prst="roundRect">
+            <a:avLst>
+              <a:gd name="adj" fmla="val 50000"/>
+            </a:avLst>
+          </a:prstGeom>
+          <a:solidFill>
+            <a:srgbClr val="3B3B3B"/>
+          </a:solidFill>
+          <a:ln>
+            <a:noFill/>
+          </a:ln>
+        </p:spPr>
+        <p:style>
+          <a:lnRef idx="2">
+            <a:schemeClr val="accent1">
+              <a:shade val="15000"/>
+            </a:schemeClr>
+          </a:lnRef>
+          <a:fillRef idx="1">
+            <a:schemeClr val="accent1"/>
+          </a:fillRef>
+          <a:effectRef idx="0">
+            <a:schemeClr val="accent1"/>
+          </a:effectRef>
+          <a:fontRef idx="minor">
+            <a:schemeClr val="lt1"/>
+          </a:fontRef>
+        </p:style>
+        <p:txBody>
+          <a:bodyPr rtlCol="0" anchor="ctr"/>
+          <a:lstStyle/>
+          <a:p>
+            <a:pPr algn="ctr"/>
+            <a:r>
+              <a:rPr lang="en-US" sz="1500" dirty="0">
+                <a:solidFill>
+                  <a:schemeClr val="bg1"/>
+                </a:solidFill>
+              </a:rPr>
+              <a:t>EDF’s values</a:t>
+            </a:r>
+            <a:endParaRPr lang="es-CO" sz="1500" dirty="0">
+              <a:solidFill>
+                <a:schemeClr val="bg1"/>
+              </a:solidFill>
+            </a:endParaRPr>
+          </a:p>
+        </p:txBody>
+      </p:sp>
+      <p:sp>
+        <p:nvSpPr>
+          <p:cNvPr id="21" name="Rectangle: Rounded Corners 20">
+            <a:extLst>
+              <a:ext uri="{FF2B5EF4-FFF2-40B4-BE49-F238E27FC236}">
+                <a16:creationId xmlns:a16="http://schemas.microsoft.com/office/drawing/2014/main" id="{F96E9CDE-8455-260C-9BE2-C84A4E82B514}"/>
+              </a:ext>
+            </a:extLst>
+          </p:cNvPr>
+          <p:cNvSpPr/>
+          <p:nvPr/>
+        </p:nvSpPr>
+        <p:spPr>
+          <a:xfrm>
+            <a:off x="3135936" y="2289600"/>
+            <a:ext cx="2350125" cy="360000"/>
+          </a:xfrm>
+          <a:prstGeom prst="roundRect">
+            <a:avLst>
+              <a:gd name="adj" fmla="val 50000"/>
+            </a:avLst>
+          </a:prstGeom>
+          <a:solidFill>
+            <a:srgbClr val="3B3B3B"/>
+          </a:solidFill>
+          <a:ln>
+            <a:noFill/>
+          </a:ln>
+        </p:spPr>
+        <p:style>
+          <a:lnRef idx="2">
+            <a:schemeClr val="accent1">
+              <a:shade val="15000"/>
+            </a:schemeClr>
+          </a:lnRef>
+          <a:fillRef idx="1">
+            <a:schemeClr val="accent1"/>
+          </a:fillRef>
+          <a:effectRef idx="0">
+            <a:schemeClr val="accent1"/>
+          </a:effectRef>
+          <a:fontRef idx="minor">
+            <a:schemeClr val="lt1"/>
+          </a:fontRef>
+        </p:style>
+        <p:txBody>
+          <a:bodyPr rtlCol="0" anchor="ctr"/>
+          <a:lstStyle/>
+          <a:p>
+            <a:pPr algn="ctr"/>
+            <a:r>
+              <a:rPr lang="en-US" sz="1500" dirty="0">
+                <a:solidFill>
+                  <a:schemeClr val="bg1"/>
+                </a:solidFill>
+              </a:rPr>
+              <a:t>K–S test (CDF’s vs EDF’s)</a:t>
+            </a:r>
+          </a:p>
+        </p:txBody>
+      </p:sp>
+      <p:sp>
+        <p:nvSpPr>
+          <p:cNvPr id="22" name="Rectangle: Rounded Corners 21">
+            <a:extLst>
+              <a:ext uri="{FF2B5EF4-FFF2-40B4-BE49-F238E27FC236}">
+                <a16:creationId xmlns:a16="http://schemas.microsoft.com/office/drawing/2014/main" id="{AC0B6E37-EABF-04E5-5D65-CA992FA6FBB1}"/>
+              </a:ext>
+            </a:extLst>
+          </p:cNvPr>
+          <p:cNvSpPr/>
+          <p:nvPr/>
+        </p:nvSpPr>
+        <p:spPr>
+          <a:xfrm>
+            <a:off x="5747241" y="2276262"/>
+            <a:ext cx="1873551" cy="360000"/>
+          </a:xfrm>
+          <a:prstGeom prst="roundRect">
+            <a:avLst>
+              <a:gd name="adj" fmla="val 50000"/>
+            </a:avLst>
+          </a:prstGeom>
+          <a:solidFill>
+            <a:srgbClr val="3B3B3B"/>
+          </a:solidFill>
+          <a:ln>
+            <a:noFill/>
+          </a:ln>
+        </p:spPr>
+        <p:style>
+          <a:lnRef idx="2">
+            <a:schemeClr val="accent1">
+              <a:shade val="15000"/>
+            </a:schemeClr>
+          </a:lnRef>
+          <a:fillRef idx="1">
+            <a:schemeClr val="accent1"/>
+          </a:fillRef>
+          <a:effectRef idx="0">
+            <a:schemeClr val="accent1"/>
+          </a:effectRef>
+          <a:fontRef idx="minor">
+            <a:schemeClr val="lt1"/>
+          </a:fontRef>
+        </p:style>
+        <p:txBody>
+          <a:bodyPr rtlCol="0" anchor="ctr"/>
+          <a:lstStyle/>
+          <a:p>
+            <a:pPr algn="ctr"/>
+            <a:r>
+              <a:rPr lang="en-US" sz="1500" dirty="0">
+                <a:solidFill>
+                  <a:schemeClr val="bg1"/>
+                </a:solidFill>
+              </a:rPr>
+              <a:t>Best Fit (</a:t>
+            </a:r>
+            <a:r>
+              <a:rPr lang="el-GR" sz="1500" dirty="0">
+                <a:solidFill>
+                  <a:schemeClr val="bg1"/>
+                </a:solidFill>
+              </a:rPr>
+              <a:t>Δ</a:t>
+            </a:r>
+            <a:r>
+              <a:rPr lang="es-CO" sz="1500" dirty="0">
+                <a:solidFill>
+                  <a:schemeClr val="bg1"/>
+                </a:solidFill>
+              </a:rPr>
+              <a:t>o &gt; </a:t>
+            </a:r>
+            <a:r>
+              <a:rPr lang="el-GR" sz="1500" dirty="0">
+                <a:solidFill>
+                  <a:schemeClr val="bg1"/>
+                </a:solidFill>
+              </a:rPr>
+              <a:t>Δ</a:t>
+            </a:r>
+            <a:r>
+              <a:rPr lang="en-US" sz="1500" dirty="0">
+                <a:solidFill>
+                  <a:schemeClr val="bg1"/>
+                </a:solidFill>
+              </a:rPr>
+              <a:t>)</a:t>
+            </a:r>
+            <a:endParaRPr lang="es-CO" sz="1500" dirty="0">
+              <a:solidFill>
+                <a:schemeClr val="bg1"/>
+              </a:solidFill>
+            </a:endParaRPr>
+          </a:p>
+        </p:txBody>
+      </p:sp>
+      <p:sp>
+        <p:nvSpPr>
+          <p:cNvPr id="23" name="Rectangle: Rounded Corners 22">
+            <a:extLst>
+              <a:ext uri="{FF2B5EF4-FFF2-40B4-BE49-F238E27FC236}">
+                <a16:creationId xmlns:a16="http://schemas.microsoft.com/office/drawing/2014/main" id="{A9880C90-FC20-5FEC-9900-70A3E76EB665}"/>
+              </a:ext>
+            </a:extLst>
+          </p:cNvPr>
+          <p:cNvSpPr/>
+          <p:nvPr/>
+        </p:nvSpPr>
+        <p:spPr>
+          <a:xfrm>
+            <a:off x="7892630" y="2276262"/>
+            <a:ext cx="2200489" cy="360000"/>
+          </a:xfrm>
+          <a:prstGeom prst="roundRect">
+            <a:avLst>
+              <a:gd name="adj" fmla="val 50000"/>
+            </a:avLst>
+          </a:prstGeom>
+          <a:solidFill>
+            <a:srgbClr val="3B3B3B"/>
+          </a:solidFill>
+          <a:ln>
+            <a:noFill/>
+          </a:ln>
+        </p:spPr>
+        <p:style>
+          <a:lnRef idx="2">
+            <a:schemeClr val="accent1">
+              <a:shade val="15000"/>
+            </a:schemeClr>
+          </a:lnRef>
+          <a:fillRef idx="1">
+            <a:schemeClr val="accent1"/>
+          </a:fillRef>
+          <a:effectRef idx="0">
+            <a:schemeClr val="accent1"/>
+          </a:effectRef>
+          <a:fontRef idx="minor">
+            <a:schemeClr val="lt1"/>
+          </a:fontRef>
+        </p:style>
+        <p:txBody>
+          <a:bodyPr rtlCol="0" anchor="ctr"/>
+          <a:lstStyle/>
+          <a:p>
+            <a:pPr algn="ctr"/>
+            <a:r>
+              <a:rPr lang="en-US" sz="1500" dirty="0">
+                <a:solidFill>
+                  <a:schemeClr val="bg1"/>
+                </a:solidFill>
+              </a:rPr>
+              <a:t>Extreme values for Tr´s</a:t>
+            </a:r>
+            <a:endParaRPr lang="es-CO" sz="1500" baseline="-25000" dirty="0">
+              <a:solidFill>
+                <a:schemeClr val="bg1"/>
+              </a:solidFill>
+            </a:endParaRPr>
+          </a:p>
+        </p:txBody>
+      </p:sp>
+      <p:cxnSp>
+        <p:nvCxnSpPr>
+          <p:cNvPr id="24" name="Straight Arrow Connector 23">
+            <a:extLst>
+              <a:ext uri="{FF2B5EF4-FFF2-40B4-BE49-F238E27FC236}">
+                <a16:creationId xmlns:a16="http://schemas.microsoft.com/office/drawing/2014/main" id="{72B3879C-B00F-C2CB-5D4A-471EAFC552F7}"/>
+              </a:ext>
+            </a:extLst>
+          </p:cNvPr>
+          <p:cNvCxnSpPr>
+            <a:cxnSpLocks/>
+            <a:stCxn id="7" idx="3"/>
+            <a:endCxn id="17" idx="1"/>
+          </p:cNvCxnSpPr>
+          <p:nvPr/>
+        </p:nvCxnSpPr>
+        <p:spPr>
+          <a:xfrm>
+            <a:off x="6010579" y="1449643"/>
+            <a:ext cx="189947" cy="7546"/>
+          </a:xfrm>
+          <a:prstGeom prst="straightConnector1">
+            <a:avLst/>
+          </a:prstGeom>
+          <a:ln w="7620">
+            <a:solidFill>
+              <a:schemeClr val="tx1"/>
+            </a:solidFill>
+            <a:tailEnd type="triangle" w="sm" len="lg"/>
+          </a:ln>
+        </p:spPr>
+        <p:style>
+          <a:lnRef idx="1">
+            <a:schemeClr val="accent1"/>
+          </a:lnRef>
+          <a:fillRef idx="0">
+            <a:schemeClr val="accent1"/>
+          </a:fillRef>
+          <a:effectRef idx="0">
+            <a:schemeClr val="accent1"/>
+          </a:effectRef>
+          <a:fontRef idx="minor">
+            <a:schemeClr val="tx1"/>
+          </a:fontRef>
+        </p:style>
+      </p:cxnSp>
+      <p:cxnSp>
+        <p:nvCxnSpPr>
+          <p:cNvPr id="27" name="Straight Arrow Connector 26">
+            <a:extLst>
+              <a:ext uri="{FF2B5EF4-FFF2-40B4-BE49-F238E27FC236}">
+                <a16:creationId xmlns:a16="http://schemas.microsoft.com/office/drawing/2014/main" id="{C888D6F3-9BA7-5C2B-1929-61498850EE7F}"/>
+              </a:ext>
+            </a:extLst>
+          </p:cNvPr>
+          <p:cNvCxnSpPr>
+            <a:cxnSpLocks/>
+            <a:stCxn id="17" idx="3"/>
+            <a:endCxn id="8" idx="1"/>
+          </p:cNvCxnSpPr>
+          <p:nvPr/>
+        </p:nvCxnSpPr>
+        <p:spPr>
+          <a:xfrm>
+            <a:off x="8104485" y="1457189"/>
+            <a:ext cx="189947" cy="6688"/>
+          </a:xfrm>
+          <a:prstGeom prst="straightConnector1">
+            <a:avLst/>
+          </a:prstGeom>
+          <a:ln w="7620">
+            <a:solidFill>
+              <a:schemeClr val="tx1"/>
+            </a:solidFill>
+            <a:tailEnd type="triangle" w="sm" len="lg"/>
+          </a:ln>
+        </p:spPr>
+        <p:style>
+          <a:lnRef idx="1">
+            <a:schemeClr val="accent1"/>
+          </a:lnRef>
+          <a:fillRef idx="0">
+            <a:schemeClr val="accent1"/>
+          </a:fillRef>
+          <a:effectRef idx="0">
+            <a:schemeClr val="accent1"/>
+          </a:effectRef>
+          <a:fontRef idx="minor">
+            <a:schemeClr val="tx1"/>
+          </a:fontRef>
+        </p:style>
+      </p:cxnSp>
+      <p:cxnSp>
+        <p:nvCxnSpPr>
+          <p:cNvPr id="30" name="Straight Arrow Connector 29">
+            <a:extLst>
+              <a:ext uri="{FF2B5EF4-FFF2-40B4-BE49-F238E27FC236}">
+                <a16:creationId xmlns:a16="http://schemas.microsoft.com/office/drawing/2014/main" id="{A52F4F97-EA7E-E78F-2E54-0B51F42E8064}"/>
+              </a:ext>
+            </a:extLst>
+          </p:cNvPr>
+          <p:cNvCxnSpPr>
+            <a:cxnSpLocks/>
+            <a:stCxn id="56" idx="1"/>
+            <a:endCxn id="9" idx="3"/>
+          </p:cNvCxnSpPr>
+          <p:nvPr/>
+        </p:nvCxnSpPr>
+        <p:spPr>
+          <a:xfrm flipH="1">
+            <a:off x="8526631" y="1949688"/>
+            <a:ext cx="202256" cy="3516"/>
+          </a:xfrm>
+          <a:prstGeom prst="straightConnector1">
+            <a:avLst/>
+          </a:prstGeom>
+          <a:ln w="7620">
+            <a:solidFill>
+              <a:schemeClr val="tx1"/>
+            </a:solidFill>
+            <a:tailEnd type="triangle" w="sm" len="lg"/>
+          </a:ln>
+        </p:spPr>
+        <p:style>
+          <a:lnRef idx="1">
+            <a:schemeClr val="accent1"/>
+          </a:lnRef>
+          <a:fillRef idx="0">
+            <a:schemeClr val="accent1"/>
+          </a:fillRef>
+          <a:effectRef idx="0">
+            <a:schemeClr val="accent1"/>
+          </a:effectRef>
+          <a:fontRef idx="minor">
+            <a:schemeClr val="tx1"/>
+          </a:fontRef>
+        </p:style>
+      </p:cxnSp>
+      <p:cxnSp>
+        <p:nvCxnSpPr>
+          <p:cNvPr id="39" name="Connector: Elbow 38">
+            <a:extLst>
+              <a:ext uri="{FF2B5EF4-FFF2-40B4-BE49-F238E27FC236}">
+                <a16:creationId xmlns:a16="http://schemas.microsoft.com/office/drawing/2014/main" id="{B8ECFA48-125D-E668-8D83-8B35710F01E9}"/>
+              </a:ext>
+            </a:extLst>
+          </p:cNvPr>
+          <p:cNvCxnSpPr>
+            <a:cxnSpLocks/>
+            <a:stCxn id="8" idx="3"/>
+            <a:endCxn id="56" idx="3"/>
+          </p:cNvCxnSpPr>
+          <p:nvPr/>
+        </p:nvCxnSpPr>
+        <p:spPr>
+          <a:xfrm>
+            <a:off x="10126205" y="1463877"/>
+            <a:ext cx="564148" cy="485811"/>
+          </a:xfrm>
+          <a:prstGeom prst="bentConnector3">
+            <a:avLst>
+              <a:gd name="adj1" fmla="val 140521"/>
+            </a:avLst>
+          </a:prstGeom>
+          <a:ln w="7620">
+            <a:solidFill>
+              <a:schemeClr val="tx1"/>
+            </a:solidFill>
+            <a:tailEnd type="triangle" w="sm" len="lg"/>
+          </a:ln>
+        </p:spPr>
+        <p:style>
+          <a:lnRef idx="1">
+            <a:schemeClr val="accent1"/>
+          </a:lnRef>
+          <a:fillRef idx="0">
+            <a:schemeClr val="accent1"/>
+          </a:fillRef>
+          <a:effectRef idx="0">
+            <a:schemeClr val="accent1"/>
+          </a:effectRef>
+          <a:fontRef idx="minor">
+            <a:schemeClr val="tx1"/>
+          </a:fontRef>
+        </p:style>
+      </p:cxnSp>
+      <p:cxnSp>
+        <p:nvCxnSpPr>
+          <p:cNvPr id="41" name="Straight Arrow Connector 40">
+            <a:extLst>
+              <a:ext uri="{FF2B5EF4-FFF2-40B4-BE49-F238E27FC236}">
+                <a16:creationId xmlns:a16="http://schemas.microsoft.com/office/drawing/2014/main" id="{DC53F4A6-E334-F0AE-A004-5AE98CCFE7AA}"/>
+              </a:ext>
+            </a:extLst>
+          </p:cNvPr>
+          <p:cNvCxnSpPr>
+            <a:cxnSpLocks/>
+            <a:stCxn id="18" idx="1"/>
+            <a:endCxn id="19" idx="3"/>
+          </p:cNvCxnSpPr>
+          <p:nvPr/>
+        </p:nvCxnSpPr>
+        <p:spPr>
+          <a:xfrm flipH="1">
+            <a:off x="4058564" y="1953204"/>
+            <a:ext cx="255662" cy="0"/>
+          </a:xfrm>
+          <a:prstGeom prst="straightConnector1">
+            <a:avLst/>
+          </a:prstGeom>
+          <a:ln w="7620">
+            <a:solidFill>
+              <a:schemeClr val="tx1"/>
+            </a:solidFill>
+            <a:tailEnd type="triangle" w="sm" len="lg"/>
+          </a:ln>
+        </p:spPr>
+        <p:style>
+          <a:lnRef idx="1">
+            <a:schemeClr val="accent1"/>
+          </a:lnRef>
+          <a:fillRef idx="0">
+            <a:schemeClr val="accent1"/>
+          </a:fillRef>
+          <a:effectRef idx="0">
+            <a:schemeClr val="accent1"/>
+          </a:effectRef>
+          <a:fontRef idx="minor">
+            <a:schemeClr val="tx1"/>
+          </a:fontRef>
+        </p:style>
+      </p:cxnSp>
+      <p:cxnSp>
+        <p:nvCxnSpPr>
+          <p:cNvPr id="44" name="Straight Arrow Connector 43">
+            <a:extLst>
+              <a:ext uri="{FF2B5EF4-FFF2-40B4-BE49-F238E27FC236}">
+                <a16:creationId xmlns:a16="http://schemas.microsoft.com/office/drawing/2014/main" id="{6316902D-F06F-3D96-3FC7-0E4CD25DB0B0}"/>
+              </a:ext>
+            </a:extLst>
+          </p:cNvPr>
+          <p:cNvCxnSpPr>
+            <a:cxnSpLocks/>
+            <a:stCxn id="20" idx="3"/>
+            <a:endCxn id="21" idx="1"/>
+          </p:cNvCxnSpPr>
+          <p:nvPr/>
+        </p:nvCxnSpPr>
+        <p:spPr>
+          <a:xfrm>
+            <a:off x="2864098" y="2456262"/>
+            <a:ext cx="271838" cy="13338"/>
+          </a:xfrm>
+          <a:prstGeom prst="straightConnector1">
+            <a:avLst/>
+          </a:prstGeom>
+          <a:ln w="7620">
+            <a:solidFill>
+              <a:schemeClr val="tx1"/>
+            </a:solidFill>
+            <a:tailEnd type="triangle" w="sm" len="lg"/>
+          </a:ln>
+        </p:spPr>
+        <p:style>
+          <a:lnRef idx="1">
+            <a:schemeClr val="accent1"/>
+          </a:lnRef>
+          <a:fillRef idx="0">
+            <a:schemeClr val="accent1"/>
+          </a:fillRef>
+          <a:effectRef idx="0">
+            <a:schemeClr val="accent1"/>
+          </a:effectRef>
+          <a:fontRef idx="minor">
+            <a:schemeClr val="tx1"/>
+          </a:fontRef>
+        </p:style>
+      </p:cxnSp>
+      <p:cxnSp>
+        <p:nvCxnSpPr>
+          <p:cNvPr id="47" name="Straight Arrow Connector 46">
+            <a:extLst>
+              <a:ext uri="{FF2B5EF4-FFF2-40B4-BE49-F238E27FC236}">
+                <a16:creationId xmlns:a16="http://schemas.microsoft.com/office/drawing/2014/main" id="{48E947A2-74C6-368D-79F3-9C21B1912A3E}"/>
+              </a:ext>
+            </a:extLst>
+          </p:cNvPr>
+          <p:cNvCxnSpPr>
+            <a:cxnSpLocks/>
+            <a:stCxn id="21" idx="3"/>
+            <a:endCxn id="22" idx="1"/>
+          </p:cNvCxnSpPr>
+          <p:nvPr/>
+        </p:nvCxnSpPr>
+        <p:spPr>
+          <a:xfrm flipV="1">
+            <a:off x="5486061" y="2456262"/>
+            <a:ext cx="261180" cy="13338"/>
+          </a:xfrm>
+          <a:prstGeom prst="straightConnector1">
+            <a:avLst/>
+          </a:prstGeom>
+          <a:ln w="7620">
+            <a:solidFill>
+              <a:schemeClr val="tx1"/>
+            </a:solidFill>
+            <a:tailEnd type="triangle" w="sm" len="lg"/>
+          </a:ln>
+        </p:spPr>
+        <p:style>
+          <a:lnRef idx="1">
+            <a:schemeClr val="accent1"/>
+          </a:lnRef>
+          <a:fillRef idx="0">
+            <a:schemeClr val="accent1"/>
+          </a:fillRef>
+          <a:effectRef idx="0">
+            <a:schemeClr val="accent1"/>
+          </a:effectRef>
+          <a:fontRef idx="minor">
+            <a:schemeClr val="tx1"/>
+          </a:fontRef>
+        </p:style>
+      </p:cxnSp>
+      <p:cxnSp>
+        <p:nvCxnSpPr>
+          <p:cNvPr id="50" name="Connector: Elbow 49">
+            <a:extLst>
+              <a:ext uri="{FF2B5EF4-FFF2-40B4-BE49-F238E27FC236}">
+                <a16:creationId xmlns:a16="http://schemas.microsoft.com/office/drawing/2014/main" id="{5AF39321-0E3F-56F7-9231-595E2B3BA5BC}"/>
+              </a:ext>
+            </a:extLst>
+          </p:cNvPr>
+          <p:cNvCxnSpPr>
+            <a:cxnSpLocks/>
+            <a:stCxn id="19" idx="1"/>
+            <a:endCxn id="20" idx="1"/>
+          </p:cNvCxnSpPr>
+          <p:nvPr/>
+        </p:nvCxnSpPr>
+        <p:spPr>
+          <a:xfrm rot="10800000" flipH="1" flipV="1">
+            <a:off x="1188290" y="1953204"/>
+            <a:ext cx="429406" cy="503058"/>
+          </a:xfrm>
+          <a:prstGeom prst="bentConnector3">
+            <a:avLst>
+              <a:gd name="adj1" fmla="val -53236"/>
+            </a:avLst>
+          </a:prstGeom>
+          <a:ln w="7620">
+            <a:solidFill>
+              <a:schemeClr val="tx1"/>
+            </a:solidFill>
+            <a:tailEnd type="triangle" w="sm" len="lg"/>
+          </a:ln>
+        </p:spPr>
+        <p:style>
+          <a:lnRef idx="1">
+            <a:schemeClr val="accent1"/>
+          </a:lnRef>
+          <a:fillRef idx="0">
+            <a:schemeClr val="accent1"/>
+          </a:fillRef>
+          <a:effectRef idx="0">
+            <a:schemeClr val="accent1"/>
+          </a:effectRef>
+          <a:fontRef idx="minor">
+            <a:schemeClr val="tx1"/>
+          </a:fontRef>
+        </p:style>
+      </p:cxnSp>
+      <p:cxnSp>
+        <p:nvCxnSpPr>
+          <p:cNvPr id="53" name="Straight Arrow Connector 52">
+            <a:extLst>
+              <a:ext uri="{FF2B5EF4-FFF2-40B4-BE49-F238E27FC236}">
+                <a16:creationId xmlns:a16="http://schemas.microsoft.com/office/drawing/2014/main" id="{508A8C5C-7EBE-DE43-2F50-4A2EBE03D56F}"/>
+              </a:ext>
+            </a:extLst>
+          </p:cNvPr>
+          <p:cNvCxnSpPr>
+            <a:cxnSpLocks/>
+            <a:stCxn id="22" idx="3"/>
+            <a:endCxn id="23" idx="1"/>
+          </p:cNvCxnSpPr>
+          <p:nvPr/>
+        </p:nvCxnSpPr>
+        <p:spPr>
+          <a:xfrm>
+            <a:off x="7620792" y="2456262"/>
+            <a:ext cx="271838" cy="0"/>
+          </a:xfrm>
+          <a:prstGeom prst="straightConnector1">
+            <a:avLst/>
+          </a:prstGeom>
+          <a:ln w="7620">
+            <a:solidFill>
+              <a:schemeClr val="tx1"/>
+            </a:solidFill>
+            <a:tailEnd type="triangle" w="sm" len="lg"/>
+          </a:ln>
+        </p:spPr>
+        <p:style>
+          <a:lnRef idx="1">
+            <a:schemeClr val="accent1"/>
+          </a:lnRef>
+          <a:fillRef idx="0">
+            <a:schemeClr val="accent1"/>
+          </a:fillRef>
+          <a:effectRef idx="0">
+            <a:schemeClr val="accent1"/>
+          </a:effectRef>
+          <a:fontRef idx="minor">
+            <a:schemeClr val="tx1"/>
+          </a:fontRef>
+        </p:style>
+      </p:cxnSp>
+      <p:sp>
+        <p:nvSpPr>
+          <p:cNvPr id="56" name="Rectangle: Rounded Corners 55">
+            <a:extLst>
+              <a:ext uri="{FF2B5EF4-FFF2-40B4-BE49-F238E27FC236}">
+                <a16:creationId xmlns:a16="http://schemas.microsoft.com/office/drawing/2014/main" id="{92BBB7EA-DF92-4BC5-4231-F5541475F8B0}"/>
+              </a:ext>
+            </a:extLst>
+          </p:cNvPr>
+          <p:cNvSpPr/>
+          <p:nvPr/>
+        </p:nvSpPr>
+        <p:spPr>
+          <a:xfrm>
+            <a:off x="8728887" y="1769688"/>
+            <a:ext cx="1961466" cy="360000"/>
+          </a:xfrm>
+          <a:prstGeom prst="roundRect">
+            <a:avLst>
+              <a:gd name="adj" fmla="val 50000"/>
+            </a:avLst>
+          </a:prstGeom>
+          <a:solidFill>
+            <a:srgbClr val="3B3B3B"/>
+          </a:solidFill>
+          <a:ln>
+            <a:noFill/>
+          </a:ln>
+        </p:spPr>
+        <p:style>
+          <a:lnRef idx="2">
+            <a:schemeClr val="accent1">
+              <a:shade val="15000"/>
+            </a:schemeClr>
+          </a:lnRef>
+          <a:fillRef idx="1">
+            <a:schemeClr val="accent1"/>
+          </a:fillRef>
+          <a:effectRef idx="0">
+            <a:schemeClr val="accent1"/>
+          </a:effectRef>
+          <a:fontRef idx="minor">
+            <a:schemeClr val="lt1"/>
+          </a:fontRef>
+        </p:style>
+        <p:txBody>
+          <a:bodyPr rtlCol="0" anchor="ctr"/>
+          <a:lstStyle/>
+          <a:p>
+            <a:pPr algn="ctr"/>
+            <a:r>
+              <a:rPr lang="en-US" sz="1500" dirty="0">
+                <a:solidFill>
+                  <a:schemeClr val="bg1"/>
+                </a:solidFill>
+              </a:rPr>
+              <a:t>General n data filter</a:t>
+            </a:r>
+            <a:endParaRPr lang="es-CO" sz="1500" dirty="0">
+              <a:solidFill>
+                <a:schemeClr val="bg1"/>
+              </a:solidFill>
+            </a:endParaRPr>
+          </a:p>
+        </p:txBody>
+      </p:sp>
+      <p:sp>
+        <p:nvSpPr>
+          <p:cNvPr id="186" name="TextBox 185">
+            <a:extLst>
+              <a:ext uri="{FF2B5EF4-FFF2-40B4-BE49-F238E27FC236}">
+                <a16:creationId xmlns:a16="http://schemas.microsoft.com/office/drawing/2014/main" id="{48F82087-BD36-8546-D9AA-807AA7A1C22D}"/>
+              </a:ext>
+            </a:extLst>
+          </p:cNvPr>
+          <p:cNvSpPr txBox="1"/>
+          <p:nvPr/>
+        </p:nvSpPr>
+        <p:spPr>
+          <a:xfrm>
+            <a:off x="3851801" y="870963"/>
+            <a:ext cx="4317556" cy="323165"/>
+          </a:xfrm>
+          <a:prstGeom prst="rect">
+            <a:avLst/>
+          </a:prstGeom>
+          <a:noFill/>
+        </p:spPr>
+        <p:txBody>
+          <a:bodyPr wrap="square" rtlCol="0">
+            <a:spAutoFit/>
+          </a:bodyPr>
+          <a:lstStyle/>
+          <a:p>
+            <a:pPr algn="ctr"/>
+            <a:r>
+              <a:rPr lang="en-US" sz="1500" dirty="0"/>
+              <a:t>Diagram of Station PMP processing</a:t>
+            </a:r>
+            <a:endParaRPr lang="es-CO" sz="1500" dirty="0"/>
+          </a:p>
+        </p:txBody>
+      </p:sp>
+      <p:cxnSp>
+        <p:nvCxnSpPr>
+          <p:cNvPr id="189" name="Straight Arrow Connector 188">
+            <a:extLst>
+              <a:ext uri="{FF2B5EF4-FFF2-40B4-BE49-F238E27FC236}">
+                <a16:creationId xmlns:a16="http://schemas.microsoft.com/office/drawing/2014/main" id="{DBAF8315-9240-6AA0-A19F-7DC7944C7075}"/>
+              </a:ext>
+            </a:extLst>
+          </p:cNvPr>
+          <p:cNvCxnSpPr>
+            <a:cxnSpLocks/>
+            <a:stCxn id="9" idx="1"/>
+            <a:endCxn id="18" idx="3"/>
+          </p:cNvCxnSpPr>
+          <p:nvPr/>
+        </p:nvCxnSpPr>
+        <p:spPr>
+          <a:xfrm flipH="1">
+            <a:off x="6449425" y="1953204"/>
+            <a:ext cx="208706" cy="0"/>
+          </a:xfrm>
+          <a:prstGeom prst="straightConnector1">
+            <a:avLst/>
+          </a:prstGeom>
+          <a:ln w="7620">
+            <a:solidFill>
+              <a:schemeClr val="tx1"/>
+            </a:solidFill>
+            <a:tailEnd type="triangle" w="sm" len="lg"/>
+          </a:ln>
+        </p:spPr>
+        <p:style>
+          <a:lnRef idx="1">
+            <a:schemeClr val="accent1"/>
+          </a:lnRef>
+          <a:fillRef idx="0">
+            <a:schemeClr val="accent1"/>
+          </a:fillRef>
+          <a:effectRef idx="0">
+            <a:schemeClr val="accent1"/>
+          </a:effectRef>
+          <a:fontRef idx="minor">
+            <a:schemeClr val="tx1"/>
+          </a:fontRef>
+        </p:style>
+      </p:cxnSp>
+      <p:sp>
+        <p:nvSpPr>
+          <p:cNvPr id="46" name="Rectangle: Rounded Corners 45">
+            <a:extLst>
+              <a:ext uri="{FF2B5EF4-FFF2-40B4-BE49-F238E27FC236}">
+                <a16:creationId xmlns:a16="http://schemas.microsoft.com/office/drawing/2014/main" id="{61542832-4DD8-FFBA-EB14-9DEBEAA1E20C}"/>
+              </a:ext>
+            </a:extLst>
+          </p:cNvPr>
+          <p:cNvSpPr/>
+          <p:nvPr/>
+        </p:nvSpPr>
+        <p:spPr>
+          <a:xfrm>
+            <a:off x="1222089" y="4151121"/>
+            <a:ext cx="2465643" cy="540000"/>
+          </a:xfrm>
+          <a:prstGeom prst="roundRect">
+            <a:avLst>
+              <a:gd name="adj" fmla="val 50000"/>
+            </a:avLst>
+          </a:prstGeom>
+          <a:solidFill>
+            <a:srgbClr val="3B3B3B"/>
+          </a:solidFill>
+          <a:ln>
+            <a:noFill/>
+          </a:ln>
+        </p:spPr>
+        <p:style>
+          <a:lnRef idx="2">
+            <a:schemeClr val="accent1">
+              <a:shade val="15000"/>
+            </a:schemeClr>
+          </a:lnRef>
+          <a:fillRef idx="1">
+            <a:schemeClr val="accent1"/>
+          </a:fillRef>
+          <a:effectRef idx="0">
+            <a:schemeClr val="accent1"/>
+          </a:effectRef>
+          <a:fontRef idx="minor">
+            <a:schemeClr val="lt1"/>
+          </a:fontRef>
+        </p:style>
+        <p:txBody>
+          <a:bodyPr rtlCol="0" anchor="ctr"/>
+          <a:lstStyle/>
+          <a:p>
+            <a:pPr algn="ctr"/>
+            <a:r>
+              <a:rPr lang="en-US" sz="1500" dirty="0" err="1">
+                <a:solidFill>
+                  <a:schemeClr val="bg1"/>
+                </a:solidFill>
+              </a:rPr>
+              <a:t>i</a:t>
+            </a:r>
+            <a:r>
+              <a:rPr lang="en-US" sz="1500" dirty="0">
+                <a:solidFill>
+                  <a:schemeClr val="bg1"/>
+                </a:solidFill>
+              </a:rPr>
+              <a:t>. CNE - </a:t>
+            </a:r>
+            <a:r>
+              <a:rPr lang="en-US" sz="1500" dirty="0" err="1">
+                <a:solidFill>
+                  <a:schemeClr val="bg1"/>
+                </a:solidFill>
+              </a:rPr>
+              <a:t>Estaciones</a:t>
+            </a:r>
+            <a:r>
+              <a:rPr lang="en-US" sz="1500" dirty="0">
+                <a:solidFill>
+                  <a:schemeClr val="bg1"/>
+                </a:solidFill>
+              </a:rPr>
+              <a:t> y series de </a:t>
+            </a:r>
+            <a:r>
+              <a:rPr lang="en-US" sz="1500" dirty="0" err="1">
+                <a:solidFill>
+                  <a:schemeClr val="bg1"/>
+                </a:solidFill>
+              </a:rPr>
+              <a:t>datos</a:t>
+            </a:r>
+            <a:endParaRPr lang="es-CO" sz="1500" dirty="0">
+              <a:solidFill>
+                <a:schemeClr val="bg1"/>
+              </a:solidFill>
+            </a:endParaRPr>
+          </a:p>
+        </p:txBody>
+      </p:sp>
+      <p:sp>
+        <p:nvSpPr>
+          <p:cNvPr id="48" name="Rectangle: Rounded Corners 47">
+            <a:extLst>
+              <a:ext uri="{FF2B5EF4-FFF2-40B4-BE49-F238E27FC236}">
+                <a16:creationId xmlns:a16="http://schemas.microsoft.com/office/drawing/2014/main" id="{EC3D56F5-699C-0401-CAD2-99DCF5331853}"/>
+              </a:ext>
+            </a:extLst>
+          </p:cNvPr>
+          <p:cNvSpPr/>
+          <p:nvPr/>
+        </p:nvSpPr>
+        <p:spPr>
+          <a:xfrm>
+            <a:off x="3948485" y="4143575"/>
+            <a:ext cx="1951156" cy="540000"/>
+          </a:xfrm>
+          <a:prstGeom prst="roundRect">
+            <a:avLst>
+              <a:gd name="adj" fmla="val 50000"/>
+            </a:avLst>
+          </a:prstGeom>
+          <a:solidFill>
+            <a:srgbClr val="3B3B3B"/>
+          </a:solidFill>
+          <a:ln>
+            <a:noFill/>
+          </a:ln>
+        </p:spPr>
+        <p:style>
+          <a:lnRef idx="2">
+            <a:schemeClr val="accent1">
+              <a:shade val="15000"/>
+            </a:schemeClr>
+          </a:lnRef>
+          <a:fillRef idx="1">
+            <a:schemeClr val="accent1"/>
+          </a:fillRef>
+          <a:effectRef idx="0">
+            <a:schemeClr val="accent1"/>
+          </a:effectRef>
+          <a:fontRef idx="minor">
+            <a:schemeClr val="lt1"/>
+          </a:fontRef>
+        </p:style>
+        <p:txBody>
+          <a:bodyPr rtlCol="0" anchor="ctr"/>
+          <a:lstStyle/>
+          <a:p>
+            <a:pPr algn="ctr"/>
+            <a:r>
+              <a:rPr lang="en-US" sz="1500" dirty="0">
+                <a:solidFill>
+                  <a:schemeClr val="bg1"/>
+                </a:solidFill>
+              </a:rPr>
+              <a:t>ii. </a:t>
+            </a:r>
+            <a:r>
+              <a:rPr lang="en-US" sz="1500" dirty="0" err="1">
+                <a:solidFill>
+                  <a:schemeClr val="bg1"/>
+                </a:solidFill>
+              </a:rPr>
+              <a:t>Agregación</a:t>
+            </a:r>
+            <a:r>
+              <a:rPr lang="en-US" sz="1500" dirty="0">
+                <a:solidFill>
+                  <a:schemeClr val="bg1"/>
+                </a:solidFill>
+              </a:rPr>
+              <a:t> y </a:t>
+            </a:r>
+            <a:r>
+              <a:rPr lang="en-US" sz="1500" dirty="0" err="1">
+                <a:solidFill>
+                  <a:schemeClr val="bg1"/>
+                </a:solidFill>
+              </a:rPr>
+              <a:t>análisis</a:t>
+            </a:r>
+            <a:r>
+              <a:rPr lang="en-US" sz="1500" dirty="0">
+                <a:solidFill>
+                  <a:schemeClr val="bg1"/>
+                </a:solidFill>
+              </a:rPr>
+              <a:t> de </a:t>
+            </a:r>
+            <a:r>
+              <a:rPr lang="en-US" sz="1500" dirty="0" err="1">
+                <a:solidFill>
+                  <a:schemeClr val="bg1"/>
+                </a:solidFill>
+              </a:rPr>
+              <a:t>calidad</a:t>
+            </a:r>
+            <a:endParaRPr lang="es-CO" sz="1500" dirty="0">
+              <a:solidFill>
+                <a:schemeClr val="bg1"/>
+              </a:solidFill>
+            </a:endParaRPr>
+          </a:p>
+        </p:txBody>
+      </p:sp>
+      <p:cxnSp>
+        <p:nvCxnSpPr>
+          <p:cNvPr id="52" name="Straight Arrow Connector 51">
+            <a:extLst>
+              <a:ext uri="{FF2B5EF4-FFF2-40B4-BE49-F238E27FC236}">
+                <a16:creationId xmlns:a16="http://schemas.microsoft.com/office/drawing/2014/main" id="{2A020576-84D5-0F1F-A465-70427970B515}"/>
+              </a:ext>
+            </a:extLst>
+          </p:cNvPr>
+          <p:cNvCxnSpPr>
+            <a:cxnSpLocks/>
+            <a:stCxn id="46" idx="3"/>
+            <a:endCxn id="48" idx="1"/>
+          </p:cNvCxnSpPr>
+          <p:nvPr/>
+        </p:nvCxnSpPr>
+        <p:spPr>
+          <a:xfrm flipV="1">
+            <a:off x="3687732" y="4413575"/>
+            <a:ext cx="260753" cy="7546"/>
+          </a:xfrm>
+          <a:prstGeom prst="straightConnector1">
+            <a:avLst/>
+          </a:prstGeom>
+          <a:ln w="7620">
+            <a:solidFill>
+              <a:schemeClr val="tx1"/>
+            </a:solidFill>
+            <a:tailEnd type="triangle" w="sm" len="lg"/>
+          </a:ln>
+        </p:spPr>
+        <p:style>
+          <a:lnRef idx="1">
+            <a:schemeClr val="accent1"/>
+          </a:lnRef>
+          <a:fillRef idx="0">
+            <a:schemeClr val="accent1"/>
+          </a:fillRef>
+          <a:effectRef idx="0">
+            <a:schemeClr val="accent1"/>
+          </a:effectRef>
+          <a:fontRef idx="minor">
+            <a:schemeClr val="tx1"/>
+          </a:fontRef>
+        </p:style>
+      </p:cxnSp>
+      <p:sp>
+        <p:nvSpPr>
+          <p:cNvPr id="54" name="Rectangle: Rounded Corners 53">
+            <a:extLst>
+              <a:ext uri="{FF2B5EF4-FFF2-40B4-BE49-F238E27FC236}">
+                <a16:creationId xmlns:a16="http://schemas.microsoft.com/office/drawing/2014/main" id="{D8D861C4-F918-2D6D-A6D1-E6709A6B977E}"/>
+              </a:ext>
+            </a:extLst>
+          </p:cNvPr>
+          <p:cNvSpPr/>
+          <p:nvPr/>
+        </p:nvSpPr>
+        <p:spPr>
+          <a:xfrm>
+            <a:off x="6246669" y="4135899"/>
+            <a:ext cx="2576641" cy="540000"/>
+          </a:xfrm>
+          <a:prstGeom prst="roundRect">
+            <a:avLst>
+              <a:gd name="adj" fmla="val 50000"/>
+            </a:avLst>
+          </a:prstGeom>
+          <a:solidFill>
+            <a:srgbClr val="3B3B3B"/>
+          </a:solidFill>
+          <a:ln>
+            <a:noFill/>
+          </a:ln>
+        </p:spPr>
+        <p:style>
+          <a:lnRef idx="2">
+            <a:schemeClr val="accent1">
+              <a:shade val="15000"/>
+            </a:schemeClr>
+          </a:lnRef>
+          <a:fillRef idx="1">
+            <a:schemeClr val="accent1"/>
+          </a:fillRef>
+          <a:effectRef idx="0">
+            <a:schemeClr val="accent1"/>
+          </a:effectRef>
+          <a:fontRef idx="minor">
+            <a:schemeClr val="lt1"/>
+          </a:fontRef>
+        </p:style>
+        <p:txBody>
+          <a:bodyPr rtlCol="0" anchor="ctr"/>
+          <a:lstStyle/>
+          <a:p>
+            <a:pPr algn="ctr"/>
+            <a:r>
+              <a:rPr lang="en-US" sz="1500" dirty="0">
+                <a:solidFill>
+                  <a:schemeClr val="bg1"/>
+                </a:solidFill>
+              </a:rPr>
+              <a:t>iii. </a:t>
+            </a:r>
+            <a:r>
+              <a:rPr lang="en-US" sz="1500" dirty="0" err="1">
+                <a:solidFill>
+                  <a:schemeClr val="bg1"/>
+                </a:solidFill>
+              </a:rPr>
+              <a:t>Clasificación</a:t>
+            </a:r>
+            <a:r>
+              <a:rPr lang="en-US" sz="1500" dirty="0">
+                <a:solidFill>
+                  <a:schemeClr val="bg1"/>
+                </a:solidFill>
+              </a:rPr>
+              <a:t> </a:t>
+            </a:r>
+            <a:r>
+              <a:rPr lang="en-US" sz="1500" dirty="0" err="1">
+                <a:solidFill>
+                  <a:schemeClr val="bg1"/>
+                </a:solidFill>
+              </a:rPr>
+              <a:t>por</a:t>
+            </a:r>
+            <a:r>
+              <a:rPr lang="en-US" sz="1500" dirty="0">
+                <a:solidFill>
+                  <a:schemeClr val="bg1"/>
+                </a:solidFill>
+              </a:rPr>
+              <a:t> </a:t>
+            </a:r>
+            <a:r>
+              <a:rPr lang="en-US" sz="1500" dirty="0" err="1">
+                <a:solidFill>
+                  <a:schemeClr val="bg1"/>
+                </a:solidFill>
+              </a:rPr>
+              <a:t>Áreas</a:t>
+            </a:r>
+            <a:r>
+              <a:rPr lang="en-US" sz="1500" dirty="0">
+                <a:solidFill>
+                  <a:schemeClr val="bg1"/>
+                </a:solidFill>
+              </a:rPr>
+              <a:t> </a:t>
+            </a:r>
+            <a:r>
+              <a:rPr lang="en-US" sz="1500" dirty="0" err="1">
+                <a:solidFill>
+                  <a:schemeClr val="bg1"/>
+                </a:solidFill>
+              </a:rPr>
+              <a:t>Hidrográficas</a:t>
+            </a:r>
+            <a:r>
+              <a:rPr lang="en-US" sz="1500" dirty="0">
+                <a:solidFill>
+                  <a:schemeClr val="bg1"/>
+                </a:solidFill>
+              </a:rPr>
+              <a:t> - AH</a:t>
+            </a:r>
+            <a:endParaRPr lang="es-CO" sz="1500" dirty="0">
+              <a:solidFill>
+                <a:schemeClr val="bg1"/>
+              </a:solidFill>
+            </a:endParaRPr>
+          </a:p>
+        </p:txBody>
+      </p:sp>
+      <p:sp>
+        <p:nvSpPr>
+          <p:cNvPr id="59" name="Rectangle: Rounded Corners 58">
+            <a:extLst>
+              <a:ext uri="{FF2B5EF4-FFF2-40B4-BE49-F238E27FC236}">
+                <a16:creationId xmlns:a16="http://schemas.microsoft.com/office/drawing/2014/main" id="{4FB5DD7D-258E-3D71-2FCB-2227069FE4CD}"/>
+              </a:ext>
+            </a:extLst>
+          </p:cNvPr>
+          <p:cNvSpPr/>
+          <p:nvPr/>
+        </p:nvSpPr>
+        <p:spPr>
+          <a:xfrm>
+            <a:off x="3802163" y="4911734"/>
+            <a:ext cx="2350125" cy="540000"/>
+          </a:xfrm>
+          <a:prstGeom prst="roundRect">
+            <a:avLst>
+              <a:gd name="adj" fmla="val 50000"/>
+            </a:avLst>
+          </a:prstGeom>
+          <a:solidFill>
+            <a:srgbClr val="3B3B3B"/>
+          </a:solidFill>
+          <a:ln>
+            <a:noFill/>
+          </a:ln>
+        </p:spPr>
+        <p:style>
+          <a:lnRef idx="2">
+            <a:schemeClr val="accent1">
+              <a:shade val="15000"/>
+            </a:schemeClr>
+          </a:lnRef>
+          <a:fillRef idx="1">
+            <a:schemeClr val="accent1"/>
+          </a:fillRef>
+          <a:effectRef idx="0">
+            <a:schemeClr val="accent1"/>
+          </a:effectRef>
+          <a:fontRef idx="minor">
+            <a:schemeClr val="lt1"/>
+          </a:fontRef>
+        </p:style>
+        <p:txBody>
+          <a:bodyPr rtlCol="0" anchor="ctr"/>
+          <a:lstStyle/>
+          <a:p>
+            <a:pPr algn="ctr"/>
+            <a:r>
+              <a:rPr lang="en-US" sz="1500" dirty="0">
+                <a:solidFill>
+                  <a:schemeClr val="bg1"/>
+                </a:solidFill>
+              </a:rPr>
+              <a:t>v. </a:t>
+            </a:r>
+            <a:r>
+              <a:rPr lang="en-US" sz="1500" dirty="0" err="1">
+                <a:solidFill>
+                  <a:schemeClr val="bg1"/>
+                </a:solidFill>
+              </a:rPr>
+              <a:t>Parámetros</a:t>
+            </a:r>
+            <a:r>
+              <a:rPr lang="en-US" sz="1500" dirty="0">
+                <a:solidFill>
+                  <a:schemeClr val="bg1"/>
+                </a:solidFill>
+              </a:rPr>
+              <a:t> y K–S test (CDF’s vs EDF’s)</a:t>
+            </a:r>
+          </a:p>
+        </p:txBody>
+      </p:sp>
+      <p:sp>
+        <p:nvSpPr>
+          <p:cNvPr id="60" name="Rectangle: Rounded Corners 59">
+            <a:extLst>
+              <a:ext uri="{FF2B5EF4-FFF2-40B4-BE49-F238E27FC236}">
+                <a16:creationId xmlns:a16="http://schemas.microsoft.com/office/drawing/2014/main" id="{3E505362-F262-7A7D-99B5-B9BB17B75D4E}"/>
+              </a:ext>
+            </a:extLst>
+          </p:cNvPr>
+          <p:cNvSpPr/>
+          <p:nvPr/>
+        </p:nvSpPr>
+        <p:spPr>
+          <a:xfrm>
+            <a:off x="905508" y="4929185"/>
+            <a:ext cx="2624817" cy="540000"/>
+          </a:xfrm>
+          <a:prstGeom prst="roundRect">
+            <a:avLst>
+              <a:gd name="adj" fmla="val 50000"/>
+            </a:avLst>
+          </a:prstGeom>
+          <a:solidFill>
+            <a:srgbClr val="3B3B3B"/>
+          </a:solidFill>
+          <a:ln>
+            <a:noFill/>
+          </a:ln>
+        </p:spPr>
+        <p:style>
+          <a:lnRef idx="2">
+            <a:schemeClr val="accent1">
+              <a:shade val="15000"/>
+            </a:schemeClr>
+          </a:lnRef>
+          <a:fillRef idx="1">
+            <a:schemeClr val="accent1"/>
+          </a:fillRef>
+          <a:effectRef idx="0">
+            <a:schemeClr val="accent1"/>
+          </a:effectRef>
+          <a:fontRef idx="minor">
+            <a:schemeClr val="lt1"/>
+          </a:fontRef>
+        </p:style>
+        <p:txBody>
+          <a:bodyPr rtlCol="0" anchor="ctr"/>
+          <a:lstStyle/>
+          <a:p>
+            <a:pPr algn="ctr"/>
+            <a:r>
+              <a:rPr lang="en-US" sz="1500" dirty="0">
+                <a:solidFill>
+                  <a:schemeClr val="bg1"/>
+                </a:solidFill>
+              </a:rPr>
+              <a:t>vi. </a:t>
+            </a:r>
+            <a:r>
+              <a:rPr lang="en-US" sz="1500" dirty="0" err="1">
+                <a:solidFill>
+                  <a:schemeClr val="bg1"/>
+                </a:solidFill>
+              </a:rPr>
+              <a:t>Síntesis</a:t>
+            </a:r>
+            <a:r>
+              <a:rPr lang="en-US" sz="1500" dirty="0">
+                <a:solidFill>
+                  <a:schemeClr val="bg1"/>
+                </a:solidFill>
+              </a:rPr>
+              <a:t> de </a:t>
+            </a:r>
+            <a:r>
+              <a:rPr lang="en-US" sz="1500" dirty="0" err="1">
+                <a:solidFill>
+                  <a:schemeClr val="bg1"/>
+                </a:solidFill>
+              </a:rPr>
+              <a:t>mejor</a:t>
+            </a:r>
+            <a:r>
+              <a:rPr lang="en-US" sz="1500" dirty="0">
+                <a:solidFill>
+                  <a:schemeClr val="bg1"/>
+                </a:solidFill>
+              </a:rPr>
+              <a:t> </a:t>
+            </a:r>
+            <a:r>
+              <a:rPr lang="en-US" sz="1500" dirty="0" err="1">
+                <a:solidFill>
+                  <a:schemeClr val="bg1"/>
+                </a:solidFill>
+              </a:rPr>
+              <a:t>ajuste</a:t>
+            </a:r>
+            <a:r>
+              <a:rPr lang="en-US" sz="1500" dirty="0">
+                <a:solidFill>
+                  <a:schemeClr val="bg1"/>
+                </a:solidFill>
+              </a:rPr>
+              <a:t> – Nacional y AH</a:t>
+            </a:r>
+            <a:endParaRPr lang="es-CO" sz="1500" dirty="0">
+              <a:solidFill>
+                <a:schemeClr val="bg1"/>
+              </a:solidFill>
+            </a:endParaRPr>
+          </a:p>
+        </p:txBody>
+      </p:sp>
+      <p:sp>
+        <p:nvSpPr>
+          <p:cNvPr id="61" name="Rectangle: Rounded Corners 60">
+            <a:extLst>
+              <a:ext uri="{FF2B5EF4-FFF2-40B4-BE49-F238E27FC236}">
+                <a16:creationId xmlns:a16="http://schemas.microsoft.com/office/drawing/2014/main" id="{E8E0A2DC-235F-32F2-158B-4A5F31181834}"/>
+              </a:ext>
+            </a:extLst>
+          </p:cNvPr>
+          <p:cNvSpPr/>
+          <p:nvPr/>
+        </p:nvSpPr>
+        <p:spPr>
+          <a:xfrm>
+            <a:off x="2018421" y="5672347"/>
+            <a:ext cx="2869936" cy="540000"/>
+          </a:xfrm>
+          <a:prstGeom prst="roundRect">
+            <a:avLst>
+              <a:gd name="adj" fmla="val 50000"/>
+            </a:avLst>
+          </a:prstGeom>
+          <a:solidFill>
+            <a:srgbClr val="3B3B3B"/>
+          </a:solidFill>
+          <a:ln>
+            <a:noFill/>
+          </a:ln>
+        </p:spPr>
+        <p:style>
+          <a:lnRef idx="2">
+            <a:schemeClr val="accent1">
+              <a:shade val="15000"/>
+            </a:schemeClr>
+          </a:lnRef>
+          <a:fillRef idx="1">
+            <a:schemeClr val="accent1"/>
+          </a:fillRef>
+          <a:effectRef idx="0">
+            <a:schemeClr val="accent1"/>
+          </a:effectRef>
+          <a:fontRef idx="minor">
+            <a:schemeClr val="lt1"/>
+          </a:fontRef>
+        </p:style>
+        <p:txBody>
+          <a:bodyPr rtlCol="0" anchor="ctr"/>
+          <a:lstStyle/>
+          <a:p>
+            <a:pPr algn="ctr"/>
+            <a:r>
+              <a:rPr lang="en-US" sz="1500" dirty="0">
+                <a:solidFill>
+                  <a:schemeClr val="bg1"/>
+                </a:solidFill>
+              </a:rPr>
+              <a:t>vii. </a:t>
+            </a:r>
+            <a:r>
+              <a:rPr lang="en-US" sz="1500" dirty="0" err="1">
+                <a:solidFill>
+                  <a:schemeClr val="bg1"/>
+                </a:solidFill>
+              </a:rPr>
+              <a:t>Comparación</a:t>
+            </a:r>
+            <a:r>
+              <a:rPr lang="en-US" sz="1500" dirty="0">
+                <a:solidFill>
+                  <a:schemeClr val="bg1"/>
+                </a:solidFill>
+              </a:rPr>
+              <a:t> con </a:t>
+            </a:r>
+            <a:r>
+              <a:rPr lang="en-US" sz="1500" dirty="0" err="1">
+                <a:solidFill>
+                  <a:schemeClr val="bg1"/>
+                </a:solidFill>
+              </a:rPr>
+              <a:t>distribuciones</a:t>
+            </a:r>
+            <a:r>
+              <a:rPr lang="en-US" sz="1500" dirty="0">
+                <a:solidFill>
+                  <a:schemeClr val="bg1"/>
+                </a:solidFill>
+              </a:rPr>
+              <a:t> </a:t>
+            </a:r>
+            <a:r>
+              <a:rPr lang="en-US" sz="1500" dirty="0" err="1">
+                <a:solidFill>
+                  <a:schemeClr val="bg1"/>
+                </a:solidFill>
+              </a:rPr>
+              <a:t>tradicionales</a:t>
+            </a:r>
+            <a:endParaRPr lang="es-CO" sz="1500" baseline="-25000" dirty="0">
+              <a:solidFill>
+                <a:schemeClr val="bg1"/>
+              </a:solidFill>
+            </a:endParaRPr>
+          </a:p>
+        </p:txBody>
+      </p:sp>
+      <p:cxnSp>
+        <p:nvCxnSpPr>
+          <p:cNvPr id="62" name="Straight Arrow Connector 61">
+            <a:extLst>
+              <a:ext uri="{FF2B5EF4-FFF2-40B4-BE49-F238E27FC236}">
+                <a16:creationId xmlns:a16="http://schemas.microsoft.com/office/drawing/2014/main" id="{F7742024-93C9-E065-FF98-A2010BE85E11}"/>
+              </a:ext>
+            </a:extLst>
+          </p:cNvPr>
+          <p:cNvCxnSpPr>
+            <a:cxnSpLocks/>
+            <a:stCxn id="48" idx="3"/>
+            <a:endCxn id="54" idx="1"/>
+          </p:cNvCxnSpPr>
+          <p:nvPr/>
+        </p:nvCxnSpPr>
+        <p:spPr>
+          <a:xfrm flipV="1">
+            <a:off x="5899641" y="4405899"/>
+            <a:ext cx="347028" cy="7676"/>
+          </a:xfrm>
+          <a:prstGeom prst="straightConnector1">
+            <a:avLst/>
+          </a:prstGeom>
+          <a:ln w="7620">
+            <a:solidFill>
+              <a:schemeClr val="tx1"/>
+            </a:solidFill>
+            <a:tailEnd type="triangle" w="sm" len="lg"/>
+          </a:ln>
+        </p:spPr>
+        <p:style>
+          <a:lnRef idx="1">
+            <a:schemeClr val="accent1"/>
+          </a:lnRef>
+          <a:fillRef idx="0">
+            <a:schemeClr val="accent1"/>
+          </a:fillRef>
+          <a:effectRef idx="0">
+            <a:schemeClr val="accent1"/>
+          </a:effectRef>
+          <a:fontRef idx="minor">
+            <a:schemeClr val="tx1"/>
+          </a:fontRef>
+        </p:style>
+      </p:cxnSp>
+      <p:cxnSp>
+        <p:nvCxnSpPr>
+          <p:cNvPr id="64" name="Straight Arrow Connector 63">
+            <a:extLst>
+              <a:ext uri="{FF2B5EF4-FFF2-40B4-BE49-F238E27FC236}">
+                <a16:creationId xmlns:a16="http://schemas.microsoft.com/office/drawing/2014/main" id="{B2DBBB44-2F73-07EC-6CE6-F4F23DB8407C}"/>
+              </a:ext>
+            </a:extLst>
+          </p:cNvPr>
+          <p:cNvCxnSpPr>
+            <a:cxnSpLocks/>
+            <a:stCxn id="71" idx="1"/>
+            <a:endCxn id="59" idx="3"/>
+          </p:cNvCxnSpPr>
+          <p:nvPr/>
+        </p:nvCxnSpPr>
+        <p:spPr>
+          <a:xfrm flipH="1">
+            <a:off x="6152288" y="5173641"/>
+            <a:ext cx="118503" cy="8093"/>
+          </a:xfrm>
+          <a:prstGeom prst="straightConnector1">
+            <a:avLst/>
+          </a:prstGeom>
+          <a:ln w="7620">
+            <a:solidFill>
+              <a:schemeClr val="tx1"/>
+            </a:solidFill>
+            <a:tailEnd type="triangle" w="sm" len="lg"/>
+          </a:ln>
+        </p:spPr>
+        <p:style>
+          <a:lnRef idx="1">
+            <a:schemeClr val="accent1"/>
+          </a:lnRef>
+          <a:fillRef idx="0">
+            <a:schemeClr val="accent1"/>
+          </a:fillRef>
+          <a:effectRef idx="0">
+            <a:schemeClr val="accent1"/>
+          </a:effectRef>
+          <a:fontRef idx="minor">
+            <a:schemeClr val="tx1"/>
+          </a:fontRef>
+        </p:style>
+      </p:cxnSp>
+      <p:cxnSp>
+        <p:nvCxnSpPr>
+          <p:cNvPr id="65" name="Connector: Elbow 64">
+            <a:extLst>
+              <a:ext uri="{FF2B5EF4-FFF2-40B4-BE49-F238E27FC236}">
+                <a16:creationId xmlns:a16="http://schemas.microsoft.com/office/drawing/2014/main" id="{A5578C3A-A8DB-0329-4606-B3E4C7C3307C}"/>
+              </a:ext>
+            </a:extLst>
+          </p:cNvPr>
+          <p:cNvCxnSpPr>
+            <a:cxnSpLocks/>
+            <a:stCxn id="54" idx="3"/>
+            <a:endCxn id="71" idx="3"/>
+          </p:cNvCxnSpPr>
+          <p:nvPr/>
+        </p:nvCxnSpPr>
+        <p:spPr>
+          <a:xfrm flipH="1">
+            <a:off x="8745275" y="4405899"/>
+            <a:ext cx="78035" cy="767742"/>
+          </a:xfrm>
+          <a:prstGeom prst="bentConnector3">
+            <a:avLst>
+              <a:gd name="adj1" fmla="val -292945"/>
+            </a:avLst>
+          </a:prstGeom>
+          <a:ln w="7620">
+            <a:solidFill>
+              <a:schemeClr val="tx1"/>
+            </a:solidFill>
+            <a:tailEnd type="triangle" w="sm" len="lg"/>
+          </a:ln>
+        </p:spPr>
+        <p:style>
+          <a:lnRef idx="1">
+            <a:schemeClr val="accent1"/>
+          </a:lnRef>
+          <a:fillRef idx="0">
+            <a:schemeClr val="accent1"/>
+          </a:fillRef>
+          <a:effectRef idx="0">
+            <a:schemeClr val="accent1"/>
+          </a:effectRef>
+          <a:fontRef idx="minor">
+            <a:schemeClr val="tx1"/>
+          </a:fontRef>
+        </p:style>
+      </p:cxnSp>
+      <p:cxnSp>
+        <p:nvCxnSpPr>
+          <p:cNvPr id="67" name="Straight Arrow Connector 66">
+            <a:extLst>
+              <a:ext uri="{FF2B5EF4-FFF2-40B4-BE49-F238E27FC236}">
+                <a16:creationId xmlns:a16="http://schemas.microsoft.com/office/drawing/2014/main" id="{8420D562-D5BB-FB84-2321-1568AB5C2565}"/>
+              </a:ext>
+            </a:extLst>
+          </p:cNvPr>
+          <p:cNvCxnSpPr>
+            <a:cxnSpLocks/>
+            <a:stCxn id="59" idx="1"/>
+            <a:endCxn id="60" idx="3"/>
+          </p:cNvCxnSpPr>
+          <p:nvPr/>
+        </p:nvCxnSpPr>
+        <p:spPr>
+          <a:xfrm flipH="1">
+            <a:off x="3530325" y="5181734"/>
+            <a:ext cx="271838" cy="17451"/>
+          </a:xfrm>
+          <a:prstGeom prst="straightConnector1">
+            <a:avLst/>
+          </a:prstGeom>
+          <a:ln w="7620">
+            <a:solidFill>
+              <a:schemeClr val="tx1"/>
+            </a:solidFill>
+            <a:tailEnd type="triangle" w="sm" len="lg"/>
+          </a:ln>
+        </p:spPr>
+        <p:style>
+          <a:lnRef idx="1">
+            <a:schemeClr val="accent1"/>
+          </a:lnRef>
+          <a:fillRef idx="0">
+            <a:schemeClr val="accent1"/>
+          </a:fillRef>
+          <a:effectRef idx="0">
+            <a:schemeClr val="accent1"/>
+          </a:effectRef>
+          <a:fontRef idx="minor">
+            <a:schemeClr val="tx1"/>
+          </a:fontRef>
+        </p:style>
+      </p:cxnSp>
+      <p:cxnSp>
+        <p:nvCxnSpPr>
+          <p:cNvPr id="69" name="Connector: Elbow 68">
+            <a:extLst>
+              <a:ext uri="{FF2B5EF4-FFF2-40B4-BE49-F238E27FC236}">
+                <a16:creationId xmlns:a16="http://schemas.microsoft.com/office/drawing/2014/main" id="{EB008A96-C9E9-BE12-F53D-89E52D0A24F4}"/>
+              </a:ext>
+            </a:extLst>
+          </p:cNvPr>
+          <p:cNvCxnSpPr>
+            <a:cxnSpLocks/>
+            <a:stCxn id="60" idx="1"/>
+            <a:endCxn id="61" idx="1"/>
+          </p:cNvCxnSpPr>
+          <p:nvPr/>
+        </p:nvCxnSpPr>
+        <p:spPr>
+          <a:xfrm rot="10800000" flipH="1" flipV="1">
+            <a:off x="905507" y="5199185"/>
+            <a:ext cx="1112913" cy="743162"/>
+          </a:xfrm>
+          <a:prstGeom prst="bentConnector3">
+            <a:avLst>
+              <a:gd name="adj1" fmla="val -20541"/>
+            </a:avLst>
+          </a:prstGeom>
+          <a:ln w="7620">
+            <a:solidFill>
+              <a:schemeClr val="tx1"/>
+            </a:solidFill>
+            <a:tailEnd type="triangle" w="sm" len="lg"/>
+          </a:ln>
+        </p:spPr>
+        <p:style>
+          <a:lnRef idx="1">
+            <a:schemeClr val="accent1"/>
+          </a:lnRef>
+          <a:fillRef idx="0">
+            <a:schemeClr val="accent1"/>
+          </a:fillRef>
+          <a:effectRef idx="0">
+            <a:schemeClr val="accent1"/>
+          </a:effectRef>
+          <a:fontRef idx="minor">
+            <a:schemeClr val="tx1"/>
+          </a:fontRef>
+        </p:style>
+      </p:cxnSp>
+      <p:cxnSp>
+        <p:nvCxnSpPr>
+          <p:cNvPr id="70" name="Straight Arrow Connector 69">
+            <a:extLst>
+              <a:ext uri="{FF2B5EF4-FFF2-40B4-BE49-F238E27FC236}">
+                <a16:creationId xmlns:a16="http://schemas.microsoft.com/office/drawing/2014/main" id="{5AD65DC3-C17F-F894-C786-5DFC2D245FE3}"/>
+              </a:ext>
+            </a:extLst>
+          </p:cNvPr>
+          <p:cNvCxnSpPr>
+            <a:cxnSpLocks/>
+            <a:stCxn id="61" idx="3"/>
+            <a:endCxn id="118" idx="1"/>
+          </p:cNvCxnSpPr>
+          <p:nvPr/>
+        </p:nvCxnSpPr>
+        <p:spPr>
+          <a:xfrm>
+            <a:off x="4888357" y="5942347"/>
+            <a:ext cx="397973" cy="7129"/>
+          </a:xfrm>
+          <a:prstGeom prst="straightConnector1">
+            <a:avLst/>
+          </a:prstGeom>
+          <a:ln w="7620">
+            <a:solidFill>
+              <a:schemeClr val="tx1"/>
+            </a:solidFill>
+            <a:tailEnd type="triangle" w="sm" len="lg"/>
+          </a:ln>
+        </p:spPr>
+        <p:style>
+          <a:lnRef idx="1">
+            <a:schemeClr val="accent1"/>
+          </a:lnRef>
+          <a:fillRef idx="0">
+            <a:schemeClr val="accent1"/>
+          </a:fillRef>
+          <a:effectRef idx="0">
+            <a:schemeClr val="accent1"/>
+          </a:effectRef>
+          <a:fontRef idx="minor">
+            <a:schemeClr val="tx1"/>
+          </a:fontRef>
+        </p:style>
+      </p:cxnSp>
+      <p:sp>
+        <p:nvSpPr>
+          <p:cNvPr id="71" name="Rectangle: Rounded Corners 70">
+            <a:extLst>
+              <a:ext uri="{FF2B5EF4-FFF2-40B4-BE49-F238E27FC236}">
+                <a16:creationId xmlns:a16="http://schemas.microsoft.com/office/drawing/2014/main" id="{A8D0A771-1F4F-155E-5A2F-E2D83825FDCC}"/>
+              </a:ext>
+            </a:extLst>
+          </p:cNvPr>
+          <p:cNvSpPr/>
+          <p:nvPr/>
+        </p:nvSpPr>
+        <p:spPr>
+          <a:xfrm>
+            <a:off x="6270791" y="4903641"/>
+            <a:ext cx="2474484" cy="540000"/>
+          </a:xfrm>
+          <a:prstGeom prst="roundRect">
+            <a:avLst>
+              <a:gd name="adj" fmla="val 50000"/>
+            </a:avLst>
+          </a:prstGeom>
+          <a:solidFill>
+            <a:srgbClr val="3B3B3B"/>
+          </a:solidFill>
+          <a:ln>
+            <a:noFill/>
+          </a:ln>
+        </p:spPr>
+        <p:style>
+          <a:lnRef idx="2">
+            <a:schemeClr val="accent1">
+              <a:shade val="15000"/>
+            </a:schemeClr>
+          </a:lnRef>
+          <a:fillRef idx="1">
+            <a:schemeClr val="accent1"/>
+          </a:fillRef>
+          <a:effectRef idx="0">
+            <a:schemeClr val="accent1"/>
+          </a:effectRef>
+          <a:fontRef idx="minor">
+            <a:schemeClr val="lt1"/>
+          </a:fontRef>
+        </p:style>
+        <p:txBody>
+          <a:bodyPr rtlCol="0" anchor="ctr"/>
+          <a:lstStyle/>
+          <a:p>
+            <a:pPr algn="ctr"/>
+            <a:r>
+              <a:rPr lang="en-US" sz="1500" dirty="0">
+                <a:solidFill>
+                  <a:schemeClr val="bg1"/>
+                </a:solidFill>
+              </a:rPr>
+              <a:t>iv. </a:t>
+            </a:r>
+            <a:r>
+              <a:rPr lang="en-US" sz="1500" dirty="0" err="1">
+                <a:solidFill>
+                  <a:schemeClr val="bg1"/>
+                </a:solidFill>
+              </a:rPr>
+              <a:t>Funciones</a:t>
+            </a:r>
+            <a:r>
+              <a:rPr lang="en-US" sz="1500" dirty="0">
+                <a:solidFill>
+                  <a:schemeClr val="bg1"/>
+                </a:solidFill>
+              </a:rPr>
+              <a:t> EDF y PDF </a:t>
+            </a:r>
+            <a:r>
+              <a:rPr lang="en-US" sz="1500" dirty="0" err="1">
+                <a:solidFill>
+                  <a:schemeClr val="bg1"/>
+                </a:solidFill>
+              </a:rPr>
+              <a:t>candidatas</a:t>
+            </a:r>
+            <a:endParaRPr lang="es-CO" sz="1500" dirty="0">
+              <a:solidFill>
+                <a:schemeClr val="bg1"/>
+              </a:solidFill>
+            </a:endParaRPr>
+          </a:p>
+        </p:txBody>
+      </p:sp>
+      <p:sp>
+        <p:nvSpPr>
+          <p:cNvPr id="72" name="TextBox 71">
+            <a:extLst>
+              <a:ext uri="{FF2B5EF4-FFF2-40B4-BE49-F238E27FC236}">
+                <a16:creationId xmlns:a16="http://schemas.microsoft.com/office/drawing/2014/main" id="{B915BFE6-9C3A-9F35-64C8-A5EF63481AE4}"/>
+              </a:ext>
+            </a:extLst>
+          </p:cNvPr>
+          <p:cNvSpPr txBox="1"/>
+          <p:nvPr/>
+        </p:nvSpPr>
+        <p:spPr>
+          <a:xfrm>
+            <a:off x="2864098" y="3582346"/>
+            <a:ext cx="4317556" cy="323165"/>
+          </a:xfrm>
+          <a:prstGeom prst="rect">
+            <a:avLst/>
+          </a:prstGeom>
+          <a:noFill/>
+        </p:spPr>
+        <p:txBody>
+          <a:bodyPr wrap="square" rtlCol="0">
+            <a:spAutoFit/>
+          </a:bodyPr>
+          <a:lstStyle/>
+          <a:p>
+            <a:pPr algn="ctr"/>
+            <a:r>
+              <a:rPr lang="en-US" sz="1500" dirty="0" err="1"/>
+              <a:t>Diagrama</a:t>
+            </a:r>
+            <a:r>
+              <a:rPr lang="en-US" sz="1500" dirty="0"/>
+              <a:t> de </a:t>
+            </a:r>
+            <a:r>
+              <a:rPr lang="en-US" sz="1500" dirty="0" err="1"/>
+              <a:t>metodología</a:t>
+            </a:r>
+            <a:r>
+              <a:rPr lang="en-US" sz="1500" dirty="0"/>
+              <a:t> </a:t>
+            </a:r>
+            <a:r>
+              <a:rPr lang="en-US" sz="1500" dirty="0" err="1"/>
+              <a:t>en</a:t>
+            </a:r>
+            <a:r>
+              <a:rPr lang="en-US" sz="1500" dirty="0"/>
+              <a:t> </a:t>
+            </a:r>
+            <a:r>
+              <a:rPr lang="en-US" sz="1500" dirty="0" err="1"/>
+              <a:t>artículo</a:t>
+            </a:r>
+            <a:endParaRPr lang="es-CO" sz="1500" dirty="0"/>
+          </a:p>
+        </p:txBody>
+      </p:sp>
+      <p:sp>
+        <p:nvSpPr>
+          <p:cNvPr id="118" name="Rectangle: Rounded Corners 117">
+            <a:extLst>
+              <a:ext uri="{FF2B5EF4-FFF2-40B4-BE49-F238E27FC236}">
+                <a16:creationId xmlns:a16="http://schemas.microsoft.com/office/drawing/2014/main" id="{428F3B7D-DC6F-A8C9-731D-56977133683C}"/>
+              </a:ext>
+            </a:extLst>
+          </p:cNvPr>
+          <p:cNvSpPr/>
+          <p:nvPr/>
+        </p:nvSpPr>
+        <p:spPr>
+          <a:xfrm>
+            <a:off x="5286330" y="5679476"/>
+            <a:ext cx="2869936" cy="540000"/>
+          </a:xfrm>
+          <a:prstGeom prst="roundRect">
+            <a:avLst>
+              <a:gd name="adj" fmla="val 50000"/>
+            </a:avLst>
+          </a:prstGeom>
+          <a:solidFill>
+            <a:srgbClr val="3B3B3B"/>
+          </a:solidFill>
+          <a:ln>
+            <a:noFill/>
+          </a:ln>
+        </p:spPr>
+        <p:style>
+          <a:lnRef idx="2">
+            <a:schemeClr val="accent1">
+              <a:shade val="15000"/>
+            </a:schemeClr>
+          </a:lnRef>
+          <a:fillRef idx="1">
+            <a:schemeClr val="accent1"/>
+          </a:fillRef>
+          <a:effectRef idx="0">
+            <a:schemeClr val="accent1"/>
+          </a:effectRef>
+          <a:fontRef idx="minor">
+            <a:schemeClr val="lt1"/>
+          </a:fontRef>
+        </p:style>
+        <p:txBody>
+          <a:bodyPr rtlCol="0" anchor="ctr"/>
+          <a:lstStyle/>
+          <a:p>
+            <a:pPr algn="ctr"/>
+            <a:r>
+              <a:rPr lang="en-US" sz="1500" dirty="0">
+                <a:solidFill>
+                  <a:schemeClr val="bg1"/>
+                </a:solidFill>
+              </a:rPr>
+              <a:t>viii. </a:t>
+            </a:r>
+            <a:r>
+              <a:rPr lang="en-US" sz="1500" dirty="0" err="1">
+                <a:solidFill>
+                  <a:schemeClr val="bg1"/>
+                </a:solidFill>
+              </a:rPr>
+              <a:t>Estimación</a:t>
+            </a:r>
+            <a:r>
+              <a:rPr lang="en-US" sz="1500" dirty="0">
+                <a:solidFill>
+                  <a:schemeClr val="bg1"/>
+                </a:solidFill>
+              </a:rPr>
+              <a:t> de </a:t>
+            </a:r>
+            <a:r>
+              <a:rPr lang="en-US" sz="1500" dirty="0" err="1">
+                <a:solidFill>
+                  <a:schemeClr val="bg1"/>
+                </a:solidFill>
+              </a:rPr>
+              <a:t>precipitación</a:t>
+            </a:r>
+            <a:r>
+              <a:rPr lang="en-US" sz="1500" dirty="0">
+                <a:solidFill>
+                  <a:schemeClr val="bg1"/>
+                </a:solidFill>
+              </a:rPr>
+              <a:t> </a:t>
+            </a:r>
+            <a:r>
+              <a:rPr lang="en-US" sz="1500" dirty="0" err="1">
+                <a:solidFill>
+                  <a:schemeClr val="bg1"/>
+                </a:solidFill>
+              </a:rPr>
+              <a:t>máxima</a:t>
+            </a:r>
+            <a:r>
+              <a:rPr lang="en-US" sz="1500" dirty="0">
+                <a:solidFill>
+                  <a:schemeClr val="bg1"/>
+                </a:solidFill>
+              </a:rPr>
+              <a:t> para </a:t>
+            </a:r>
+            <a:r>
+              <a:rPr lang="en-US" sz="1500" dirty="0" err="1">
+                <a:solidFill>
+                  <a:schemeClr val="bg1"/>
+                </a:solidFill>
+              </a:rPr>
+              <a:t>diferentes</a:t>
+            </a:r>
+            <a:r>
+              <a:rPr lang="en-US" sz="1500" dirty="0">
+                <a:solidFill>
+                  <a:schemeClr val="bg1"/>
+                </a:solidFill>
+              </a:rPr>
+              <a:t> Tr</a:t>
+            </a:r>
+            <a:endParaRPr lang="es-CO" sz="1500" baseline="-25000" dirty="0">
+              <a:solidFill>
+                <a:schemeClr val="bg1"/>
+              </a:solidFill>
+            </a:endParaRPr>
+          </a:p>
+        </p:txBody>
+      </p:sp>
+    </p:spTree>
+    <p:extLst>
+      <p:ext uri="{BB962C8B-B14F-4D97-AF65-F5344CB8AC3E}">
+        <p14:creationId xmlns:p14="http://schemas.microsoft.com/office/powerpoint/2010/main" val="255511704"/>
       </p:ext>
     </p:extLst>
   </p:cSld>
@@ -8957,66 +11720,6 @@
 </file>
 
 <file path=customXml/item1.xml><?xml version="1.0" encoding="utf-8"?>
-<?mso-contentType ?>
-<FormTemplates xmlns="http://schemas.microsoft.com/sharepoint/v3/contenttype/forms">
-  <Display>DocumentLibraryForm</Display>
-  <Edit>DocumentLibraryForm</Edit>
-  <New>DocumentLibraryForm</New>
-</FormTemplates>
-</file>
-
-<file path=customXml/item2.xml><?xml version="1.0" encoding="utf-8"?>
-<p:properties xmlns:p="http://schemas.microsoft.com/office/2006/metadata/properties" xmlns:xsi="http://www.w3.org/2001/XMLSchema-instance" xmlns:pc="http://schemas.microsoft.com/office/infopath/2007/PartnerControls">
-  <documentManagement>
-    <NotebookType xmlns="bf3e1746-bde1-4d6e-9c3f-7182572f7502" xsi:nil="true"/>
-    <CultureName xmlns="bf3e1746-bde1-4d6e-9c3f-7182572f7502" xsi:nil="true"/>
-    <Students xmlns="bf3e1746-bde1-4d6e-9c3f-7182572f7502">
-      <UserInfo>
-        <DisplayName/>
-        <AccountId xsi:nil="true"/>
-        <AccountType/>
-      </UserInfo>
-    </Students>
-    <Distribution_Groups xmlns="bf3e1746-bde1-4d6e-9c3f-7182572f7502" xsi:nil="true"/>
-    <FolderType xmlns="bf3e1746-bde1-4d6e-9c3f-7182572f7502" xsi:nil="true"/>
-    <Student_Groups xmlns="bf3e1746-bde1-4d6e-9c3f-7182572f7502">
-      <UserInfo>
-        <DisplayName/>
-        <AccountId xsi:nil="true"/>
-        <AccountType/>
-      </UserInfo>
-    </Student_Groups>
-    <Self_Registration_Enabled xmlns="bf3e1746-bde1-4d6e-9c3f-7182572f7502" xsi:nil="true"/>
-    <TeamsChannelId xmlns="bf3e1746-bde1-4d6e-9c3f-7182572f7502" xsi:nil="true"/>
-    <IsNotebookLocked xmlns="bf3e1746-bde1-4d6e-9c3f-7182572f7502" xsi:nil="true"/>
-    <DefaultSectionNames xmlns="bf3e1746-bde1-4d6e-9c3f-7182572f7502" xsi:nil="true"/>
-    <Is_Collaboration_Space_Locked xmlns="bf3e1746-bde1-4d6e-9c3f-7182572f7502" xsi:nil="true"/>
-    <Invited_Teachers xmlns="bf3e1746-bde1-4d6e-9c3f-7182572f7502" xsi:nil="true"/>
-    <Math_Settings xmlns="bf3e1746-bde1-4d6e-9c3f-7182572f7502" xsi:nil="true"/>
-    <Templates xmlns="bf3e1746-bde1-4d6e-9c3f-7182572f7502" xsi:nil="true"/>
-    <Has_Teacher_Only_SectionGroup xmlns="bf3e1746-bde1-4d6e-9c3f-7182572f7502" xsi:nil="true"/>
-    <AppVersion xmlns="bf3e1746-bde1-4d6e-9c3f-7182572f7502" xsi:nil="true"/>
-    <Invited_Students xmlns="bf3e1746-bde1-4d6e-9c3f-7182572f7502" xsi:nil="true"/>
-    <Owner xmlns="bf3e1746-bde1-4d6e-9c3f-7182572f7502">
-      <UserInfo>
-        <DisplayName/>
-        <AccountId xsi:nil="true"/>
-        <AccountType/>
-      </UserInfo>
-    </Owner>
-    <Teachers xmlns="bf3e1746-bde1-4d6e-9c3f-7182572f7502">
-      <UserInfo>
-        <DisplayName/>
-        <AccountId xsi:nil="true"/>
-        <AccountType/>
-      </UserInfo>
-    </Teachers>
-    <LMS_Mappings xmlns="bf3e1746-bde1-4d6e-9c3f-7182572f7502" xsi:nil="true"/>
-  </documentManagement>
-</p:properties>
-</file>
-
-<file path=customXml/item3.xml><?xml version="1.0" encoding="utf-8"?>
 <ct:contentTypeSchema xmlns:ct="http://schemas.microsoft.com/office/2006/metadata/contentType" xmlns:ma="http://schemas.microsoft.com/office/2006/metadata/properties/metaAttributes" ct:_="" ma:_="" ma:contentTypeName="Document" ma:contentTypeID="0x010100C089011499791B4EB69D0A56FFA67F2B" ma:contentTypeVersion="30" ma:contentTypeDescription="Create a new document." ma:contentTypeScope="" ma:versionID="f76dc847e91b26043a9f85409c9c8da8">
   <xsd:schema xmlns:xsd="http://www.w3.org/2001/XMLSchema" xmlns:xs="http://www.w3.org/2001/XMLSchema" xmlns:p="http://schemas.microsoft.com/office/2006/metadata/properties" xmlns:ns3="bf3e1746-bde1-4d6e-9c3f-7182572f7502" xmlns:ns4="14224164-2045-4b51-92bb-313d0f626d83" targetNamespace="http://schemas.microsoft.com/office/2006/metadata/properties" ma:root="true" ma:fieldsID="e77e75136ac7a83ebab10a30c2d6fe6c" ns3:_="" ns4:_="">
     <xsd:import namespace="bf3e1746-bde1-4d6e-9c3f-7182572f7502"/>
@@ -9407,32 +12110,67 @@
 </ct:contentTypeSchema>
 </file>
 
-<file path=customXml/itemProps1.xml><?xml version="1.0" encoding="utf-8"?>
-<ds:datastoreItem xmlns:ds="http://schemas.openxmlformats.org/officeDocument/2006/customXml" ds:itemID="{B024FD56-CE1B-42FC-9E83-BFBF160724C6}">
-  <ds:schemaRefs>
-    <ds:schemaRef ds:uri="http://schemas.microsoft.com/sharepoint/v3/contenttype/forms"/>
-  </ds:schemaRefs>
-</ds:datastoreItem>
+<file path=customXml/item2.xml><?xml version="1.0" encoding="utf-8"?>
+<p:properties xmlns:p="http://schemas.microsoft.com/office/2006/metadata/properties" xmlns:xsi="http://www.w3.org/2001/XMLSchema-instance" xmlns:pc="http://schemas.microsoft.com/office/infopath/2007/PartnerControls">
+  <documentManagement>
+    <NotebookType xmlns="bf3e1746-bde1-4d6e-9c3f-7182572f7502" xsi:nil="true"/>
+    <CultureName xmlns="bf3e1746-bde1-4d6e-9c3f-7182572f7502" xsi:nil="true"/>
+    <Students xmlns="bf3e1746-bde1-4d6e-9c3f-7182572f7502">
+      <UserInfo>
+        <DisplayName/>
+        <AccountId xsi:nil="true"/>
+        <AccountType/>
+      </UserInfo>
+    </Students>
+    <Distribution_Groups xmlns="bf3e1746-bde1-4d6e-9c3f-7182572f7502" xsi:nil="true"/>
+    <FolderType xmlns="bf3e1746-bde1-4d6e-9c3f-7182572f7502" xsi:nil="true"/>
+    <Student_Groups xmlns="bf3e1746-bde1-4d6e-9c3f-7182572f7502">
+      <UserInfo>
+        <DisplayName/>
+        <AccountId xsi:nil="true"/>
+        <AccountType/>
+      </UserInfo>
+    </Student_Groups>
+    <Self_Registration_Enabled xmlns="bf3e1746-bde1-4d6e-9c3f-7182572f7502" xsi:nil="true"/>
+    <TeamsChannelId xmlns="bf3e1746-bde1-4d6e-9c3f-7182572f7502" xsi:nil="true"/>
+    <IsNotebookLocked xmlns="bf3e1746-bde1-4d6e-9c3f-7182572f7502" xsi:nil="true"/>
+    <DefaultSectionNames xmlns="bf3e1746-bde1-4d6e-9c3f-7182572f7502" xsi:nil="true"/>
+    <Is_Collaboration_Space_Locked xmlns="bf3e1746-bde1-4d6e-9c3f-7182572f7502" xsi:nil="true"/>
+    <Invited_Teachers xmlns="bf3e1746-bde1-4d6e-9c3f-7182572f7502" xsi:nil="true"/>
+    <Math_Settings xmlns="bf3e1746-bde1-4d6e-9c3f-7182572f7502" xsi:nil="true"/>
+    <Templates xmlns="bf3e1746-bde1-4d6e-9c3f-7182572f7502" xsi:nil="true"/>
+    <Has_Teacher_Only_SectionGroup xmlns="bf3e1746-bde1-4d6e-9c3f-7182572f7502" xsi:nil="true"/>
+    <AppVersion xmlns="bf3e1746-bde1-4d6e-9c3f-7182572f7502" xsi:nil="true"/>
+    <Invited_Students xmlns="bf3e1746-bde1-4d6e-9c3f-7182572f7502" xsi:nil="true"/>
+    <Owner xmlns="bf3e1746-bde1-4d6e-9c3f-7182572f7502">
+      <UserInfo>
+        <DisplayName/>
+        <AccountId xsi:nil="true"/>
+        <AccountType/>
+      </UserInfo>
+    </Owner>
+    <Teachers xmlns="bf3e1746-bde1-4d6e-9c3f-7182572f7502">
+      <UserInfo>
+        <DisplayName/>
+        <AccountId xsi:nil="true"/>
+        <AccountType/>
+      </UserInfo>
+    </Teachers>
+    <LMS_Mappings xmlns="bf3e1746-bde1-4d6e-9c3f-7182572f7502" xsi:nil="true"/>
+  </documentManagement>
+</p:properties>
 </file>
 
-<file path=customXml/itemProps2.xml><?xml version="1.0" encoding="utf-8"?>
-<ds:datastoreItem xmlns:ds="http://schemas.openxmlformats.org/officeDocument/2006/customXml" ds:itemID="{DEDD01B8-816B-49B7-8C81-03AB51D87C54}">
-  <ds:schemaRefs>
-    <ds:schemaRef ds:uri="http://www.w3.org/XML/1998/namespace"/>
-    <ds:schemaRef ds:uri="http://purl.org/dc/elements/1.1/"/>
-    <ds:schemaRef ds:uri="http://schemas.microsoft.com/office/2006/documentManagement/types"/>
-    <ds:schemaRef ds:uri="http://schemas.microsoft.com/office/2006/metadata/properties"/>
-    <ds:schemaRef ds:uri="http://schemas.openxmlformats.org/package/2006/metadata/core-properties"/>
-    <ds:schemaRef ds:uri="http://schemas.microsoft.com/office/infopath/2007/PartnerControls"/>
-    <ds:schemaRef ds:uri="14224164-2045-4b51-92bb-313d0f626d83"/>
-    <ds:schemaRef ds:uri="bf3e1746-bde1-4d6e-9c3f-7182572f7502"/>
-    <ds:schemaRef ds:uri="http://purl.org/dc/dcmitype/"/>
-    <ds:schemaRef ds:uri="http://purl.org/dc/terms/"/>
-  </ds:schemaRefs>
-</ds:datastoreItem>
+<file path=customXml/item3.xml><?xml version="1.0" encoding="utf-8"?>
+<?mso-contentType ?>
+<FormTemplates xmlns="http://schemas.microsoft.com/sharepoint/v3/contenttype/forms">
+  <Display>DocumentLibraryForm</Display>
+  <Edit>DocumentLibraryForm</Edit>
+  <New>DocumentLibraryForm</New>
+</FormTemplates>
 </file>
 
-<file path=customXml/itemProps3.xml><?xml version="1.0" encoding="utf-8"?>
+<file path=customXml/itemProps1.xml><?xml version="1.0" encoding="utf-8"?>
 <ds:datastoreItem xmlns:ds="http://schemas.openxmlformats.org/officeDocument/2006/customXml" ds:itemID="{A129B439-51BE-4A7D-9272-FBD057297E66}">
   <ds:schemaRefs>
     <ds:schemaRef ds:uri="http://schemas.microsoft.com/office/2006/metadata/contentType"/>
@@ -9449,4 +12187,29 @@
     <ds:schemaRef ds:uri="http://schemas.microsoft.com/internal/obd"/>
   </ds:schemaRefs>
 </ds:datastoreItem>
+</file>
+
+<file path=customXml/itemProps2.xml><?xml version="1.0" encoding="utf-8"?>
+<ds:datastoreItem xmlns:ds="http://schemas.openxmlformats.org/officeDocument/2006/customXml" ds:itemID="{DEDD01B8-816B-49B7-8C81-03AB51D87C54}">
+  <ds:schemaRefs>
+    <ds:schemaRef ds:uri="http://purl.org/dc/elements/1.1/"/>
+    <ds:schemaRef ds:uri="http://purl.org/dc/terms/"/>
+    <ds:schemaRef ds:uri="http://schemas.microsoft.com/office/2006/metadata/properties"/>
+    <ds:schemaRef ds:uri="14224164-2045-4b51-92bb-313d0f626d83"/>
+    <ds:schemaRef ds:uri="http://schemas.microsoft.com/office/2006/documentManagement/types"/>
+    <ds:schemaRef ds:uri="http://schemas.microsoft.com/office/infopath/2007/PartnerControls"/>
+    <ds:schemaRef ds:uri="http://www.w3.org/XML/1998/namespace"/>
+    <ds:schemaRef ds:uri="http://schemas.openxmlformats.org/package/2006/metadata/core-properties"/>
+    <ds:schemaRef ds:uri="bf3e1746-bde1-4d6e-9c3f-7182572f7502"/>
+    <ds:schemaRef ds:uri="http://purl.org/dc/dcmitype/"/>
+  </ds:schemaRefs>
+</ds:datastoreItem>
+</file>
+
+<file path=customXml/itemProps3.xml><?xml version="1.0" encoding="utf-8"?>
+<ds:datastoreItem xmlns:ds="http://schemas.openxmlformats.org/officeDocument/2006/customXml" ds:itemID="{B024FD56-CE1B-42FC-9E83-BFBF160724C6}">
+  <ds:schemaRefs>
+    <ds:schemaRef ds:uri="http://schemas.microsoft.com/sharepoint/v3/contenttype/forms"/>
+  </ds:schemaRefs>
+</ds:datastoreItem>
 </file>
--- a/tool/PMP/temp/diagram.pptx
+++ b/tool/PMP/temp/diagram.pptx
@@ -227,7 +227,7 @@
             <a:pPr rtl="0"/>
             <a:fld id="{FAB3E6E3-061B-41A2-BBDC-C5312A04A40A}" type="datetime1">
               <a:rPr lang="es-ES" smtClean="0"/>
-              <a:t>08/04/2026</a:t>
+              <a:t>09/04/2026</a:t>
             </a:fld>
             <a:endParaRPr lang="es-ES" dirty="0"/>
           </a:p>
@@ -397,7 +397,7 @@
             <a:pPr rtl="0"/>
             <a:fld id="{2145992C-CBBF-4F24-8325-F5CB0EAAC0E9}" type="datetime1">
               <a:rPr lang="es-ES" noProof="0" smtClean="0"/>
-              <a:t>08/04/2026</a:t>
+              <a:t>09/04/2026</a:t>
             </a:fld>
             <a:endParaRPr lang="es-ES" noProof="0" dirty="0"/>
           </a:p>
@@ -1029,7 +1029,7 @@
             <a:pPr rtl="0"/>
             <a:fld id="{55224D71-97F5-4B9D-B11B-235152E09E96}" type="datetime1">
               <a:rPr lang="es-ES" noProof="0" smtClean="0"/>
-              <a:t>08/04/2026</a:t>
+              <a:t>09/04/2026</a:t>
             </a:fld>
             <a:endParaRPr lang="es-ES" noProof="0" dirty="0"/>
           </a:p>
@@ -1378,7 +1378,7 @@
             <a:pPr rtl="0"/>
             <a:fld id="{2AB3A384-AAB1-4A76-A43B-EFE930A802BF}" type="datetime1">
               <a:rPr lang="es-ES" noProof="0" smtClean="0"/>
-              <a:t>08/04/2026</a:t>
+              <a:t>09/04/2026</a:t>
             </a:fld>
             <a:endParaRPr lang="es-ES" noProof="0" dirty="0"/>
           </a:p>
@@ -1520,7 +1520,7 @@
             <a:pPr rtl="0"/>
             <a:fld id="{95F109E8-29A7-4A4D-BBAF-954B5246DC6B}" type="datetime1">
               <a:rPr lang="es-ES" noProof="0" smtClean="0"/>
-              <a:t>08/04/2026</a:t>
+              <a:t>09/04/2026</a:t>
             </a:fld>
             <a:endParaRPr lang="es-ES" noProof="0" dirty="0"/>
           </a:p>
@@ -1634,7 +1634,7 @@
             <a:pPr rtl="0"/>
             <a:fld id="{3EDF4B7F-437B-43B6-8193-868254AADFEB}" type="datetime1">
               <a:rPr lang="es-ES" noProof="0" smtClean="0"/>
-              <a:t>08/04/2026</a:t>
+              <a:t>09/04/2026</a:t>
             </a:fld>
             <a:endParaRPr lang="es-ES" noProof="0" dirty="0"/>
           </a:p>
@@ -1934,7 +1934,7 @@
             <a:pPr rtl="0"/>
             <a:fld id="{5FD9D2A0-9803-4B3F-A6B6-606959F35242}" type="datetime1">
               <a:rPr lang="es-ES" noProof="0" smtClean="0"/>
-              <a:t>08/04/2026</a:t>
+              <a:t>09/04/2026</a:t>
             </a:fld>
             <a:endParaRPr lang="es-ES" noProof="0" dirty="0"/>
           </a:p>
@@ -2205,7 +2205,7 @@
             <a:pPr rtl="0"/>
             <a:fld id="{B48CB6FA-6884-4007-A174-A67BE7A1CA93}" type="datetime1">
               <a:rPr lang="es-ES" noProof="0" smtClean="0"/>
-              <a:t>08/04/2026</a:t>
+              <a:t>09/04/2026</a:t>
             </a:fld>
             <a:endParaRPr lang="es-ES" noProof="0" dirty="0"/>
           </a:p>
@@ -2476,7 +2476,7 @@
             <a:pPr rtl="0"/>
             <a:fld id="{DCA87387-1199-4F13-92EC-EA845724990E}" type="datetime1">
               <a:rPr lang="es-ES" noProof="0" smtClean="0"/>
-              <a:t>08/04/2026</a:t>
+              <a:t>09/04/2026</a:t>
             </a:fld>
             <a:endParaRPr lang="es-ES" noProof="0" dirty="0"/>
           </a:p>
@@ -2654,7 +2654,7 @@
             <a:pPr rtl="0"/>
             <a:fld id="{0277B9E3-6C0A-45A5-BAE5-CD19B242173D}" type="datetime1">
               <a:rPr lang="es-ES" noProof="0" smtClean="0"/>
-              <a:t>08/04/2026</a:t>
+              <a:t>09/04/2026</a:t>
             </a:fld>
             <a:endParaRPr lang="es-ES" noProof="0" dirty="0"/>
           </a:p>
@@ -2842,7 +2842,7 @@
             <a:pPr rtl="0"/>
             <a:fld id="{AB41DD2C-FA4F-413E-A1B5-23565A0780B7}" type="datetime1">
               <a:rPr lang="es-ES" noProof="0" smtClean="0"/>
-              <a:t>08/04/2026</a:t>
+              <a:t>09/04/2026</a:t>
             </a:fld>
             <a:endParaRPr lang="es-ES" noProof="0" dirty="0"/>
           </a:p>
@@ -3092,7 +3092,7 @@
             <a:pPr rtl="0"/>
             <a:fld id="{0D82DBE2-B5E9-4999-A9C0-55ED93FCE73D}" type="datetime1">
               <a:rPr lang="es-ES" noProof="0" smtClean="0"/>
-              <a:t>08/04/2026</a:t>
+              <a:t>09/04/2026</a:t>
             </a:fld>
             <a:endParaRPr lang="es-ES" noProof="0" dirty="0"/>
           </a:p>
@@ -3342,7 +3342,7 @@
             <a:pPr rtl="0"/>
             <a:fld id="{89B7BC24-C90D-4DAD-A6CB-BBA58C4D57BB}" type="datetime1">
               <a:rPr lang="es-ES" noProof="0" smtClean="0"/>
-              <a:t>08/04/2026</a:t>
+              <a:t>09/04/2026</a:t>
             </a:fld>
             <a:endParaRPr lang="es-ES" noProof="0" dirty="0"/>
           </a:p>
@@ -3605,7 +3605,7 @@
             <a:pPr rtl="0"/>
             <a:fld id="{217D4995-77A4-48E5-92B1-2DC992A39FBB}" type="datetime1">
               <a:rPr lang="es-ES" noProof="0" smtClean="0"/>
-              <a:t>08/04/2026</a:t>
+              <a:t>09/04/2026</a:t>
             </a:fld>
             <a:endParaRPr lang="es-ES" noProof="0" dirty="0"/>
           </a:p>
@@ -3879,7 +3879,7 @@
             <a:pPr rtl="0"/>
             <a:fld id="{AE8112B3-1F24-452F-80DE-56BF301098EC}" type="datetime1">
               <a:rPr lang="es-ES" noProof="0" smtClean="0"/>
-              <a:t>08/04/2026</a:t>
+              <a:t>09/04/2026</a:t>
             </a:fld>
             <a:endParaRPr lang="es-ES" noProof="0" dirty="0"/>
           </a:p>
@@ -4245,7 +4245,7 @@
             <a:pPr rtl="0"/>
             <a:fld id="{39B46DA2-8C2E-44C4-A865-CD3D33CFD45F}" type="datetime1">
               <a:rPr lang="es-ES" noProof="0" smtClean="0"/>
-              <a:t>08/04/2026</a:t>
+              <a:t>09/04/2026</a:t>
             </a:fld>
             <a:endParaRPr lang="es-ES" noProof="0" dirty="0"/>
           </a:p>
@@ -4600,7 +4600,7 @@
             <a:pPr rtl="0"/>
             <a:fld id="{D1525062-C568-4AE5-A98F-45E6D6D3E9AC}" type="datetime1">
               <a:rPr lang="es-ES" noProof="0" smtClean="0"/>
-              <a:t>08/04/2026</a:t>
+              <a:t>09/04/2026</a:t>
             </a:fld>
             <a:endParaRPr lang="es-ES" noProof="0" dirty="0"/>
           </a:p>
@@ -5095,7 +5095,7 @@
             <a:pPr rtl="0"/>
             <a:fld id="{8EBA81B0-EA87-4E7B-A74D-942650D6BCED}" type="datetime1">
               <a:rPr lang="es-ES" noProof="0" smtClean="0"/>
-              <a:t>08/04/2026</a:t>
+              <a:t>09/04/2026</a:t>
             </a:fld>
             <a:endParaRPr lang="es-ES" noProof="0" dirty="0"/>
           </a:p>
@@ -5590,7 +5590,7 @@
             <a:pPr rtl="0"/>
             <a:fld id="{F6653BDA-CE15-46D4-A5A4-C9E9758DEFB2}" type="datetime1">
               <a:rPr lang="es-ES" noProof="0" smtClean="0"/>
-              <a:t>08/04/2026</a:t>
+              <a:t>09/04/2026</a:t>
             </a:fld>
             <a:endParaRPr lang="es-ES" noProof="0" dirty="0"/>
           </a:p>
@@ -5814,7 +5814,7 @@
             <a:pPr rtl="0"/>
             <a:fld id="{72696FBB-EB5C-4293-9014-59E70AE1A5E6}" type="datetime1">
               <a:rPr lang="es-ES" noProof="0" smtClean="0"/>
-              <a:t>08/04/2026</a:t>
+              <a:t>09/04/2026</a:t>
             </a:fld>
             <a:endParaRPr lang="es-ES" noProof="0" dirty="0"/>
           </a:p>
@@ -6270,8 +6270,8 @@
         </p:nvSpPr>
         <p:spPr>
           <a:xfrm>
-            <a:off x="1501647" y="1277189"/>
-            <a:ext cx="2033685" cy="360000"/>
+            <a:off x="1501647" y="913158"/>
+            <a:ext cx="2033685" cy="540000"/>
           </a:xfrm>
           <a:prstGeom prst="roundRect">
             <a:avLst>
@@ -6336,8 +6336,8 @@
         </p:nvSpPr>
         <p:spPr>
           <a:xfrm>
-            <a:off x="3796085" y="1269643"/>
-            <a:ext cx="2214494" cy="360000"/>
+            <a:off x="3796085" y="905612"/>
+            <a:ext cx="2214494" cy="540000"/>
           </a:xfrm>
           <a:prstGeom prst="roundRect">
             <a:avLst>
@@ -6402,8 +6402,8 @@
         </p:nvSpPr>
         <p:spPr>
           <a:xfrm>
-            <a:off x="8294432" y="1283877"/>
-            <a:ext cx="1831773" cy="360000"/>
+            <a:off x="8294432" y="919846"/>
+            <a:ext cx="1831773" cy="540000"/>
           </a:xfrm>
           <a:prstGeom prst="roundRect">
             <a:avLst>
@@ -6468,8 +6468,8 @@
         </p:nvSpPr>
         <p:spPr>
           <a:xfrm>
-            <a:off x="6658131" y="1773204"/>
-            <a:ext cx="1868500" cy="360000"/>
+            <a:off x="6658131" y="1612855"/>
+            <a:ext cx="1868500" cy="540000"/>
           </a:xfrm>
           <a:prstGeom prst="roundRect">
             <a:avLst>
@@ -6538,7 +6538,7 @@
         </p:nvCxnSpPr>
         <p:spPr>
           <a:xfrm flipV="1">
-            <a:off x="3535332" y="1449643"/>
+            <a:off x="3535332" y="1175612"/>
             <a:ext cx="260753" cy="7546"/>
           </a:xfrm>
           <a:prstGeom prst="straightConnector1">
@@ -6580,8 +6580,8 @@
         </p:nvSpPr>
         <p:spPr>
           <a:xfrm>
-            <a:off x="6200526" y="1277189"/>
-            <a:ext cx="1903959" cy="360000"/>
+            <a:off x="6200526" y="913158"/>
+            <a:ext cx="1903959" cy="540000"/>
           </a:xfrm>
           <a:prstGeom prst="roundRect">
             <a:avLst>
@@ -6646,8 +6646,8 @@
         </p:nvSpPr>
         <p:spPr>
           <a:xfrm>
-            <a:off x="4314226" y="1773204"/>
-            <a:ext cx="2135199" cy="360000"/>
+            <a:off x="4314226" y="1612855"/>
+            <a:ext cx="2135199" cy="540000"/>
           </a:xfrm>
           <a:prstGeom prst="roundRect">
             <a:avLst>
@@ -6712,8 +6712,8 @@
         </p:nvSpPr>
         <p:spPr>
           <a:xfrm>
-            <a:off x="1188290" y="1773204"/>
-            <a:ext cx="2870274" cy="360000"/>
+            <a:off x="1188290" y="1612855"/>
+            <a:ext cx="2870274" cy="540000"/>
           </a:xfrm>
           <a:prstGeom prst="roundRect">
             <a:avLst>
@@ -6778,8 +6778,8 @@
         </p:nvSpPr>
         <p:spPr>
           <a:xfrm>
-            <a:off x="1617696" y="2276262"/>
-            <a:ext cx="1246402" cy="360000"/>
+            <a:off x="1425771" y="2315262"/>
+            <a:ext cx="1438327" cy="540000"/>
           </a:xfrm>
           <a:prstGeom prst="roundRect">
             <a:avLst>
@@ -6844,8 +6844,8 @@
         </p:nvSpPr>
         <p:spPr>
           <a:xfrm>
-            <a:off x="3135936" y="2289600"/>
-            <a:ext cx="2350125" cy="360000"/>
+            <a:off x="3135936" y="2328600"/>
+            <a:ext cx="2350125" cy="540000"/>
           </a:xfrm>
           <a:prstGeom prst="roundRect">
             <a:avLst>
@@ -6905,8 +6905,8 @@
         </p:nvSpPr>
         <p:spPr>
           <a:xfrm>
-            <a:off x="5747241" y="2276262"/>
-            <a:ext cx="1873551" cy="360000"/>
+            <a:off x="5747241" y="2315262"/>
+            <a:ext cx="1873551" cy="540000"/>
           </a:xfrm>
           <a:prstGeom prst="roundRect">
             <a:avLst>
@@ -7003,8 +7003,8 @@
         </p:nvSpPr>
         <p:spPr>
           <a:xfrm>
-            <a:off x="7892630" y="2276262"/>
-            <a:ext cx="2200489" cy="360000"/>
+            <a:off x="7892630" y="2315262"/>
+            <a:ext cx="2200489" cy="540000"/>
           </a:xfrm>
           <a:prstGeom prst="roundRect">
             <a:avLst>
@@ -7073,7 +7073,7 @@
         </p:nvCxnSpPr>
         <p:spPr>
           <a:xfrm>
-            <a:off x="6010579" y="1449643"/>
+            <a:off x="6010579" y="1175612"/>
             <a:ext cx="189947" cy="7546"/>
           </a:xfrm>
           <a:prstGeom prst="straightConnector1">
@@ -7119,7 +7119,7 @@
         </p:nvCxnSpPr>
         <p:spPr>
           <a:xfrm>
-            <a:off x="8104485" y="1457189"/>
+            <a:off x="8104485" y="1183158"/>
             <a:ext cx="189947" cy="6688"/>
           </a:xfrm>
           <a:prstGeom prst="straightConnector1">
@@ -7165,7 +7165,7 @@
         </p:nvCxnSpPr>
         <p:spPr>
           <a:xfrm flipH="1">
-            <a:off x="8526631" y="1949688"/>
+            <a:off x="8526631" y="1879339"/>
             <a:ext cx="202256" cy="3516"/>
           </a:xfrm>
           <a:prstGeom prst="straightConnector1">
@@ -7211,8 +7211,8 @@
         </p:nvCxnSpPr>
         <p:spPr>
           <a:xfrm>
-            <a:off x="10126205" y="1463877"/>
-            <a:ext cx="564148" cy="485811"/>
+            <a:off x="10126205" y="1189846"/>
+            <a:ext cx="564148" cy="689493"/>
           </a:xfrm>
           <a:prstGeom prst="bentConnector3">
             <a:avLst>
@@ -7259,7 +7259,7 @@
         </p:nvCxnSpPr>
         <p:spPr>
           <a:xfrm flipH="1">
-            <a:off x="4058564" y="1953204"/>
+            <a:off x="4058564" y="1882855"/>
             <a:ext cx="255662" cy="0"/>
           </a:xfrm>
           <a:prstGeom prst="straightConnector1">
@@ -7305,7 +7305,7 @@
         </p:nvCxnSpPr>
         <p:spPr>
           <a:xfrm>
-            <a:off x="2864098" y="2456262"/>
+            <a:off x="2864098" y="2585262"/>
             <a:ext cx="271838" cy="13338"/>
           </a:xfrm>
           <a:prstGeom prst="straightConnector1">
@@ -7351,7 +7351,7 @@
         </p:nvCxnSpPr>
         <p:spPr>
           <a:xfrm flipV="1">
-            <a:off x="5486061" y="2456262"/>
+            <a:off x="5486061" y="2585262"/>
             <a:ext cx="261180" cy="13338"/>
           </a:xfrm>
           <a:prstGeom prst="straightConnector1">
@@ -7397,12 +7397,12 @@
         </p:nvCxnSpPr>
         <p:spPr>
           <a:xfrm rot="10800000" flipH="1" flipV="1">
-            <a:off x="1188290" y="1953204"/>
-            <a:ext cx="429406" cy="503058"/>
+            <a:off x="1188289" y="1882854"/>
+            <a:ext cx="237481" cy="702407"/>
           </a:xfrm>
           <a:prstGeom prst="bentConnector3">
             <a:avLst>
-              <a:gd name="adj1" fmla="val -53236"/>
+              <a:gd name="adj1" fmla="val -96260"/>
             </a:avLst>
           </a:prstGeom>
           <a:ln w="7620">
@@ -7445,7 +7445,7 @@
         </p:nvCxnSpPr>
         <p:spPr>
           <a:xfrm>
-            <a:off x="7620792" y="2456262"/>
+            <a:off x="7620792" y="2585262"/>
             <a:ext cx="271838" cy="0"/>
           </a:xfrm>
           <a:prstGeom prst="straightConnector1">
@@ -7487,8 +7487,8 @@
         </p:nvSpPr>
         <p:spPr>
           <a:xfrm>
-            <a:off x="8728887" y="1769688"/>
-            <a:ext cx="1961466" cy="360000"/>
+            <a:off x="8728887" y="1609339"/>
+            <a:ext cx="1961466" cy="540000"/>
           </a:xfrm>
           <a:prstGeom prst="roundRect">
             <a:avLst>
@@ -7553,8 +7553,8 @@
         </p:nvSpPr>
         <p:spPr>
           <a:xfrm>
-            <a:off x="1886227" y="4331369"/>
-            <a:ext cx="2358950" cy="360000"/>
+            <a:off x="1786551" y="4405042"/>
+            <a:ext cx="2358950" cy="540000"/>
           </a:xfrm>
           <a:prstGeom prst="roundRect">
             <a:avLst>
@@ -7618,8 +7618,8 @@
         </p:nvSpPr>
         <p:spPr>
           <a:xfrm>
-            <a:off x="4553870" y="4331369"/>
-            <a:ext cx="1873551" cy="360000"/>
+            <a:off x="4454194" y="4405042"/>
+            <a:ext cx="1950940" cy="540000"/>
           </a:xfrm>
           <a:prstGeom prst="roundRect">
             <a:avLst>
@@ -7683,8 +7683,8 @@
         </p:nvSpPr>
         <p:spPr>
           <a:xfrm>
-            <a:off x="6937946" y="3699884"/>
-            <a:ext cx="2340000" cy="360000"/>
+            <a:off x="6937946" y="3595042"/>
+            <a:ext cx="2340000" cy="540000"/>
           </a:xfrm>
           <a:prstGeom prst="roundRect">
             <a:avLst>
@@ -7748,8 +7748,8 @@
         </p:nvSpPr>
         <p:spPr>
           <a:xfrm>
-            <a:off x="6937946" y="4130924"/>
-            <a:ext cx="2333078" cy="360000"/>
+            <a:off x="6937946" y="4236931"/>
+            <a:ext cx="2333078" cy="540000"/>
           </a:xfrm>
           <a:prstGeom prst="roundRect">
             <a:avLst>
@@ -7813,8 +7813,8 @@
         </p:nvSpPr>
         <p:spPr>
           <a:xfrm>
-            <a:off x="6937946" y="4561964"/>
-            <a:ext cx="2333078" cy="360000"/>
+            <a:off x="6937946" y="4878820"/>
+            <a:ext cx="2333078" cy="540000"/>
           </a:xfrm>
           <a:prstGeom prst="roundRect">
             <a:avLst>
@@ -7878,8 +7878,8 @@
         </p:nvSpPr>
         <p:spPr>
           <a:xfrm>
-            <a:off x="6937946" y="4993005"/>
-            <a:ext cx="2333078" cy="360000"/>
+            <a:off x="6937946" y="5520710"/>
+            <a:ext cx="2333078" cy="540000"/>
           </a:xfrm>
           <a:prstGeom prst="roundRect">
             <a:avLst>
@@ -7947,7 +7947,7 @@
         </p:nvCxnSpPr>
         <p:spPr>
           <a:xfrm>
-            <a:off x="4245177" y="4511369"/>
+            <a:off x="4145501" y="4675042"/>
             <a:ext cx="308693" cy="0"/>
           </a:xfrm>
           <a:prstGeom prst="straightConnector1">
@@ -7993,8 +7993,8 @@
         </p:nvCxnSpPr>
         <p:spPr>
           <a:xfrm flipV="1">
-            <a:off x="6427421" y="3879884"/>
-            <a:ext cx="510525" cy="631485"/>
+            <a:off x="6405134" y="3865042"/>
+            <a:ext cx="532812" cy="810000"/>
           </a:xfrm>
           <a:prstGeom prst="straightConnector1">
             <a:avLst/>
@@ -8039,8 +8039,8 @@
         </p:nvCxnSpPr>
         <p:spPr>
           <a:xfrm flipV="1">
-            <a:off x="6427421" y="4310924"/>
-            <a:ext cx="510525" cy="200445"/>
+            <a:off x="6405134" y="4506931"/>
+            <a:ext cx="532812" cy="168111"/>
           </a:xfrm>
           <a:prstGeom prst="straightConnector1">
             <a:avLst/>
@@ -8085,8 +8085,8 @@
         </p:nvCxnSpPr>
         <p:spPr>
           <a:xfrm>
-            <a:off x="6427421" y="4511369"/>
-            <a:ext cx="510525" cy="230595"/>
+            <a:off x="6405134" y="4675042"/>
+            <a:ext cx="532812" cy="473778"/>
           </a:xfrm>
           <a:prstGeom prst="straightConnector1">
             <a:avLst/>
@@ -8131,8 +8131,8 @@
         </p:nvCxnSpPr>
         <p:spPr>
           <a:xfrm>
-            <a:off x="6427421" y="4511369"/>
-            <a:ext cx="510525" cy="661636"/>
+            <a:off x="6405134" y="4675042"/>
+            <a:ext cx="532812" cy="1115668"/>
           </a:xfrm>
           <a:prstGeom prst="straightConnector1">
             <a:avLst/>
@@ -8173,7 +8173,7 @@
         </p:nvSpPr>
         <p:spPr>
           <a:xfrm>
-            <a:off x="3851801" y="870963"/>
+            <a:off x="3786929" y="318409"/>
             <a:ext cx="4317556" cy="323165"/>
           </a:xfrm>
           <a:prstGeom prst="rect">
@@ -8210,7 +8210,7 @@
         </p:nvSpPr>
         <p:spPr>
           <a:xfrm>
-            <a:off x="3946774" y="3325646"/>
+            <a:off x="3825460" y="3105835"/>
             <a:ext cx="4317556" cy="323165"/>
           </a:xfrm>
           <a:prstGeom prst="rect">
@@ -8251,7 +8251,7 @@
         </p:nvCxnSpPr>
         <p:spPr>
           <a:xfrm flipH="1">
-            <a:off x="6449425" y="1953204"/>
+            <a:off x="6449425" y="1882855"/>
             <a:ext cx="208706" cy="0"/>
           </a:xfrm>
           <a:prstGeom prst="straightConnector1">
@@ -8329,1372 +8329,6 @@
       </p:grpSpPr>
       <p:sp>
         <p:nvSpPr>
-          <p:cNvPr id="5" name="Rectangle: Rounded Corners 4">
-            <a:extLst>
-              <a:ext uri="{FF2B5EF4-FFF2-40B4-BE49-F238E27FC236}">
-                <a16:creationId xmlns:a16="http://schemas.microsoft.com/office/drawing/2014/main" id="{324751C4-81EE-679F-AB74-5182442D20B3}"/>
-              </a:ext>
-            </a:extLst>
-          </p:cNvPr>
-          <p:cNvSpPr/>
-          <p:nvPr/>
-        </p:nvSpPr>
-        <p:spPr>
-          <a:xfrm>
-            <a:off x="1501647" y="1277189"/>
-            <a:ext cx="2033685" cy="360000"/>
-          </a:xfrm>
-          <a:prstGeom prst="roundRect">
-            <a:avLst>
-              <a:gd name="adj" fmla="val 50000"/>
-            </a:avLst>
-          </a:prstGeom>
-          <a:solidFill>
-            <a:srgbClr val="3B3B3B"/>
-          </a:solidFill>
-          <a:ln>
-            <a:noFill/>
-          </a:ln>
-        </p:spPr>
-        <p:style>
-          <a:lnRef idx="2">
-            <a:schemeClr val="accent1">
-              <a:shade val="15000"/>
-            </a:schemeClr>
-          </a:lnRef>
-          <a:fillRef idx="1">
-            <a:schemeClr val="accent1"/>
-          </a:fillRef>
-          <a:effectRef idx="0">
-            <a:schemeClr val="accent1"/>
-          </a:effectRef>
-          <a:fontRef idx="minor">
-            <a:schemeClr val="lt1"/>
-          </a:fontRef>
-        </p:style>
-        <p:txBody>
-          <a:bodyPr rtlCol="0" anchor="ctr"/>
-          <a:lstStyle/>
-          <a:p>
-            <a:pPr algn="ctr"/>
-            <a:r>
-              <a:rPr lang="en-US" sz="1500" dirty="0">
-                <a:solidFill>
-                  <a:schemeClr val="bg1"/>
-                </a:solidFill>
-              </a:rPr>
-              <a:t>RAW Data collection</a:t>
-            </a:r>
-            <a:endParaRPr lang="es-CO" sz="1500" dirty="0">
-              <a:solidFill>
-                <a:schemeClr val="bg1"/>
-              </a:solidFill>
-            </a:endParaRPr>
-          </a:p>
-        </p:txBody>
-      </p:sp>
-      <p:sp>
-        <p:nvSpPr>
-          <p:cNvPr id="7" name="Rectangle: Rounded Corners 6">
-            <a:extLst>
-              <a:ext uri="{FF2B5EF4-FFF2-40B4-BE49-F238E27FC236}">
-                <a16:creationId xmlns:a16="http://schemas.microsoft.com/office/drawing/2014/main" id="{79190D7B-CEC4-BADC-8080-9578831682A5}"/>
-              </a:ext>
-            </a:extLst>
-          </p:cNvPr>
-          <p:cNvSpPr/>
-          <p:nvPr/>
-        </p:nvSpPr>
-        <p:spPr>
-          <a:xfrm>
-            <a:off x="3796085" y="1269643"/>
-            <a:ext cx="2214494" cy="360000"/>
-          </a:xfrm>
-          <a:prstGeom prst="roundRect">
-            <a:avLst>
-              <a:gd name="adj" fmla="val 50000"/>
-            </a:avLst>
-          </a:prstGeom>
-          <a:solidFill>
-            <a:srgbClr val="3B3B3B"/>
-          </a:solidFill>
-          <a:ln>
-            <a:noFill/>
-          </a:ln>
-        </p:spPr>
-        <p:style>
-          <a:lnRef idx="2">
-            <a:schemeClr val="accent1">
-              <a:shade val="15000"/>
-            </a:schemeClr>
-          </a:lnRef>
-          <a:fillRef idx="1">
-            <a:schemeClr val="accent1"/>
-          </a:fillRef>
-          <a:effectRef idx="0">
-            <a:schemeClr val="accent1"/>
-          </a:effectRef>
-          <a:fontRef idx="minor">
-            <a:schemeClr val="lt1"/>
-          </a:fontRef>
-        </p:style>
-        <p:txBody>
-          <a:bodyPr rtlCol="0" anchor="ctr"/>
-          <a:lstStyle/>
-          <a:p>
-            <a:pPr algn="ctr"/>
-            <a:r>
-              <a:rPr lang="en-US" sz="1500" dirty="0">
-                <a:solidFill>
-                  <a:schemeClr val="bg1"/>
-                </a:solidFill>
-              </a:rPr>
-              <a:t>Statistical aggregation</a:t>
-            </a:r>
-            <a:endParaRPr lang="es-CO" sz="1500" dirty="0">
-              <a:solidFill>
-                <a:schemeClr val="bg1"/>
-              </a:solidFill>
-            </a:endParaRPr>
-          </a:p>
-        </p:txBody>
-      </p:sp>
-      <p:sp>
-        <p:nvSpPr>
-          <p:cNvPr id="8" name="Rectangle: Rounded Corners 7">
-            <a:extLst>
-              <a:ext uri="{FF2B5EF4-FFF2-40B4-BE49-F238E27FC236}">
-                <a16:creationId xmlns:a16="http://schemas.microsoft.com/office/drawing/2014/main" id="{9B6A06CF-5846-C303-5A70-B973CB90DE0B}"/>
-              </a:ext>
-            </a:extLst>
-          </p:cNvPr>
-          <p:cNvSpPr/>
-          <p:nvPr/>
-        </p:nvSpPr>
-        <p:spPr>
-          <a:xfrm>
-            <a:off x="8294432" y="1283877"/>
-            <a:ext cx="1831773" cy="360000"/>
-          </a:xfrm>
-          <a:prstGeom prst="roundRect">
-            <a:avLst>
-              <a:gd name="adj" fmla="val 50000"/>
-            </a:avLst>
-          </a:prstGeom>
-          <a:solidFill>
-            <a:srgbClr val="3B3B3B"/>
-          </a:solidFill>
-          <a:ln>
-            <a:noFill/>
-          </a:ln>
-        </p:spPr>
-        <p:style>
-          <a:lnRef idx="2">
-            <a:schemeClr val="accent1">
-              <a:shade val="15000"/>
-            </a:schemeClr>
-          </a:lnRef>
-          <a:fillRef idx="1">
-            <a:schemeClr val="accent1"/>
-          </a:fillRef>
-          <a:effectRef idx="0">
-            <a:schemeClr val="accent1"/>
-          </a:effectRef>
-          <a:fontRef idx="minor">
-            <a:schemeClr val="lt1"/>
-          </a:fontRef>
-        </p:style>
-        <p:txBody>
-          <a:bodyPr rtlCol="0" anchor="ctr"/>
-          <a:lstStyle/>
-          <a:p>
-            <a:pPr algn="ctr"/>
-            <a:r>
-              <a:rPr lang="en-US" sz="1500" dirty="0">
-                <a:solidFill>
-                  <a:schemeClr val="bg1"/>
-                </a:solidFill>
-              </a:rPr>
-              <a:t>Outlier detection</a:t>
-            </a:r>
-            <a:endParaRPr lang="es-CO" sz="1500" dirty="0">
-              <a:solidFill>
-                <a:schemeClr val="bg1"/>
-              </a:solidFill>
-            </a:endParaRPr>
-          </a:p>
-        </p:txBody>
-      </p:sp>
-      <p:sp>
-        <p:nvSpPr>
-          <p:cNvPr id="9" name="Rectangle: Rounded Corners 8">
-            <a:extLst>
-              <a:ext uri="{FF2B5EF4-FFF2-40B4-BE49-F238E27FC236}">
-                <a16:creationId xmlns:a16="http://schemas.microsoft.com/office/drawing/2014/main" id="{807C9F9D-2FD1-5530-18E6-EAF8F0CC7A44}"/>
-              </a:ext>
-            </a:extLst>
-          </p:cNvPr>
-          <p:cNvSpPr/>
-          <p:nvPr/>
-        </p:nvSpPr>
-        <p:spPr>
-          <a:xfrm>
-            <a:off x="6658131" y="1773204"/>
-            <a:ext cx="1868500" cy="360000"/>
-          </a:xfrm>
-          <a:prstGeom prst="roundRect">
-            <a:avLst>
-              <a:gd name="adj" fmla="val 50000"/>
-            </a:avLst>
-          </a:prstGeom>
-          <a:solidFill>
-            <a:srgbClr val="3B3B3B"/>
-          </a:solidFill>
-          <a:ln>
-            <a:noFill/>
-          </a:ln>
-        </p:spPr>
-        <p:style>
-          <a:lnRef idx="2">
-            <a:schemeClr val="accent1">
-              <a:shade val="15000"/>
-            </a:schemeClr>
-          </a:lnRef>
-          <a:fillRef idx="1">
-            <a:schemeClr val="accent1"/>
-          </a:fillRef>
-          <a:effectRef idx="0">
-            <a:schemeClr val="accent1"/>
-          </a:effectRef>
-          <a:fontRef idx="minor">
-            <a:schemeClr val="lt1"/>
-          </a:fontRef>
-        </p:style>
-        <p:txBody>
-          <a:bodyPr rtlCol="0" anchor="ctr"/>
-          <a:lstStyle/>
-          <a:p>
-            <a:pPr algn="ctr"/>
-            <a:r>
-              <a:rPr lang="en-US" sz="1500" dirty="0">
-                <a:solidFill>
-                  <a:schemeClr val="bg1"/>
-                </a:solidFill>
-              </a:rPr>
-              <a:t>PDF’s parameters</a:t>
-            </a:r>
-            <a:endParaRPr lang="es-CO" sz="1500" dirty="0">
-              <a:solidFill>
-                <a:schemeClr val="bg1"/>
-              </a:solidFill>
-            </a:endParaRPr>
-          </a:p>
-        </p:txBody>
-      </p:sp>
-      <p:cxnSp>
-        <p:nvCxnSpPr>
-          <p:cNvPr id="15" name="Straight Arrow Connector 14">
-            <a:extLst>
-              <a:ext uri="{FF2B5EF4-FFF2-40B4-BE49-F238E27FC236}">
-                <a16:creationId xmlns:a16="http://schemas.microsoft.com/office/drawing/2014/main" id="{89F7DCA0-8CA8-1FE9-DA74-29FEBB4F1F45}"/>
-              </a:ext>
-            </a:extLst>
-          </p:cNvPr>
-          <p:cNvCxnSpPr>
-            <a:cxnSpLocks/>
-            <a:stCxn id="5" idx="3"/>
-            <a:endCxn id="7" idx="1"/>
-          </p:cNvCxnSpPr>
-          <p:nvPr/>
-        </p:nvCxnSpPr>
-        <p:spPr>
-          <a:xfrm flipV="1">
-            <a:off x="3535332" y="1449643"/>
-            <a:ext cx="260753" cy="7546"/>
-          </a:xfrm>
-          <a:prstGeom prst="straightConnector1">
-            <a:avLst/>
-          </a:prstGeom>
-          <a:ln w="7620">
-            <a:solidFill>
-              <a:schemeClr val="tx1"/>
-            </a:solidFill>
-            <a:tailEnd type="triangle" w="sm" len="lg"/>
-          </a:ln>
-        </p:spPr>
-        <p:style>
-          <a:lnRef idx="1">
-            <a:schemeClr val="accent1"/>
-          </a:lnRef>
-          <a:fillRef idx="0">
-            <a:schemeClr val="accent1"/>
-          </a:fillRef>
-          <a:effectRef idx="0">
-            <a:schemeClr val="accent1"/>
-          </a:effectRef>
-          <a:fontRef idx="minor">
-            <a:schemeClr val="tx1"/>
-          </a:fontRef>
-        </p:style>
-      </p:cxnSp>
-      <p:sp>
-        <p:nvSpPr>
-          <p:cNvPr id="17" name="Rectangle: Rounded Corners 16">
-            <a:extLst>
-              <a:ext uri="{FF2B5EF4-FFF2-40B4-BE49-F238E27FC236}">
-                <a16:creationId xmlns:a16="http://schemas.microsoft.com/office/drawing/2014/main" id="{9F2B6099-D3C7-A610-8CA9-9618B534C9FD}"/>
-              </a:ext>
-            </a:extLst>
-          </p:cNvPr>
-          <p:cNvSpPr/>
-          <p:nvPr/>
-        </p:nvSpPr>
-        <p:spPr>
-          <a:xfrm>
-            <a:off x="6200526" y="1277189"/>
-            <a:ext cx="1903959" cy="360000"/>
-          </a:xfrm>
-          <a:prstGeom prst="roundRect">
-            <a:avLst>
-              <a:gd name="adj" fmla="val 50000"/>
-            </a:avLst>
-          </a:prstGeom>
-          <a:solidFill>
-            <a:srgbClr val="3B3B3B"/>
-          </a:solidFill>
-          <a:ln>
-            <a:noFill/>
-          </a:ln>
-        </p:spPr>
-        <p:style>
-          <a:lnRef idx="2">
-            <a:schemeClr val="accent1">
-              <a:shade val="15000"/>
-            </a:schemeClr>
-          </a:lnRef>
-          <a:fillRef idx="1">
-            <a:schemeClr val="accent1"/>
-          </a:fillRef>
-          <a:effectRef idx="0">
-            <a:schemeClr val="accent1"/>
-          </a:effectRef>
-          <a:fontRef idx="minor">
-            <a:schemeClr val="lt1"/>
-          </a:fontRef>
-        </p:style>
-        <p:txBody>
-          <a:bodyPr rtlCol="0" anchor="ctr"/>
-          <a:lstStyle/>
-          <a:p>
-            <a:pPr algn="ctr"/>
-            <a:r>
-              <a:rPr lang="en-US" sz="1500" dirty="0">
-                <a:solidFill>
-                  <a:schemeClr val="bg1"/>
-                </a:solidFill>
-              </a:rPr>
-              <a:t>Zero &amp; null avoid</a:t>
-            </a:r>
-            <a:endParaRPr lang="es-CO" sz="1500" dirty="0">
-              <a:solidFill>
-                <a:schemeClr val="bg1"/>
-              </a:solidFill>
-            </a:endParaRPr>
-          </a:p>
-        </p:txBody>
-      </p:sp>
-      <p:sp>
-        <p:nvSpPr>
-          <p:cNvPr id="18" name="Rectangle: Rounded Corners 17">
-            <a:extLst>
-              <a:ext uri="{FF2B5EF4-FFF2-40B4-BE49-F238E27FC236}">
-                <a16:creationId xmlns:a16="http://schemas.microsoft.com/office/drawing/2014/main" id="{C88C028D-78F2-8B78-0308-69E0AB16BA07}"/>
-              </a:ext>
-            </a:extLst>
-          </p:cNvPr>
-          <p:cNvSpPr/>
-          <p:nvPr/>
-        </p:nvSpPr>
-        <p:spPr>
-          <a:xfrm>
-            <a:off x="4314226" y="1773204"/>
-            <a:ext cx="2135199" cy="360000"/>
-          </a:xfrm>
-          <a:prstGeom prst="roundRect">
-            <a:avLst>
-              <a:gd name="adj" fmla="val 50000"/>
-            </a:avLst>
-          </a:prstGeom>
-          <a:solidFill>
-            <a:srgbClr val="3B3B3B"/>
-          </a:solidFill>
-          <a:ln>
-            <a:noFill/>
-          </a:ln>
-        </p:spPr>
-        <p:style>
-          <a:lnRef idx="2">
-            <a:schemeClr val="accent1">
-              <a:shade val="15000"/>
-            </a:schemeClr>
-          </a:lnRef>
-          <a:fillRef idx="1">
-            <a:schemeClr val="accent1"/>
-          </a:fillRef>
-          <a:effectRef idx="0">
-            <a:schemeClr val="accent1"/>
-          </a:effectRef>
-          <a:fontRef idx="minor">
-            <a:schemeClr val="lt1"/>
-          </a:fontRef>
-        </p:style>
-        <p:txBody>
-          <a:bodyPr rtlCol="0" anchor="ctr"/>
-          <a:lstStyle/>
-          <a:p>
-            <a:pPr algn="ctr"/>
-            <a:r>
-              <a:rPr lang="en-US" sz="1500" dirty="0">
-                <a:solidFill>
-                  <a:schemeClr val="bg1"/>
-                </a:solidFill>
-              </a:rPr>
-              <a:t>PDF’s &amp; CDF’s values</a:t>
-            </a:r>
-            <a:endParaRPr lang="es-CO" sz="1500" dirty="0">
-              <a:solidFill>
-                <a:schemeClr val="bg1"/>
-              </a:solidFill>
-            </a:endParaRPr>
-          </a:p>
-        </p:txBody>
-      </p:sp>
-      <p:sp>
-        <p:nvSpPr>
-          <p:cNvPr id="19" name="Rectangle: Rounded Corners 18">
-            <a:extLst>
-              <a:ext uri="{FF2B5EF4-FFF2-40B4-BE49-F238E27FC236}">
-                <a16:creationId xmlns:a16="http://schemas.microsoft.com/office/drawing/2014/main" id="{166CC03B-0FC3-FB1D-78D9-E3AD306CA7C0}"/>
-              </a:ext>
-            </a:extLst>
-          </p:cNvPr>
-          <p:cNvSpPr/>
-          <p:nvPr/>
-        </p:nvSpPr>
-        <p:spPr>
-          <a:xfrm>
-            <a:off x="1188290" y="1773204"/>
-            <a:ext cx="2870274" cy="360000"/>
-          </a:xfrm>
-          <a:prstGeom prst="roundRect">
-            <a:avLst>
-              <a:gd name="adj" fmla="val 50000"/>
-            </a:avLst>
-          </a:prstGeom>
-          <a:solidFill>
-            <a:srgbClr val="3B3B3B"/>
-          </a:solidFill>
-          <a:ln>
-            <a:noFill/>
-          </a:ln>
-        </p:spPr>
-        <p:style>
-          <a:lnRef idx="2">
-            <a:schemeClr val="accent1">
-              <a:shade val="15000"/>
-            </a:schemeClr>
-          </a:lnRef>
-          <a:fillRef idx="1">
-            <a:schemeClr val="accent1"/>
-          </a:fillRef>
-          <a:effectRef idx="0">
-            <a:schemeClr val="accent1"/>
-          </a:effectRef>
-          <a:fontRef idx="minor">
-            <a:schemeClr val="lt1"/>
-          </a:fontRef>
-        </p:style>
-        <p:txBody>
-          <a:bodyPr rtlCol="0" anchor="ctr"/>
-          <a:lstStyle/>
-          <a:p>
-            <a:pPr algn="ctr"/>
-            <a:r>
-              <a:rPr lang="en-US" sz="1500" dirty="0">
-                <a:solidFill>
-                  <a:schemeClr val="bg1"/>
-                </a:solidFill>
-              </a:rPr>
-              <a:t>Log(PDF’s) &amp; Log(CDF’s) values</a:t>
-            </a:r>
-            <a:endParaRPr lang="es-CO" sz="1500" dirty="0">
-              <a:solidFill>
-                <a:schemeClr val="bg1"/>
-              </a:solidFill>
-            </a:endParaRPr>
-          </a:p>
-        </p:txBody>
-      </p:sp>
-      <p:sp>
-        <p:nvSpPr>
-          <p:cNvPr id="20" name="Rectangle: Rounded Corners 19">
-            <a:extLst>
-              <a:ext uri="{FF2B5EF4-FFF2-40B4-BE49-F238E27FC236}">
-                <a16:creationId xmlns:a16="http://schemas.microsoft.com/office/drawing/2014/main" id="{3BE536C9-57B5-0FE5-5F91-8E84550749EA}"/>
-              </a:ext>
-            </a:extLst>
-          </p:cNvPr>
-          <p:cNvSpPr/>
-          <p:nvPr/>
-        </p:nvSpPr>
-        <p:spPr>
-          <a:xfrm>
-            <a:off x="1617696" y="2276262"/>
-            <a:ext cx="1246402" cy="360000"/>
-          </a:xfrm>
-          <a:prstGeom prst="roundRect">
-            <a:avLst>
-              <a:gd name="adj" fmla="val 50000"/>
-            </a:avLst>
-          </a:prstGeom>
-          <a:solidFill>
-            <a:srgbClr val="3B3B3B"/>
-          </a:solidFill>
-          <a:ln>
-            <a:noFill/>
-          </a:ln>
-        </p:spPr>
-        <p:style>
-          <a:lnRef idx="2">
-            <a:schemeClr val="accent1">
-              <a:shade val="15000"/>
-            </a:schemeClr>
-          </a:lnRef>
-          <a:fillRef idx="1">
-            <a:schemeClr val="accent1"/>
-          </a:fillRef>
-          <a:effectRef idx="0">
-            <a:schemeClr val="accent1"/>
-          </a:effectRef>
-          <a:fontRef idx="minor">
-            <a:schemeClr val="lt1"/>
-          </a:fontRef>
-        </p:style>
-        <p:txBody>
-          <a:bodyPr rtlCol="0" anchor="ctr"/>
-          <a:lstStyle/>
-          <a:p>
-            <a:pPr algn="ctr"/>
-            <a:r>
-              <a:rPr lang="en-US" sz="1500" dirty="0">
-                <a:solidFill>
-                  <a:schemeClr val="bg1"/>
-                </a:solidFill>
-              </a:rPr>
-              <a:t>EDF’s values</a:t>
-            </a:r>
-            <a:endParaRPr lang="es-CO" sz="1500" dirty="0">
-              <a:solidFill>
-                <a:schemeClr val="bg1"/>
-              </a:solidFill>
-            </a:endParaRPr>
-          </a:p>
-        </p:txBody>
-      </p:sp>
-      <p:sp>
-        <p:nvSpPr>
-          <p:cNvPr id="21" name="Rectangle: Rounded Corners 20">
-            <a:extLst>
-              <a:ext uri="{FF2B5EF4-FFF2-40B4-BE49-F238E27FC236}">
-                <a16:creationId xmlns:a16="http://schemas.microsoft.com/office/drawing/2014/main" id="{F96E9CDE-8455-260C-9BE2-C84A4E82B514}"/>
-              </a:ext>
-            </a:extLst>
-          </p:cNvPr>
-          <p:cNvSpPr/>
-          <p:nvPr/>
-        </p:nvSpPr>
-        <p:spPr>
-          <a:xfrm>
-            <a:off x="3135936" y="2289600"/>
-            <a:ext cx="2350125" cy="360000"/>
-          </a:xfrm>
-          <a:prstGeom prst="roundRect">
-            <a:avLst>
-              <a:gd name="adj" fmla="val 50000"/>
-            </a:avLst>
-          </a:prstGeom>
-          <a:solidFill>
-            <a:srgbClr val="3B3B3B"/>
-          </a:solidFill>
-          <a:ln>
-            <a:noFill/>
-          </a:ln>
-        </p:spPr>
-        <p:style>
-          <a:lnRef idx="2">
-            <a:schemeClr val="accent1">
-              <a:shade val="15000"/>
-            </a:schemeClr>
-          </a:lnRef>
-          <a:fillRef idx="1">
-            <a:schemeClr val="accent1"/>
-          </a:fillRef>
-          <a:effectRef idx="0">
-            <a:schemeClr val="accent1"/>
-          </a:effectRef>
-          <a:fontRef idx="minor">
-            <a:schemeClr val="lt1"/>
-          </a:fontRef>
-        </p:style>
-        <p:txBody>
-          <a:bodyPr rtlCol="0" anchor="ctr"/>
-          <a:lstStyle/>
-          <a:p>
-            <a:pPr algn="ctr"/>
-            <a:r>
-              <a:rPr lang="en-US" sz="1500" dirty="0">
-                <a:solidFill>
-                  <a:schemeClr val="bg1"/>
-                </a:solidFill>
-              </a:rPr>
-              <a:t>K–S test (CDF’s vs EDF’s)</a:t>
-            </a:r>
-          </a:p>
-        </p:txBody>
-      </p:sp>
-      <p:sp>
-        <p:nvSpPr>
-          <p:cNvPr id="22" name="Rectangle: Rounded Corners 21">
-            <a:extLst>
-              <a:ext uri="{FF2B5EF4-FFF2-40B4-BE49-F238E27FC236}">
-                <a16:creationId xmlns:a16="http://schemas.microsoft.com/office/drawing/2014/main" id="{AC0B6E37-EABF-04E5-5D65-CA992FA6FBB1}"/>
-              </a:ext>
-            </a:extLst>
-          </p:cNvPr>
-          <p:cNvSpPr/>
-          <p:nvPr/>
-        </p:nvSpPr>
-        <p:spPr>
-          <a:xfrm>
-            <a:off x="5747241" y="2276262"/>
-            <a:ext cx="1873551" cy="360000"/>
-          </a:xfrm>
-          <a:prstGeom prst="roundRect">
-            <a:avLst>
-              <a:gd name="adj" fmla="val 50000"/>
-            </a:avLst>
-          </a:prstGeom>
-          <a:solidFill>
-            <a:srgbClr val="3B3B3B"/>
-          </a:solidFill>
-          <a:ln>
-            <a:noFill/>
-          </a:ln>
-        </p:spPr>
-        <p:style>
-          <a:lnRef idx="2">
-            <a:schemeClr val="accent1">
-              <a:shade val="15000"/>
-            </a:schemeClr>
-          </a:lnRef>
-          <a:fillRef idx="1">
-            <a:schemeClr val="accent1"/>
-          </a:fillRef>
-          <a:effectRef idx="0">
-            <a:schemeClr val="accent1"/>
-          </a:effectRef>
-          <a:fontRef idx="minor">
-            <a:schemeClr val="lt1"/>
-          </a:fontRef>
-        </p:style>
-        <p:txBody>
-          <a:bodyPr rtlCol="0" anchor="ctr"/>
-          <a:lstStyle/>
-          <a:p>
-            <a:pPr algn="ctr"/>
-            <a:r>
-              <a:rPr lang="en-US" sz="1500" dirty="0">
-                <a:solidFill>
-                  <a:schemeClr val="bg1"/>
-                </a:solidFill>
-              </a:rPr>
-              <a:t>Best Fit (</a:t>
-            </a:r>
-            <a:r>
-              <a:rPr lang="el-GR" sz="1500" dirty="0">
-                <a:solidFill>
-                  <a:schemeClr val="bg1"/>
-                </a:solidFill>
-              </a:rPr>
-              <a:t>Δ</a:t>
-            </a:r>
-            <a:r>
-              <a:rPr lang="es-CO" sz="1500" dirty="0">
-                <a:solidFill>
-                  <a:schemeClr val="bg1"/>
-                </a:solidFill>
-              </a:rPr>
-              <a:t>o &gt; </a:t>
-            </a:r>
-            <a:r>
-              <a:rPr lang="el-GR" sz="1500" dirty="0">
-                <a:solidFill>
-                  <a:schemeClr val="bg1"/>
-                </a:solidFill>
-              </a:rPr>
-              <a:t>Δ</a:t>
-            </a:r>
-            <a:r>
-              <a:rPr lang="en-US" sz="1500" dirty="0">
-                <a:solidFill>
-                  <a:schemeClr val="bg1"/>
-                </a:solidFill>
-              </a:rPr>
-              <a:t>)</a:t>
-            </a:r>
-            <a:endParaRPr lang="es-CO" sz="1500" dirty="0">
-              <a:solidFill>
-                <a:schemeClr val="bg1"/>
-              </a:solidFill>
-            </a:endParaRPr>
-          </a:p>
-        </p:txBody>
-      </p:sp>
-      <p:sp>
-        <p:nvSpPr>
-          <p:cNvPr id="23" name="Rectangle: Rounded Corners 22">
-            <a:extLst>
-              <a:ext uri="{FF2B5EF4-FFF2-40B4-BE49-F238E27FC236}">
-                <a16:creationId xmlns:a16="http://schemas.microsoft.com/office/drawing/2014/main" id="{A9880C90-FC20-5FEC-9900-70A3E76EB665}"/>
-              </a:ext>
-            </a:extLst>
-          </p:cNvPr>
-          <p:cNvSpPr/>
-          <p:nvPr/>
-        </p:nvSpPr>
-        <p:spPr>
-          <a:xfrm>
-            <a:off x="7892630" y="2276262"/>
-            <a:ext cx="2200489" cy="360000"/>
-          </a:xfrm>
-          <a:prstGeom prst="roundRect">
-            <a:avLst>
-              <a:gd name="adj" fmla="val 50000"/>
-            </a:avLst>
-          </a:prstGeom>
-          <a:solidFill>
-            <a:srgbClr val="3B3B3B"/>
-          </a:solidFill>
-          <a:ln>
-            <a:noFill/>
-          </a:ln>
-        </p:spPr>
-        <p:style>
-          <a:lnRef idx="2">
-            <a:schemeClr val="accent1">
-              <a:shade val="15000"/>
-            </a:schemeClr>
-          </a:lnRef>
-          <a:fillRef idx="1">
-            <a:schemeClr val="accent1"/>
-          </a:fillRef>
-          <a:effectRef idx="0">
-            <a:schemeClr val="accent1"/>
-          </a:effectRef>
-          <a:fontRef idx="minor">
-            <a:schemeClr val="lt1"/>
-          </a:fontRef>
-        </p:style>
-        <p:txBody>
-          <a:bodyPr rtlCol="0" anchor="ctr"/>
-          <a:lstStyle/>
-          <a:p>
-            <a:pPr algn="ctr"/>
-            <a:r>
-              <a:rPr lang="en-US" sz="1500" dirty="0">
-                <a:solidFill>
-                  <a:schemeClr val="bg1"/>
-                </a:solidFill>
-              </a:rPr>
-              <a:t>Extreme values for Tr´s</a:t>
-            </a:r>
-            <a:endParaRPr lang="es-CO" sz="1500" baseline="-25000" dirty="0">
-              <a:solidFill>
-                <a:schemeClr val="bg1"/>
-              </a:solidFill>
-            </a:endParaRPr>
-          </a:p>
-        </p:txBody>
-      </p:sp>
-      <p:cxnSp>
-        <p:nvCxnSpPr>
-          <p:cNvPr id="24" name="Straight Arrow Connector 23">
-            <a:extLst>
-              <a:ext uri="{FF2B5EF4-FFF2-40B4-BE49-F238E27FC236}">
-                <a16:creationId xmlns:a16="http://schemas.microsoft.com/office/drawing/2014/main" id="{72B3879C-B00F-C2CB-5D4A-471EAFC552F7}"/>
-              </a:ext>
-            </a:extLst>
-          </p:cNvPr>
-          <p:cNvCxnSpPr>
-            <a:cxnSpLocks/>
-            <a:stCxn id="7" idx="3"/>
-            <a:endCxn id="17" idx="1"/>
-          </p:cNvCxnSpPr>
-          <p:nvPr/>
-        </p:nvCxnSpPr>
-        <p:spPr>
-          <a:xfrm>
-            <a:off x="6010579" y="1449643"/>
-            <a:ext cx="189947" cy="7546"/>
-          </a:xfrm>
-          <a:prstGeom prst="straightConnector1">
-            <a:avLst/>
-          </a:prstGeom>
-          <a:ln w="7620">
-            <a:solidFill>
-              <a:schemeClr val="tx1"/>
-            </a:solidFill>
-            <a:tailEnd type="triangle" w="sm" len="lg"/>
-          </a:ln>
-        </p:spPr>
-        <p:style>
-          <a:lnRef idx="1">
-            <a:schemeClr val="accent1"/>
-          </a:lnRef>
-          <a:fillRef idx="0">
-            <a:schemeClr val="accent1"/>
-          </a:fillRef>
-          <a:effectRef idx="0">
-            <a:schemeClr val="accent1"/>
-          </a:effectRef>
-          <a:fontRef idx="minor">
-            <a:schemeClr val="tx1"/>
-          </a:fontRef>
-        </p:style>
-      </p:cxnSp>
-      <p:cxnSp>
-        <p:nvCxnSpPr>
-          <p:cNvPr id="27" name="Straight Arrow Connector 26">
-            <a:extLst>
-              <a:ext uri="{FF2B5EF4-FFF2-40B4-BE49-F238E27FC236}">
-                <a16:creationId xmlns:a16="http://schemas.microsoft.com/office/drawing/2014/main" id="{C888D6F3-9BA7-5C2B-1929-61498850EE7F}"/>
-              </a:ext>
-            </a:extLst>
-          </p:cNvPr>
-          <p:cNvCxnSpPr>
-            <a:cxnSpLocks/>
-            <a:stCxn id="17" idx="3"/>
-            <a:endCxn id="8" idx="1"/>
-          </p:cNvCxnSpPr>
-          <p:nvPr/>
-        </p:nvCxnSpPr>
-        <p:spPr>
-          <a:xfrm>
-            <a:off x="8104485" y="1457189"/>
-            <a:ext cx="189947" cy="6688"/>
-          </a:xfrm>
-          <a:prstGeom prst="straightConnector1">
-            <a:avLst/>
-          </a:prstGeom>
-          <a:ln w="7620">
-            <a:solidFill>
-              <a:schemeClr val="tx1"/>
-            </a:solidFill>
-            <a:tailEnd type="triangle" w="sm" len="lg"/>
-          </a:ln>
-        </p:spPr>
-        <p:style>
-          <a:lnRef idx="1">
-            <a:schemeClr val="accent1"/>
-          </a:lnRef>
-          <a:fillRef idx="0">
-            <a:schemeClr val="accent1"/>
-          </a:fillRef>
-          <a:effectRef idx="0">
-            <a:schemeClr val="accent1"/>
-          </a:effectRef>
-          <a:fontRef idx="minor">
-            <a:schemeClr val="tx1"/>
-          </a:fontRef>
-        </p:style>
-      </p:cxnSp>
-      <p:cxnSp>
-        <p:nvCxnSpPr>
-          <p:cNvPr id="30" name="Straight Arrow Connector 29">
-            <a:extLst>
-              <a:ext uri="{FF2B5EF4-FFF2-40B4-BE49-F238E27FC236}">
-                <a16:creationId xmlns:a16="http://schemas.microsoft.com/office/drawing/2014/main" id="{A52F4F97-EA7E-E78F-2E54-0B51F42E8064}"/>
-              </a:ext>
-            </a:extLst>
-          </p:cNvPr>
-          <p:cNvCxnSpPr>
-            <a:cxnSpLocks/>
-            <a:stCxn id="56" idx="1"/>
-            <a:endCxn id="9" idx="3"/>
-          </p:cNvCxnSpPr>
-          <p:nvPr/>
-        </p:nvCxnSpPr>
-        <p:spPr>
-          <a:xfrm flipH="1">
-            <a:off x="8526631" y="1949688"/>
-            <a:ext cx="202256" cy="3516"/>
-          </a:xfrm>
-          <a:prstGeom prst="straightConnector1">
-            <a:avLst/>
-          </a:prstGeom>
-          <a:ln w="7620">
-            <a:solidFill>
-              <a:schemeClr val="tx1"/>
-            </a:solidFill>
-            <a:tailEnd type="triangle" w="sm" len="lg"/>
-          </a:ln>
-        </p:spPr>
-        <p:style>
-          <a:lnRef idx="1">
-            <a:schemeClr val="accent1"/>
-          </a:lnRef>
-          <a:fillRef idx="0">
-            <a:schemeClr val="accent1"/>
-          </a:fillRef>
-          <a:effectRef idx="0">
-            <a:schemeClr val="accent1"/>
-          </a:effectRef>
-          <a:fontRef idx="minor">
-            <a:schemeClr val="tx1"/>
-          </a:fontRef>
-        </p:style>
-      </p:cxnSp>
-      <p:cxnSp>
-        <p:nvCxnSpPr>
-          <p:cNvPr id="39" name="Connector: Elbow 38">
-            <a:extLst>
-              <a:ext uri="{FF2B5EF4-FFF2-40B4-BE49-F238E27FC236}">
-                <a16:creationId xmlns:a16="http://schemas.microsoft.com/office/drawing/2014/main" id="{B8ECFA48-125D-E668-8D83-8B35710F01E9}"/>
-              </a:ext>
-            </a:extLst>
-          </p:cNvPr>
-          <p:cNvCxnSpPr>
-            <a:cxnSpLocks/>
-            <a:stCxn id="8" idx="3"/>
-            <a:endCxn id="56" idx="3"/>
-          </p:cNvCxnSpPr>
-          <p:nvPr/>
-        </p:nvCxnSpPr>
-        <p:spPr>
-          <a:xfrm>
-            <a:off x="10126205" y="1463877"/>
-            <a:ext cx="564148" cy="485811"/>
-          </a:xfrm>
-          <a:prstGeom prst="bentConnector3">
-            <a:avLst>
-              <a:gd name="adj1" fmla="val 140521"/>
-            </a:avLst>
-          </a:prstGeom>
-          <a:ln w="7620">
-            <a:solidFill>
-              <a:schemeClr val="tx1"/>
-            </a:solidFill>
-            <a:tailEnd type="triangle" w="sm" len="lg"/>
-          </a:ln>
-        </p:spPr>
-        <p:style>
-          <a:lnRef idx="1">
-            <a:schemeClr val="accent1"/>
-          </a:lnRef>
-          <a:fillRef idx="0">
-            <a:schemeClr val="accent1"/>
-          </a:fillRef>
-          <a:effectRef idx="0">
-            <a:schemeClr val="accent1"/>
-          </a:effectRef>
-          <a:fontRef idx="minor">
-            <a:schemeClr val="tx1"/>
-          </a:fontRef>
-        </p:style>
-      </p:cxnSp>
-      <p:cxnSp>
-        <p:nvCxnSpPr>
-          <p:cNvPr id="41" name="Straight Arrow Connector 40">
-            <a:extLst>
-              <a:ext uri="{FF2B5EF4-FFF2-40B4-BE49-F238E27FC236}">
-                <a16:creationId xmlns:a16="http://schemas.microsoft.com/office/drawing/2014/main" id="{DC53F4A6-E334-F0AE-A004-5AE98CCFE7AA}"/>
-              </a:ext>
-            </a:extLst>
-          </p:cNvPr>
-          <p:cNvCxnSpPr>
-            <a:cxnSpLocks/>
-            <a:stCxn id="18" idx="1"/>
-            <a:endCxn id="19" idx="3"/>
-          </p:cNvCxnSpPr>
-          <p:nvPr/>
-        </p:nvCxnSpPr>
-        <p:spPr>
-          <a:xfrm flipH="1">
-            <a:off x="4058564" y="1953204"/>
-            <a:ext cx="255662" cy="0"/>
-          </a:xfrm>
-          <a:prstGeom prst="straightConnector1">
-            <a:avLst/>
-          </a:prstGeom>
-          <a:ln w="7620">
-            <a:solidFill>
-              <a:schemeClr val="tx1"/>
-            </a:solidFill>
-            <a:tailEnd type="triangle" w="sm" len="lg"/>
-          </a:ln>
-        </p:spPr>
-        <p:style>
-          <a:lnRef idx="1">
-            <a:schemeClr val="accent1"/>
-          </a:lnRef>
-          <a:fillRef idx="0">
-            <a:schemeClr val="accent1"/>
-          </a:fillRef>
-          <a:effectRef idx="0">
-            <a:schemeClr val="accent1"/>
-          </a:effectRef>
-          <a:fontRef idx="minor">
-            <a:schemeClr val="tx1"/>
-          </a:fontRef>
-        </p:style>
-      </p:cxnSp>
-      <p:cxnSp>
-        <p:nvCxnSpPr>
-          <p:cNvPr id="44" name="Straight Arrow Connector 43">
-            <a:extLst>
-              <a:ext uri="{FF2B5EF4-FFF2-40B4-BE49-F238E27FC236}">
-                <a16:creationId xmlns:a16="http://schemas.microsoft.com/office/drawing/2014/main" id="{6316902D-F06F-3D96-3FC7-0E4CD25DB0B0}"/>
-              </a:ext>
-            </a:extLst>
-          </p:cNvPr>
-          <p:cNvCxnSpPr>
-            <a:cxnSpLocks/>
-            <a:stCxn id="20" idx="3"/>
-            <a:endCxn id="21" idx="1"/>
-          </p:cNvCxnSpPr>
-          <p:nvPr/>
-        </p:nvCxnSpPr>
-        <p:spPr>
-          <a:xfrm>
-            <a:off x="2864098" y="2456262"/>
-            <a:ext cx="271838" cy="13338"/>
-          </a:xfrm>
-          <a:prstGeom prst="straightConnector1">
-            <a:avLst/>
-          </a:prstGeom>
-          <a:ln w="7620">
-            <a:solidFill>
-              <a:schemeClr val="tx1"/>
-            </a:solidFill>
-            <a:tailEnd type="triangle" w="sm" len="lg"/>
-          </a:ln>
-        </p:spPr>
-        <p:style>
-          <a:lnRef idx="1">
-            <a:schemeClr val="accent1"/>
-          </a:lnRef>
-          <a:fillRef idx="0">
-            <a:schemeClr val="accent1"/>
-          </a:fillRef>
-          <a:effectRef idx="0">
-            <a:schemeClr val="accent1"/>
-          </a:effectRef>
-          <a:fontRef idx="minor">
-            <a:schemeClr val="tx1"/>
-          </a:fontRef>
-        </p:style>
-      </p:cxnSp>
-      <p:cxnSp>
-        <p:nvCxnSpPr>
-          <p:cNvPr id="47" name="Straight Arrow Connector 46">
-            <a:extLst>
-              <a:ext uri="{FF2B5EF4-FFF2-40B4-BE49-F238E27FC236}">
-                <a16:creationId xmlns:a16="http://schemas.microsoft.com/office/drawing/2014/main" id="{48E947A2-74C6-368D-79F3-9C21B1912A3E}"/>
-              </a:ext>
-            </a:extLst>
-          </p:cNvPr>
-          <p:cNvCxnSpPr>
-            <a:cxnSpLocks/>
-            <a:stCxn id="21" idx="3"/>
-            <a:endCxn id="22" idx="1"/>
-          </p:cNvCxnSpPr>
-          <p:nvPr/>
-        </p:nvCxnSpPr>
-        <p:spPr>
-          <a:xfrm flipV="1">
-            <a:off x="5486061" y="2456262"/>
-            <a:ext cx="261180" cy="13338"/>
-          </a:xfrm>
-          <a:prstGeom prst="straightConnector1">
-            <a:avLst/>
-          </a:prstGeom>
-          <a:ln w="7620">
-            <a:solidFill>
-              <a:schemeClr val="tx1"/>
-            </a:solidFill>
-            <a:tailEnd type="triangle" w="sm" len="lg"/>
-          </a:ln>
-        </p:spPr>
-        <p:style>
-          <a:lnRef idx="1">
-            <a:schemeClr val="accent1"/>
-          </a:lnRef>
-          <a:fillRef idx="0">
-            <a:schemeClr val="accent1"/>
-          </a:fillRef>
-          <a:effectRef idx="0">
-            <a:schemeClr val="accent1"/>
-          </a:effectRef>
-          <a:fontRef idx="minor">
-            <a:schemeClr val="tx1"/>
-          </a:fontRef>
-        </p:style>
-      </p:cxnSp>
-      <p:cxnSp>
-        <p:nvCxnSpPr>
-          <p:cNvPr id="50" name="Connector: Elbow 49">
-            <a:extLst>
-              <a:ext uri="{FF2B5EF4-FFF2-40B4-BE49-F238E27FC236}">
-                <a16:creationId xmlns:a16="http://schemas.microsoft.com/office/drawing/2014/main" id="{5AF39321-0E3F-56F7-9231-595E2B3BA5BC}"/>
-              </a:ext>
-            </a:extLst>
-          </p:cNvPr>
-          <p:cNvCxnSpPr>
-            <a:cxnSpLocks/>
-            <a:stCxn id="19" idx="1"/>
-            <a:endCxn id="20" idx="1"/>
-          </p:cNvCxnSpPr>
-          <p:nvPr/>
-        </p:nvCxnSpPr>
-        <p:spPr>
-          <a:xfrm rot="10800000" flipH="1" flipV="1">
-            <a:off x="1188290" y="1953204"/>
-            <a:ext cx="429406" cy="503058"/>
-          </a:xfrm>
-          <a:prstGeom prst="bentConnector3">
-            <a:avLst>
-              <a:gd name="adj1" fmla="val -53236"/>
-            </a:avLst>
-          </a:prstGeom>
-          <a:ln w="7620">
-            <a:solidFill>
-              <a:schemeClr val="tx1"/>
-            </a:solidFill>
-            <a:tailEnd type="triangle" w="sm" len="lg"/>
-          </a:ln>
-        </p:spPr>
-        <p:style>
-          <a:lnRef idx="1">
-            <a:schemeClr val="accent1"/>
-          </a:lnRef>
-          <a:fillRef idx="0">
-            <a:schemeClr val="accent1"/>
-          </a:fillRef>
-          <a:effectRef idx="0">
-            <a:schemeClr val="accent1"/>
-          </a:effectRef>
-          <a:fontRef idx="minor">
-            <a:schemeClr val="tx1"/>
-          </a:fontRef>
-        </p:style>
-      </p:cxnSp>
-      <p:cxnSp>
-        <p:nvCxnSpPr>
-          <p:cNvPr id="53" name="Straight Arrow Connector 52">
-            <a:extLst>
-              <a:ext uri="{FF2B5EF4-FFF2-40B4-BE49-F238E27FC236}">
-                <a16:creationId xmlns:a16="http://schemas.microsoft.com/office/drawing/2014/main" id="{508A8C5C-7EBE-DE43-2F50-4A2EBE03D56F}"/>
-              </a:ext>
-            </a:extLst>
-          </p:cNvPr>
-          <p:cNvCxnSpPr>
-            <a:cxnSpLocks/>
-            <a:stCxn id="22" idx="3"/>
-            <a:endCxn id="23" idx="1"/>
-          </p:cNvCxnSpPr>
-          <p:nvPr/>
-        </p:nvCxnSpPr>
-        <p:spPr>
-          <a:xfrm>
-            <a:off x="7620792" y="2456262"/>
-            <a:ext cx="271838" cy="0"/>
-          </a:xfrm>
-          <a:prstGeom prst="straightConnector1">
-            <a:avLst/>
-          </a:prstGeom>
-          <a:ln w="7620">
-            <a:solidFill>
-              <a:schemeClr val="tx1"/>
-            </a:solidFill>
-            <a:tailEnd type="triangle" w="sm" len="lg"/>
-          </a:ln>
-        </p:spPr>
-        <p:style>
-          <a:lnRef idx="1">
-            <a:schemeClr val="accent1"/>
-          </a:lnRef>
-          <a:fillRef idx="0">
-            <a:schemeClr val="accent1"/>
-          </a:fillRef>
-          <a:effectRef idx="0">
-            <a:schemeClr val="accent1"/>
-          </a:effectRef>
-          <a:fontRef idx="minor">
-            <a:schemeClr val="tx1"/>
-          </a:fontRef>
-        </p:style>
-      </p:cxnSp>
-      <p:sp>
-        <p:nvSpPr>
-          <p:cNvPr id="56" name="Rectangle: Rounded Corners 55">
-            <a:extLst>
-              <a:ext uri="{FF2B5EF4-FFF2-40B4-BE49-F238E27FC236}">
-                <a16:creationId xmlns:a16="http://schemas.microsoft.com/office/drawing/2014/main" id="{92BBB7EA-DF92-4BC5-4231-F5541475F8B0}"/>
-              </a:ext>
-            </a:extLst>
-          </p:cNvPr>
-          <p:cNvSpPr/>
-          <p:nvPr/>
-        </p:nvSpPr>
-        <p:spPr>
-          <a:xfrm>
-            <a:off x="8728887" y="1769688"/>
-            <a:ext cx="1961466" cy="360000"/>
-          </a:xfrm>
-          <a:prstGeom prst="roundRect">
-            <a:avLst>
-              <a:gd name="adj" fmla="val 50000"/>
-            </a:avLst>
-          </a:prstGeom>
-          <a:solidFill>
-            <a:srgbClr val="3B3B3B"/>
-          </a:solidFill>
-          <a:ln>
-            <a:noFill/>
-          </a:ln>
-        </p:spPr>
-        <p:style>
-          <a:lnRef idx="2">
-            <a:schemeClr val="accent1">
-              <a:shade val="15000"/>
-            </a:schemeClr>
-          </a:lnRef>
-          <a:fillRef idx="1">
-            <a:schemeClr val="accent1"/>
-          </a:fillRef>
-          <a:effectRef idx="0">
-            <a:schemeClr val="accent1"/>
-          </a:effectRef>
-          <a:fontRef idx="minor">
-            <a:schemeClr val="lt1"/>
-          </a:fontRef>
-        </p:style>
-        <p:txBody>
-          <a:bodyPr rtlCol="0" anchor="ctr"/>
-          <a:lstStyle/>
-          <a:p>
-            <a:pPr algn="ctr"/>
-            <a:r>
-              <a:rPr lang="en-US" sz="1500" dirty="0">
-                <a:solidFill>
-                  <a:schemeClr val="bg1"/>
-                </a:solidFill>
-              </a:rPr>
-              <a:t>General n data filter</a:t>
-            </a:r>
-            <a:endParaRPr lang="es-CO" sz="1500" dirty="0">
-              <a:solidFill>
-                <a:schemeClr val="bg1"/>
-              </a:solidFill>
-            </a:endParaRPr>
-          </a:p>
-        </p:txBody>
-      </p:sp>
-      <p:sp>
-        <p:nvSpPr>
-          <p:cNvPr id="186" name="TextBox 185">
-            <a:extLst>
-              <a:ext uri="{FF2B5EF4-FFF2-40B4-BE49-F238E27FC236}">
-                <a16:creationId xmlns:a16="http://schemas.microsoft.com/office/drawing/2014/main" id="{48F82087-BD36-8546-D9AA-807AA7A1C22D}"/>
-              </a:ext>
-            </a:extLst>
-          </p:cNvPr>
-          <p:cNvSpPr txBox="1"/>
-          <p:nvPr/>
-        </p:nvSpPr>
-        <p:spPr>
-          <a:xfrm>
-            <a:off x="3851801" y="870963"/>
-            <a:ext cx="4317556" cy="323165"/>
-          </a:xfrm>
-          <a:prstGeom prst="rect">
-            <a:avLst/>
-          </a:prstGeom>
-          <a:noFill/>
-        </p:spPr>
-        <p:txBody>
-          <a:bodyPr wrap="square" rtlCol="0">
-            <a:spAutoFit/>
-          </a:bodyPr>
-          <a:lstStyle/>
-          <a:p>
-            <a:pPr algn="ctr"/>
-            <a:r>
-              <a:rPr lang="en-US" sz="1500" dirty="0"/>
-              <a:t>Diagram of Station PMP processing</a:t>
-            </a:r>
-            <a:endParaRPr lang="es-CO" sz="1500" dirty="0"/>
-          </a:p>
-        </p:txBody>
-      </p:sp>
-      <p:cxnSp>
-        <p:nvCxnSpPr>
-          <p:cNvPr id="189" name="Straight Arrow Connector 188">
-            <a:extLst>
-              <a:ext uri="{FF2B5EF4-FFF2-40B4-BE49-F238E27FC236}">
-                <a16:creationId xmlns:a16="http://schemas.microsoft.com/office/drawing/2014/main" id="{DBAF8315-9240-6AA0-A19F-7DC7944C7075}"/>
-              </a:ext>
-            </a:extLst>
-          </p:cNvPr>
-          <p:cNvCxnSpPr>
-            <a:cxnSpLocks/>
-            <a:stCxn id="9" idx="1"/>
-            <a:endCxn id="18" idx="3"/>
-          </p:cNvCxnSpPr>
-          <p:nvPr/>
-        </p:nvCxnSpPr>
-        <p:spPr>
-          <a:xfrm flipH="1">
-            <a:off x="6449425" y="1953204"/>
-            <a:ext cx="208706" cy="0"/>
-          </a:xfrm>
-          <a:prstGeom prst="straightConnector1">
-            <a:avLst/>
-          </a:prstGeom>
-          <a:ln w="7620">
-            <a:solidFill>
-              <a:schemeClr val="tx1"/>
-            </a:solidFill>
-            <a:tailEnd type="triangle" w="sm" len="lg"/>
-          </a:ln>
-        </p:spPr>
-        <p:style>
-          <a:lnRef idx="1">
-            <a:schemeClr val="accent1"/>
-          </a:lnRef>
-          <a:fillRef idx="0">
-            <a:schemeClr val="accent1"/>
-          </a:fillRef>
-          <a:effectRef idx="0">
-            <a:schemeClr val="accent1"/>
-          </a:effectRef>
-          <a:fontRef idx="minor">
-            <a:schemeClr val="tx1"/>
-          </a:fontRef>
-        </p:style>
-      </p:cxnSp>
-      <p:sp>
-        <p:nvSpPr>
           <p:cNvPr id="46" name="Rectangle: Rounded Corners 45">
             <a:extLst>
               <a:ext uri="{FF2B5EF4-FFF2-40B4-BE49-F238E27FC236}">
@@ -9707,7 +8341,7 @@
         </p:nvSpPr>
         <p:spPr>
           <a:xfrm>
-            <a:off x="1222089" y="4151121"/>
+            <a:off x="2132155" y="2239981"/>
             <a:ext cx="2465643" cy="540000"/>
           </a:xfrm>
           <a:prstGeom prst="roundRect">
@@ -9805,7 +8439,7 @@
         </p:nvSpPr>
         <p:spPr>
           <a:xfrm>
-            <a:off x="3948485" y="4143575"/>
+            <a:off x="4858551" y="2232435"/>
             <a:ext cx="1951156" cy="540000"/>
           </a:xfrm>
           <a:prstGeom prst="roundRect">
@@ -9915,7 +8549,7 @@
         </p:nvCxnSpPr>
         <p:spPr>
           <a:xfrm flipV="1">
-            <a:off x="3687732" y="4413575"/>
+            <a:off x="4597798" y="2502435"/>
             <a:ext cx="260753" cy="7546"/>
           </a:xfrm>
           <a:prstGeom prst="straightConnector1">
@@ -9957,7 +8591,7 @@
         </p:nvSpPr>
         <p:spPr>
           <a:xfrm>
-            <a:off x="6246669" y="4135899"/>
+            <a:off x="7156735" y="2224759"/>
             <a:ext cx="2576641" cy="540000"/>
           </a:xfrm>
           <a:prstGeom prst="roundRect">
@@ -10087,7 +8721,7 @@
         </p:nvSpPr>
         <p:spPr>
           <a:xfrm>
-            <a:off x="3802163" y="4911734"/>
+            <a:off x="4712229" y="3000594"/>
             <a:ext cx="2350125" cy="540000"/>
           </a:xfrm>
           <a:prstGeom prst="roundRect">
@@ -10164,7 +8798,7 @@
         </p:nvSpPr>
         <p:spPr>
           <a:xfrm>
-            <a:off x="905508" y="4929185"/>
+            <a:off x="1815574" y="3018045"/>
             <a:ext cx="2624817" cy="540000"/>
           </a:xfrm>
           <a:prstGeom prst="roundRect">
@@ -10278,7 +8912,7 @@
         </p:nvSpPr>
         <p:spPr>
           <a:xfrm>
-            <a:off x="2018421" y="5672347"/>
+            <a:off x="2928487" y="3761207"/>
             <a:ext cx="2869936" cy="540000"/>
           </a:xfrm>
           <a:prstGeom prst="roundRect">
@@ -10388,7 +9022,7 @@
         </p:nvCxnSpPr>
         <p:spPr>
           <a:xfrm flipV="1">
-            <a:off x="5899641" y="4405899"/>
+            <a:off x="6809707" y="2494759"/>
             <a:ext cx="347028" cy="7676"/>
           </a:xfrm>
           <a:prstGeom prst="straightConnector1">
@@ -10434,7 +9068,7 @@
         </p:nvCxnSpPr>
         <p:spPr>
           <a:xfrm flipH="1">
-            <a:off x="6152288" y="5173641"/>
+            <a:off x="7062354" y="3262501"/>
             <a:ext cx="118503" cy="8093"/>
           </a:xfrm>
           <a:prstGeom prst="straightConnector1">
@@ -10480,7 +9114,7 @@
         </p:nvCxnSpPr>
         <p:spPr>
           <a:xfrm flipH="1">
-            <a:off x="8745275" y="4405899"/>
+            <a:off x="9655341" y="2494759"/>
             <a:ext cx="78035" cy="767742"/>
           </a:xfrm>
           <a:prstGeom prst="bentConnector3">
@@ -10528,7 +9162,7 @@
         </p:nvCxnSpPr>
         <p:spPr>
           <a:xfrm flipH="1">
-            <a:off x="3530325" y="5181734"/>
+            <a:off x="4440391" y="3270594"/>
             <a:ext cx="271838" cy="17451"/>
           </a:xfrm>
           <a:prstGeom prst="straightConnector1">
@@ -10574,7 +9208,7 @@
         </p:nvCxnSpPr>
         <p:spPr>
           <a:xfrm rot="10800000" flipH="1" flipV="1">
-            <a:off x="905507" y="5199185"/>
+            <a:off x="1815573" y="3288045"/>
             <a:ext cx="1112913" cy="743162"/>
           </a:xfrm>
           <a:prstGeom prst="bentConnector3">
@@ -10622,7 +9256,7 @@
         </p:nvCxnSpPr>
         <p:spPr>
           <a:xfrm>
-            <a:off x="4888357" y="5942347"/>
+            <a:off x="5798423" y="4031207"/>
             <a:ext cx="397973" cy="7129"/>
           </a:xfrm>
           <a:prstGeom prst="straightConnector1">
@@ -10664,7 +9298,7 @@
         </p:nvSpPr>
         <p:spPr>
           <a:xfrm>
-            <a:off x="6270791" y="4903641"/>
+            <a:off x="7180857" y="2992501"/>
             <a:ext cx="2474484" cy="540000"/>
           </a:xfrm>
           <a:prstGeom prst="roundRect">
@@ -10754,7 +9388,7 @@
         </p:nvSpPr>
         <p:spPr>
           <a:xfrm>
-            <a:off x="2864098" y="3582346"/>
+            <a:off x="3774164" y="1671206"/>
             <a:ext cx="4317556" cy="323165"/>
           </a:xfrm>
           <a:prstGeom prst="rect">
@@ -10815,7 +9449,7 @@
         </p:nvSpPr>
         <p:spPr>
           <a:xfrm>
-            <a:off x="5286330" y="5679476"/>
+            <a:off x="6196396" y="3768336"/>
             <a:ext cx="2869936" cy="540000"/>
           </a:xfrm>
           <a:prstGeom prst="roundRect">
@@ -11720,6 +10354,66 @@
 </file>
 
 <file path=customXml/item1.xml><?xml version="1.0" encoding="utf-8"?>
+<?mso-contentType ?>
+<FormTemplates xmlns="http://schemas.microsoft.com/sharepoint/v3/contenttype/forms">
+  <Display>DocumentLibraryForm</Display>
+  <Edit>DocumentLibraryForm</Edit>
+  <New>DocumentLibraryForm</New>
+</FormTemplates>
+</file>
+
+<file path=customXml/item2.xml><?xml version="1.0" encoding="utf-8"?>
+<p:properties xmlns:p="http://schemas.microsoft.com/office/2006/metadata/properties" xmlns:xsi="http://www.w3.org/2001/XMLSchema-instance" xmlns:pc="http://schemas.microsoft.com/office/infopath/2007/PartnerControls">
+  <documentManagement>
+    <NotebookType xmlns="bf3e1746-bde1-4d6e-9c3f-7182572f7502" xsi:nil="true"/>
+    <CultureName xmlns="bf3e1746-bde1-4d6e-9c3f-7182572f7502" xsi:nil="true"/>
+    <Students xmlns="bf3e1746-bde1-4d6e-9c3f-7182572f7502">
+      <UserInfo>
+        <DisplayName/>
+        <AccountId xsi:nil="true"/>
+        <AccountType/>
+      </UserInfo>
+    </Students>
+    <Distribution_Groups xmlns="bf3e1746-bde1-4d6e-9c3f-7182572f7502" xsi:nil="true"/>
+    <FolderType xmlns="bf3e1746-bde1-4d6e-9c3f-7182572f7502" xsi:nil="true"/>
+    <Student_Groups xmlns="bf3e1746-bde1-4d6e-9c3f-7182572f7502">
+      <UserInfo>
+        <DisplayName/>
+        <AccountId xsi:nil="true"/>
+        <AccountType/>
+      </UserInfo>
+    </Student_Groups>
+    <Self_Registration_Enabled xmlns="bf3e1746-bde1-4d6e-9c3f-7182572f7502" xsi:nil="true"/>
+    <TeamsChannelId xmlns="bf3e1746-bde1-4d6e-9c3f-7182572f7502" xsi:nil="true"/>
+    <IsNotebookLocked xmlns="bf3e1746-bde1-4d6e-9c3f-7182572f7502" xsi:nil="true"/>
+    <DefaultSectionNames xmlns="bf3e1746-bde1-4d6e-9c3f-7182572f7502" xsi:nil="true"/>
+    <Is_Collaboration_Space_Locked xmlns="bf3e1746-bde1-4d6e-9c3f-7182572f7502" xsi:nil="true"/>
+    <Invited_Teachers xmlns="bf3e1746-bde1-4d6e-9c3f-7182572f7502" xsi:nil="true"/>
+    <Math_Settings xmlns="bf3e1746-bde1-4d6e-9c3f-7182572f7502" xsi:nil="true"/>
+    <Templates xmlns="bf3e1746-bde1-4d6e-9c3f-7182572f7502" xsi:nil="true"/>
+    <Has_Teacher_Only_SectionGroup xmlns="bf3e1746-bde1-4d6e-9c3f-7182572f7502" xsi:nil="true"/>
+    <AppVersion xmlns="bf3e1746-bde1-4d6e-9c3f-7182572f7502" xsi:nil="true"/>
+    <Invited_Students xmlns="bf3e1746-bde1-4d6e-9c3f-7182572f7502" xsi:nil="true"/>
+    <Owner xmlns="bf3e1746-bde1-4d6e-9c3f-7182572f7502">
+      <UserInfo>
+        <DisplayName/>
+        <AccountId xsi:nil="true"/>
+        <AccountType/>
+      </UserInfo>
+    </Owner>
+    <Teachers xmlns="bf3e1746-bde1-4d6e-9c3f-7182572f7502">
+      <UserInfo>
+        <DisplayName/>
+        <AccountId xsi:nil="true"/>
+        <AccountType/>
+      </UserInfo>
+    </Teachers>
+    <LMS_Mappings xmlns="bf3e1746-bde1-4d6e-9c3f-7182572f7502" xsi:nil="true"/>
+  </documentManagement>
+</p:properties>
+</file>
+
+<file path=customXml/item3.xml><?xml version="1.0" encoding="utf-8"?>
 <ct:contentTypeSchema xmlns:ct="http://schemas.microsoft.com/office/2006/metadata/contentType" xmlns:ma="http://schemas.microsoft.com/office/2006/metadata/properties/metaAttributes" ct:_="" ma:_="" ma:contentTypeName="Document" ma:contentTypeID="0x010100C089011499791B4EB69D0A56FFA67F2B" ma:contentTypeVersion="30" ma:contentTypeDescription="Create a new document." ma:contentTypeScope="" ma:versionID="f76dc847e91b26043a9f85409c9c8da8">
   <xsd:schema xmlns:xsd="http://www.w3.org/2001/XMLSchema" xmlns:xs="http://www.w3.org/2001/XMLSchema" xmlns:p="http://schemas.microsoft.com/office/2006/metadata/properties" xmlns:ns3="bf3e1746-bde1-4d6e-9c3f-7182572f7502" xmlns:ns4="14224164-2045-4b51-92bb-313d0f626d83" targetNamespace="http://schemas.microsoft.com/office/2006/metadata/properties" ma:root="true" ma:fieldsID="e77e75136ac7a83ebab10a30c2d6fe6c" ns3:_="" ns4:_="">
     <xsd:import namespace="bf3e1746-bde1-4d6e-9c3f-7182572f7502"/>
@@ -12110,67 +10804,32 @@
 </ct:contentTypeSchema>
 </file>
 
-<file path=customXml/item2.xml><?xml version="1.0" encoding="utf-8"?>
-<p:properties xmlns:p="http://schemas.microsoft.com/office/2006/metadata/properties" xmlns:xsi="http://www.w3.org/2001/XMLSchema-instance" xmlns:pc="http://schemas.microsoft.com/office/infopath/2007/PartnerControls">
-  <documentManagement>
-    <NotebookType xmlns="bf3e1746-bde1-4d6e-9c3f-7182572f7502" xsi:nil="true"/>
-    <CultureName xmlns="bf3e1746-bde1-4d6e-9c3f-7182572f7502" xsi:nil="true"/>
-    <Students xmlns="bf3e1746-bde1-4d6e-9c3f-7182572f7502">
-      <UserInfo>
-        <DisplayName/>
-        <AccountId xsi:nil="true"/>
-        <AccountType/>
-      </UserInfo>
-    </Students>
-    <Distribution_Groups xmlns="bf3e1746-bde1-4d6e-9c3f-7182572f7502" xsi:nil="true"/>
-    <FolderType xmlns="bf3e1746-bde1-4d6e-9c3f-7182572f7502" xsi:nil="true"/>
-    <Student_Groups xmlns="bf3e1746-bde1-4d6e-9c3f-7182572f7502">
-      <UserInfo>
-        <DisplayName/>
-        <AccountId xsi:nil="true"/>
-        <AccountType/>
-      </UserInfo>
-    </Student_Groups>
-    <Self_Registration_Enabled xmlns="bf3e1746-bde1-4d6e-9c3f-7182572f7502" xsi:nil="true"/>
-    <TeamsChannelId xmlns="bf3e1746-bde1-4d6e-9c3f-7182572f7502" xsi:nil="true"/>
-    <IsNotebookLocked xmlns="bf3e1746-bde1-4d6e-9c3f-7182572f7502" xsi:nil="true"/>
-    <DefaultSectionNames xmlns="bf3e1746-bde1-4d6e-9c3f-7182572f7502" xsi:nil="true"/>
-    <Is_Collaboration_Space_Locked xmlns="bf3e1746-bde1-4d6e-9c3f-7182572f7502" xsi:nil="true"/>
-    <Invited_Teachers xmlns="bf3e1746-bde1-4d6e-9c3f-7182572f7502" xsi:nil="true"/>
-    <Math_Settings xmlns="bf3e1746-bde1-4d6e-9c3f-7182572f7502" xsi:nil="true"/>
-    <Templates xmlns="bf3e1746-bde1-4d6e-9c3f-7182572f7502" xsi:nil="true"/>
-    <Has_Teacher_Only_SectionGroup xmlns="bf3e1746-bde1-4d6e-9c3f-7182572f7502" xsi:nil="true"/>
-    <AppVersion xmlns="bf3e1746-bde1-4d6e-9c3f-7182572f7502" xsi:nil="true"/>
-    <Invited_Students xmlns="bf3e1746-bde1-4d6e-9c3f-7182572f7502" xsi:nil="true"/>
-    <Owner xmlns="bf3e1746-bde1-4d6e-9c3f-7182572f7502">
-      <UserInfo>
-        <DisplayName/>
-        <AccountId xsi:nil="true"/>
-        <AccountType/>
-      </UserInfo>
-    </Owner>
-    <Teachers xmlns="bf3e1746-bde1-4d6e-9c3f-7182572f7502">
-      <UserInfo>
-        <DisplayName/>
-        <AccountId xsi:nil="true"/>
-        <AccountType/>
-      </UserInfo>
-    </Teachers>
-    <LMS_Mappings xmlns="bf3e1746-bde1-4d6e-9c3f-7182572f7502" xsi:nil="true"/>
-  </documentManagement>
-</p:properties>
+<file path=customXml/itemProps1.xml><?xml version="1.0" encoding="utf-8"?>
+<ds:datastoreItem xmlns:ds="http://schemas.openxmlformats.org/officeDocument/2006/customXml" ds:itemID="{B024FD56-CE1B-42FC-9E83-BFBF160724C6}">
+  <ds:schemaRefs>
+    <ds:schemaRef ds:uri="http://schemas.microsoft.com/sharepoint/v3/contenttype/forms"/>
+  </ds:schemaRefs>
+</ds:datastoreItem>
 </file>
 
-<file path=customXml/item3.xml><?xml version="1.0" encoding="utf-8"?>
-<?mso-contentType ?>
-<FormTemplates xmlns="http://schemas.microsoft.com/sharepoint/v3/contenttype/forms">
-  <Display>DocumentLibraryForm</Display>
-  <Edit>DocumentLibraryForm</Edit>
-  <New>DocumentLibraryForm</New>
-</FormTemplates>
+<file path=customXml/itemProps2.xml><?xml version="1.0" encoding="utf-8"?>
+<ds:datastoreItem xmlns:ds="http://schemas.openxmlformats.org/officeDocument/2006/customXml" ds:itemID="{DEDD01B8-816B-49B7-8C81-03AB51D87C54}">
+  <ds:schemaRefs>
+    <ds:schemaRef ds:uri="http://purl.org/dc/dcmitype/"/>
+    <ds:schemaRef ds:uri="http://purl.org/dc/elements/1.1/"/>
+    <ds:schemaRef ds:uri="http://schemas.microsoft.com/office/2006/metadata/properties"/>
+    <ds:schemaRef ds:uri="14224164-2045-4b51-92bb-313d0f626d83"/>
+    <ds:schemaRef ds:uri="http://schemas.microsoft.com/office/2006/documentManagement/types"/>
+    <ds:schemaRef ds:uri="http://purl.org/dc/terms/"/>
+    <ds:schemaRef ds:uri="http://www.w3.org/XML/1998/namespace"/>
+    <ds:schemaRef ds:uri="bf3e1746-bde1-4d6e-9c3f-7182572f7502"/>
+    <ds:schemaRef ds:uri="http://schemas.microsoft.com/office/infopath/2007/PartnerControls"/>
+    <ds:schemaRef ds:uri="http://schemas.openxmlformats.org/package/2006/metadata/core-properties"/>
+  </ds:schemaRefs>
+</ds:datastoreItem>
 </file>
 
-<file path=customXml/itemProps1.xml><?xml version="1.0" encoding="utf-8"?>
+<file path=customXml/itemProps3.xml><?xml version="1.0" encoding="utf-8"?>
 <ds:datastoreItem xmlns:ds="http://schemas.openxmlformats.org/officeDocument/2006/customXml" ds:itemID="{A129B439-51BE-4A7D-9272-FBD057297E66}">
   <ds:schemaRefs>
     <ds:schemaRef ds:uri="http://schemas.microsoft.com/office/2006/metadata/contentType"/>
@@ -12187,29 +10846,4 @@
     <ds:schemaRef ds:uri="http://schemas.microsoft.com/internal/obd"/>
   </ds:schemaRefs>
 </ds:datastoreItem>
-</file>
-
-<file path=customXml/itemProps2.xml><?xml version="1.0" encoding="utf-8"?>
-<ds:datastoreItem xmlns:ds="http://schemas.openxmlformats.org/officeDocument/2006/customXml" ds:itemID="{DEDD01B8-816B-49B7-8C81-03AB51D87C54}">
-  <ds:schemaRefs>
-    <ds:schemaRef ds:uri="http://purl.org/dc/elements/1.1/"/>
-    <ds:schemaRef ds:uri="http://purl.org/dc/terms/"/>
-    <ds:schemaRef ds:uri="http://schemas.microsoft.com/office/2006/metadata/properties"/>
-    <ds:schemaRef ds:uri="14224164-2045-4b51-92bb-313d0f626d83"/>
-    <ds:schemaRef ds:uri="http://schemas.microsoft.com/office/2006/documentManagement/types"/>
-    <ds:schemaRef ds:uri="http://schemas.microsoft.com/office/infopath/2007/PartnerControls"/>
-    <ds:schemaRef ds:uri="http://www.w3.org/XML/1998/namespace"/>
-    <ds:schemaRef ds:uri="http://schemas.openxmlformats.org/package/2006/metadata/core-properties"/>
-    <ds:schemaRef ds:uri="bf3e1746-bde1-4d6e-9c3f-7182572f7502"/>
-    <ds:schemaRef ds:uri="http://purl.org/dc/dcmitype/"/>
-  </ds:schemaRefs>
-</ds:datastoreItem>
-</file>
-
-<file path=customXml/itemProps3.xml><?xml version="1.0" encoding="utf-8"?>
-<ds:datastoreItem xmlns:ds="http://schemas.openxmlformats.org/officeDocument/2006/customXml" ds:itemID="{B024FD56-CE1B-42FC-9E83-BFBF160724C6}">
-  <ds:schemaRefs>
-    <ds:schemaRef ds:uri="http://schemas.microsoft.com/sharepoint/v3/contenttype/forms"/>
-  </ds:schemaRefs>
-</ds:datastoreItem>
 </file>